--- a/content/decks/media-studies/media-studies-s1-lesson-06-editing.pptx
+++ b/content/decks/media-studies/media-studies-s1-lesson-06-editing.pptx
@@ -1305,7 +1305,7 @@
           <a:p>
             <a:r>
               <a:rPr lang="en-US" dirty="0"/>
-              <a:t>Stieglitz called the series Music because it works the way music does: nothing in a single frame carries it, and the order and the intervals do. That is the claim editing makes.</a:t>
+              <a:t>The clap-tally pair: a dense-cut sequence against the one-take. When the room claps every cut in the second clip, the silence is the point. Not cutting is also an editing decision, and this photograph is what that decision costs to make.</a:t>
             </a:r>
             <a:endParaRPr lang="en-US" dirty="0"/>
           </a:p>
@@ -6087,7 +6087,7 @@
       </p:grpSpPr>
       <p:pic>
         <p:nvPicPr>
-          <p:cNvPr id="2" name="Image 0" descr="/Users/dogan/Documents/Vaults/Courses/wiki/classes/media-studies/decks/_build/img/crops/stieglitz-clouds_a1777.jpg">    </p:cNvPr>
+          <p:cNvPr id="2" name="Image 0" descr="/Users/dogan/Documents/Vaults/Courses/wiki/classes/media-studies/decks/_build/img/crops/adolescence-bts_a1777.jpg">    </p:cNvPr>
           <p:cNvPicPr>
             <a:picLocks noChangeAspect="1"/>
           </p:cNvPicPr>
@@ -6162,7 +6162,7 @@
                 <a:ea typeface="Arial" pitchFamily="34" charset="-122"/>
                 <a:cs typeface="Arial" pitchFamily="34" charset="-120"/>
               </a:rPr>
-              <a:t>DURATION · MEANING MADE BY ORDER</a:t>
+              <a:t>DURATION · THE CUT YOU NEVER GOT</a:t>
             </a:r>
             <a:endParaRPr lang="en-US" sz="1100" dirty="0"/>
           </a:p>
@@ -6247,7 +6247,7 @@
                 <a:ea typeface="Georgia" pitchFamily="34" charset="-122"/>
                 <a:cs typeface="Georgia" pitchFamily="34" charset="-120"/>
               </a:rPr>
-              <a:t>One frame from a work whose title is the argument: meaning assembled by sequence, not by any single picture.</a:t>
+              <a:t>Two grips carry the camera rig mid-take. One episode, one shot: every minute without a cut was walked, carried and rehearsed.</a:t>
             </a:r>
             <a:endParaRPr lang="en-US" sz="1800" dirty="0"/>
           </a:p>
@@ -6286,7 +6286,7 @@
                 <a:ea typeface="Arial" pitchFamily="34" charset="-122"/>
                 <a:cs typeface="Arial" pitchFamily="34" charset="-120"/>
               </a:rPr>
-              <a:t>Alfred Stieglitz, Music: A Sequence of Ten Cloud Photographs, No. 1, 1922</a:t>
+              <a:t>Adolescence (Netflix, 2025), production photograph</a:t>
             </a:r>
             <a:endParaRPr lang="en-US" sz="950" dirty="0"/>
           </a:p>

--- a/content/decks/media-studies/media-studies-s1-lesson-06-editing.pptx
+++ b/content/decks/media-studies/media-studies-s1-lesson-06-editing.pptx
@@ -601,7 +601,7 @@
           <a:p>
             <a:r>
               <a:rPr lang="en-US" dirty="0"/>
-              <a:t/>
+              <a:t>Any editor works: CapCut, iMovie, a phone timeline. Also logged before leaving: the group's equipment decision, school sign-out or own kit, tested across the four builds; Wednesday's shootability checklist points at it.</a:t>
             </a:r>
             <a:endParaRPr lang="en-US" dirty="0"/>
           </a:p>
@@ -953,7 +953,7 @@
           <a:p>
             <a:r>
               <a:rPr lang="en-US" dirty="0"/>
-              <a:t>Safeguarding: the prior plan used Adolescence, BBFC 15, with 1917 as the alternative. Any dense-cut and long-take pair works.</a:t>
+              <a:t>Two screened sequences, contrasting in pace: one dense-cut, one long take. Safeguarding: the prior plan used Adolescence, BBFC 15, with 1917 as the alternative. The Toy Story strip on the slide is the tally made visible: even a children's film cuts faster than the room expects.</a:t>
             </a:r>
             <a:endParaRPr lang="en-US" dirty="0"/>
           </a:p>
@@ -1129,7 +1129,7 @@
           <a:p>
             <a:r>
               <a:rPr lang="en-US" dirty="0"/>
-              <a:t/>
+              <a:t>Frames: Adolescence (the over-the-shoulder; note the series is one continuous take, so its reframings do the work cuts normally do, which is itself the lesson) and Toy Story (eyeline, insert, match on action). The two drawn cells are the two ideas frames cannot carry alone.</a:t>
             </a:r>
             <a:endParaRPr lang="en-US" dirty="0"/>
           </a:p>
@@ -1217,7 +1217,7 @@
           <a:p>
             <a:r>
               <a:rPr lang="en-US" dirty="0"/>
-              <a:t/>
+              <a:t>Nobody who has made the error forgets the rule. The drawn cameras match the SoW's own exercise: shot / reverse shot with the rule highlighted.</a:t>
             </a:r>
             <a:endParaRPr lang="en-US" dirty="0"/>
           </a:p>
@@ -1305,7 +1305,7 @@
           <a:p>
             <a:r>
               <a:rPr lang="en-US" dirty="0"/>
-              <a:t>The clap-tally pair: a dense-cut sequence against the one-take. When the room claps every cut in the second clip, the silence is the point. Not cutting is also an editing decision, and this photograph is what that decision costs to make.</a:t>
+              <a:t>Not cutting is also an editing decision, and this photograph is what that decision costs to make. The interview-room frame from L02 is the same take, minutes deeper.</a:t>
             </a:r>
             <a:endParaRPr lang="en-US" dirty="0"/>
           </a:p>
@@ -1393,7 +1393,7 @@
           <a:p>
             <a:r>
               <a:rPr lang="en-US" dirty="0"/>
-              <a:t/>
+              <a:t>Four groups, four minutes, teach back. Psycho's eye close-up is in img/ as the second graphic-match example; slow motion is taught by clip (Chariots of Fire's beach run is the canonical case and is not frame-licensable from the archive, so it stays a screening).</a:t>
             </a:r>
             <a:endParaRPr lang="en-US" dirty="0"/>
           </a:p>
@@ -2216,8 +2216,8 @@
         </p:nvSpPr>
         <p:spPr>
           <a:xfrm>
-            <a:off x="822960" y="1051560"/>
-            <a:ext cx="10543032" cy="822960"/>
+            <a:off x="822960" y="960120"/>
+            <a:ext cx="10543032" cy="640080"/>
           </a:xfrm>
           <a:prstGeom prst="rect">
             <a:avLst/>
@@ -2233,7 +2233,7 @@
               <a:buNone/>
             </a:pPr>
             <a:r>
-              <a:rPr lang="en-US" sz="3600" dirty="0">
+              <a:rPr lang="en-US" sz="3200" dirty="0">
                 <a:solidFill>
                   <a:srgbClr val="24313F"/>
                 </a:solidFill>
@@ -2243,7 +2243,7 @@
               </a:rPr>
               <a:t>The same sequence, cut twice</a:t>
             </a:r>
-            <a:endParaRPr lang="en-US" sz="3600" dirty="0"/>
+            <a:endParaRPr lang="en-US" sz="3200" dirty="0"/>
           </a:p>
         </p:txBody>
       </p:sp>
@@ -2255,8 +2255,8 @@
         </p:nvSpPr>
         <p:spPr>
           <a:xfrm>
-            <a:off x="822960" y="2148840"/>
-            <a:ext cx="4846320" cy="502920"/>
+            <a:off x="822960" y="1783080"/>
+            <a:ext cx="4846320" cy="457200"/>
           </a:xfrm>
           <a:prstGeom prst="rect">
             <a:avLst/>
@@ -2272,7 +2272,7 @@
               <a:buNone/>
             </a:pPr>
             <a:r>
-              <a:rPr lang="en-US" sz="2500" dirty="0">
+              <a:rPr lang="en-US" sz="2200" dirty="0">
                 <a:solidFill>
                   <a:srgbClr val="4A6B5D"/>
                 </a:solidFill>
@@ -2282,7 +2282,7 @@
               </a:rPr>
               <a:t>Version one</a:t>
             </a:r>
-            <a:endParaRPr lang="en-US" sz="2500" dirty="0"/>
+            <a:endParaRPr lang="en-US" sz="2200" dirty="0"/>
           </a:p>
         </p:txBody>
       </p:sp>
@@ -2294,7 +2294,7 @@
         </p:nvSpPr>
         <p:spPr>
           <a:xfrm>
-            <a:off x="822960" y="2724912"/>
+            <a:off x="822960" y="2286000"/>
             <a:ext cx="4754880" cy="0"/>
           </a:xfrm>
           <a:prstGeom prst="line">
@@ -2317,8 +2317,8 @@
         </p:nvSpPr>
         <p:spPr>
           <a:xfrm>
-            <a:off x="822960" y="2880360"/>
-            <a:ext cx="4846320" cy="1737360"/>
+            <a:off x="822960" y="2423160"/>
+            <a:ext cx="4846320" cy="1463040"/>
           </a:xfrm>
           <a:prstGeom prst="rect">
             <a:avLst/>
@@ -2332,12 +2332,12 @@
           <a:p>
             <a:pPr indent="0" marL="0">
               <a:lnSpc>
-                <a:spcPts val="2400"/>
+                <a:spcPts val="2100"/>
               </a:lnSpc>
               <a:buNone/>
             </a:pPr>
             <a:r>
-              <a:rPr lang="en-US" sz="1700" dirty="0">
+              <a:rPr lang="en-US" sz="1550" dirty="0">
                 <a:solidFill>
                   <a:srgbClr val="24313F"/>
                 </a:solidFill>
@@ -2347,7 +2347,7 @@
               </a:rPr>
               <a:t>Continuity held. An establishing shot, a shot / reverse shot exchange, one eyeline match. It has to hold together; it does not have to be good.</a:t>
             </a:r>
-            <a:endParaRPr lang="en-US" sz="1700" dirty="0"/>
+            <a:endParaRPr lang="en-US" sz="1550" dirty="0"/>
           </a:p>
         </p:txBody>
       </p:sp>
@@ -2359,8 +2359,8 @@
         </p:nvSpPr>
         <p:spPr>
           <a:xfrm>
-            <a:off x="6309360" y="2148840"/>
-            <a:ext cx="4846320" cy="502920"/>
+            <a:off x="6309360" y="1783080"/>
+            <a:ext cx="4846320" cy="457200"/>
           </a:xfrm>
           <a:prstGeom prst="rect">
             <a:avLst/>
@@ -2376,7 +2376,7 @@
               <a:buNone/>
             </a:pPr>
             <a:r>
-              <a:rPr lang="en-US" sz="2500" dirty="0">
+              <a:rPr lang="en-US" sz="2200" dirty="0">
                 <a:solidFill>
                   <a:srgbClr val="8C3A38"/>
                 </a:solidFill>
@@ -2386,7 +2386,7 @@
               </a:rPr>
               <a:t>Version two</a:t>
             </a:r>
-            <a:endParaRPr lang="en-US" sz="2500" dirty="0"/>
+            <a:endParaRPr lang="en-US" sz="2200" dirty="0"/>
           </a:p>
         </p:txBody>
       </p:sp>
@@ -2398,7 +2398,7 @@
         </p:nvSpPr>
         <p:spPr>
           <a:xfrm>
-            <a:off x="6309360" y="2724912"/>
+            <a:off x="6309360" y="2286000"/>
             <a:ext cx="4754880" cy="0"/>
           </a:xfrm>
           <a:prstGeom prst="line">
@@ -2421,8 +2421,8 @@
         </p:nvSpPr>
         <p:spPr>
           <a:xfrm>
-            <a:off x="6309360" y="2880360"/>
-            <a:ext cx="4846320" cy="1737360"/>
+            <a:off x="6309360" y="2423160"/>
+            <a:ext cx="4846320" cy="1463040"/>
           </a:xfrm>
           <a:prstGeom prst="rect">
             <a:avLst/>
@@ -2436,12 +2436,12 @@
           <a:p>
             <a:pPr indent="0" marL="0">
               <a:lnSpc>
-                <a:spcPts val="2400"/>
+                <a:spcPts val="2100"/>
               </a:lnSpc>
               <a:buNone/>
             </a:pPr>
             <a:r>
-              <a:rPr lang="en-US" sz="1700" dirty="0">
+              <a:rPr lang="en-US" sz="1550" dirty="0">
                 <a:solidFill>
                   <a:srgbClr val="24313F"/>
                 </a:solidFill>
@@ -2451,106 +2451,27 @@
               </a:rPr>
               <a:t>The 180-degree rule broken on purpose, plus one transition chosen and justified. The break must be the intended one, not an accident.</a:t>
             </a:r>
-            <a:endParaRPr lang="en-US" sz="1700" dirty="0"/>
-          </a:p>
-        </p:txBody>
-      </p:sp>
-      <p:sp>
-        <p:nvSpPr>
-          <p:cNvPr id="12" name="Text 10"/>
-          <p:cNvSpPr/>
-          <p:nvPr/>
-        </p:nvSpPr>
-        <p:spPr>
-          <a:xfrm>
-            <a:off x="822960" y="4846320"/>
-            <a:ext cx="10424160" cy="640080"/>
-          </a:xfrm>
-          <a:prstGeom prst="rect">
-            <a:avLst/>
-          </a:prstGeom>
-          <a:noFill/>
-          <a:ln/>
-        </p:spPr>
-        <p:txBody>
-          <a:bodyPr wrap="square" lIns="0" tIns="0" rIns="0" bIns="0" rtlCol="0" anchor="t"/>
-          <a:lstStyle/>
-          <a:p>
-            <a:pPr indent="0" marL="0">
-              <a:lnSpc>
-                <a:spcPts val="2200"/>
-              </a:lnSpc>
-              <a:buNone/>
-            </a:pPr>
-            <a:r>
-              <a:rPr lang="en-US" sz="1650" i="1" dirty="0">
-                <a:solidFill>
-                  <a:srgbClr val="4A6B5D"/>
-                </a:solidFill>
-                <a:latin typeface="Georgia" pitchFamily="34" charset="0"/>
-                <a:ea typeface="Georgia" pitchFamily="34" charset="-122"/>
-                <a:cs typeface="Georgia" pitchFamily="34" charset="-120"/>
-              </a:rPr>
-              <a:t>Both posted and dated on the blog, with two or three sentences naming what breaks in version two and what the continuity system was doing for the viewer in version one.</a:t>
-            </a:r>
-            <a:endParaRPr lang="en-US" sz="1650" dirty="0"/>
-          </a:p>
-        </p:txBody>
-      </p:sp>
-      <p:sp>
-        <p:nvSpPr>
-          <p:cNvPr id="13" name="Text 11"/>
-          <p:cNvSpPr/>
-          <p:nvPr/>
-        </p:nvSpPr>
-        <p:spPr>
-          <a:xfrm>
-            <a:off x="822960" y="5623560"/>
-            <a:ext cx="10424160" cy="457200"/>
-          </a:xfrm>
-          <a:prstGeom prst="rect">
-            <a:avLst/>
-          </a:prstGeom>
-          <a:noFill/>
-          <a:ln/>
-        </p:spPr>
-        <p:txBody>
-          <a:bodyPr wrap="square" lIns="0" tIns="0" rIns="0" bIns="0" rtlCol="0" anchor="ctr"/>
-          <a:lstStyle/>
-          <a:p>
-            <a:pPr indent="0" marL="0">
-              <a:buNone/>
-            </a:pPr>
-            <a:r>
-              <a:rPr lang="en-US" sz="1250" dirty="0">
-                <a:solidFill>
-                  <a:srgbClr val="7A7F72"/>
-                </a:solidFill>
-                <a:latin typeface="Arial" pitchFamily="34" charset="0"/>
-                <a:ea typeface="Arial" pitchFamily="34" charset="-122"/>
-                <a:cs typeface="Arial" pitchFamily="34" charset="-120"/>
-              </a:rPr>
-              <a:t>Also logged before you leave: your group's equipment decision, school sign-out or own kit, tested across the last four lessons. Wednesday's shootability checklist points at it.</a:t>
-            </a:r>
-            <a:endParaRPr lang="en-US" sz="1250" dirty="0"/>
-          </a:p>
-        </p:txBody>
-      </p:sp>
-      <p:sp>
-        <p:nvSpPr>
-          <p:cNvPr id="14" name="Shape 12"/>
-          <p:cNvSpPr/>
-          <p:nvPr/>
-        </p:nvSpPr>
-        <p:spPr>
-          <a:xfrm>
-            <a:off x="822960" y="6382512"/>
-            <a:ext cx="10543032" cy="0"/>
-          </a:xfrm>
-          <a:prstGeom prst="line">
-            <a:avLst/>
-          </a:prstGeom>
-          <a:noFill/>
+            <a:endParaRPr lang="en-US" sz="1550" dirty="0"/>
+          </a:p>
+        </p:txBody>
+      </p:sp>
+      <p:sp>
+        <p:nvSpPr>
+          <p:cNvPr id="12" name="Shape 10"/>
+          <p:cNvSpPr/>
+          <p:nvPr/>
+        </p:nvSpPr>
+        <p:spPr>
+          <a:xfrm>
+            <a:off x="822960" y="4114800"/>
+            <a:ext cx="10543032" cy="1600200"/>
+          </a:xfrm>
+          <a:prstGeom prst="rect">
+            <a:avLst/>
+          </a:prstGeom>
+          <a:solidFill>
+            <a:srgbClr val="FAF8F1"/>
+          </a:solidFill>
           <a:ln w="9525">
             <a:solidFill>
               <a:srgbClr val="D9D4C4"/>
@@ -2559,16 +2480,40 @@
           </a:ln>
         </p:spPr>
       </p:sp>
-      <p:sp>
-        <p:nvSpPr>
-          <p:cNvPr id="15" name="Text 13"/>
-          <p:cNvSpPr/>
-          <p:nvPr/>
-        </p:nvSpPr>
-        <p:spPr>
-          <a:xfrm>
-            <a:off x="822960" y="6419088"/>
-            <a:ext cx="7315200" cy="274320"/>
+      <p:pic>
+        <p:nvPicPr>
+          <p:cNvPr id="13" name="Image 0" descr="/Users/dogan/Documents/Vaults/Courses/wiki/classes/media-studies/decks/_build/img/edit-timeline.jpg">    </p:cNvPr>
+          <p:cNvPicPr>
+            <a:picLocks noChangeAspect="1"/>
+          </p:cNvPicPr>
+          <p:nvPr/>
+        </p:nvPicPr>
+        <p:blipFill>
+          <a:blip r:embed="rId1"/>
+          <a:stretch>
+            <a:fillRect/>
+          </a:stretch>
+        </p:blipFill>
+        <p:spPr>
+          <a:xfrm>
+            <a:off x="5086350" y="4242816"/>
+            <a:ext cx="2016252" cy="1344168"/>
+          </a:xfrm>
+          <a:prstGeom prst="rect">
+            <a:avLst/>
+          </a:prstGeom>
+        </p:spPr>
+      </p:pic>
+      <p:sp>
+        <p:nvSpPr>
+          <p:cNvPr id="14" name="Text 11"/>
+          <p:cNvSpPr/>
+          <p:nvPr/>
+        </p:nvSpPr>
+        <p:spPr>
+          <a:xfrm>
+            <a:off x="822960" y="5742432"/>
+            <a:ext cx="10543032" cy="274320"/>
           </a:xfrm>
           <a:prstGeom prst="rect">
             <a:avLst/>
@@ -2580,11 +2525,11 @@
           <a:bodyPr wrap="square" lIns="0" tIns="0" rIns="0" bIns="0" rtlCol="0" anchor="ctr"/>
           <a:lstStyle/>
           <a:p>
-            <a:pPr indent="0" marL="0">
-              <a:buNone/>
-            </a:pPr>
-            <a:r>
-              <a:rPr lang="en-US" sz="900" spc="150" kern="0" dirty="0">
+            <a:pPr algn="ctr" indent="0" marL="0">
+              <a:buNone/>
+            </a:pPr>
+            <a:r>
+              <a:rPr lang="en-US" sz="1000" dirty="0">
                 <a:solidFill>
                   <a:srgbClr val="7A7F72"/>
                 </a:solidFill>
@@ -2592,22 +2537,22 @@
                 <a:ea typeface="Arial" pitchFamily="34" charset="-122"/>
                 <a:cs typeface="Arial" pitchFamily="34" charset="-120"/>
               </a:rPr>
-              <a:t>MEDIA STUDIES 9607 · SEMESTER I</a:t>
-            </a:r>
-            <a:endParaRPr lang="en-US" sz="900" dirty="0"/>
-          </a:p>
-        </p:txBody>
-      </p:sp>
-      <p:sp>
-        <p:nvSpPr>
-          <p:cNvPr id="16" name="Text 14"/>
-          <p:cNvSpPr/>
-          <p:nvPr/>
-        </p:nvSpPr>
-        <p:spPr>
-          <a:xfrm>
-            <a:off x="10268712" y="6355080"/>
-            <a:ext cx="1097280" cy="365760"/>
+              <a:t>The cut, on any timeline you own: layers, trims, one dissolve. Photograph: Peter Stumpf, Unsplash</a:t>
+            </a:r>
+            <a:endParaRPr lang="en-US" sz="1000" dirty="0"/>
+          </a:p>
+        </p:txBody>
+      </p:sp>
+      <p:sp>
+        <p:nvSpPr>
+          <p:cNvPr id="15" name="Text 12"/>
+          <p:cNvSpPr/>
+          <p:nvPr/>
+        </p:nvSpPr>
+        <p:spPr>
+          <a:xfrm>
+            <a:off x="822960" y="6053328"/>
+            <a:ext cx="10543032" cy="320040"/>
           </a:xfrm>
           <a:prstGeom prst="rect">
             <a:avLst/>
@@ -2619,19 +2564,120 @@
           <a:bodyPr wrap="square" lIns="0" tIns="0" rIns="0" bIns="0" rtlCol="0" anchor="ctr"/>
           <a:lstStyle/>
           <a:p>
-            <a:pPr algn="r" indent="0" marL="0">
-              <a:buNone/>
-            </a:pPr>
-            <a:r>
-              <a:rPr lang="en-US" sz="1600" dirty="0">
-                <a:solidFill>
-                  <a:srgbClr val="A3C1AD"/>
+            <a:pPr indent="0" marL="0">
+              <a:buNone/>
+            </a:pPr>
+            <a:r>
+              <a:rPr lang="en-US" sz="1250" i="1" dirty="0">
+                <a:solidFill>
+                  <a:srgbClr val="4A6B5D"/>
                 </a:solidFill>
                 <a:latin typeface="Georgia" pitchFamily="34" charset="0"/>
                 <a:ea typeface="Georgia" pitchFamily="34" charset="-122"/>
                 <a:cs typeface="Georgia" pitchFamily="34" charset="-120"/>
               </a:rPr>
-              <a:t>05</a:t>
+              <a:t>Both versions posted and dated on the blog, with two or three sentences naming what breaks in version two.</a:t>
+            </a:r>
+            <a:endParaRPr lang="en-US" sz="1250" dirty="0"/>
+          </a:p>
+        </p:txBody>
+      </p:sp>
+      <p:sp>
+        <p:nvSpPr>
+          <p:cNvPr id="16" name="Shape 13"/>
+          <p:cNvSpPr/>
+          <p:nvPr/>
+        </p:nvSpPr>
+        <p:spPr>
+          <a:xfrm>
+            <a:off x="822960" y="6382512"/>
+            <a:ext cx="10543032" cy="0"/>
+          </a:xfrm>
+          <a:prstGeom prst="line">
+            <a:avLst/>
+          </a:prstGeom>
+          <a:noFill/>
+          <a:ln w="9525">
+            <a:solidFill>
+              <a:srgbClr val="D9D4C4"/>
+            </a:solidFill>
+            <a:prstDash val="solid"/>
+          </a:ln>
+        </p:spPr>
+      </p:sp>
+      <p:sp>
+        <p:nvSpPr>
+          <p:cNvPr id="17" name="Text 14"/>
+          <p:cNvSpPr/>
+          <p:nvPr/>
+        </p:nvSpPr>
+        <p:spPr>
+          <a:xfrm>
+            <a:off x="822960" y="6419088"/>
+            <a:ext cx="7315200" cy="274320"/>
+          </a:xfrm>
+          <a:prstGeom prst="rect">
+            <a:avLst/>
+          </a:prstGeom>
+          <a:noFill/>
+          <a:ln/>
+        </p:spPr>
+        <p:txBody>
+          <a:bodyPr wrap="square" lIns="0" tIns="0" rIns="0" bIns="0" rtlCol="0" anchor="ctr"/>
+          <a:lstStyle/>
+          <a:p>
+            <a:pPr indent="0" marL="0">
+              <a:buNone/>
+            </a:pPr>
+            <a:r>
+              <a:rPr lang="en-US" sz="900" spc="150" kern="0" dirty="0">
+                <a:solidFill>
+                  <a:srgbClr val="7A7F72"/>
+                </a:solidFill>
+                <a:latin typeface="Arial" pitchFamily="34" charset="0"/>
+                <a:ea typeface="Arial" pitchFamily="34" charset="-122"/>
+                <a:cs typeface="Arial" pitchFamily="34" charset="-120"/>
+              </a:rPr>
+              <a:t>MEDIA STUDIES 9607 · SEMESTER I</a:t>
+            </a:r>
+            <a:endParaRPr lang="en-US" sz="900" dirty="0"/>
+          </a:p>
+        </p:txBody>
+      </p:sp>
+      <p:sp>
+        <p:nvSpPr>
+          <p:cNvPr id="18" name="Text 15"/>
+          <p:cNvSpPr/>
+          <p:nvPr/>
+        </p:nvSpPr>
+        <p:spPr>
+          <a:xfrm>
+            <a:off x="10268712" y="6355080"/>
+            <a:ext cx="1097280" cy="365760"/>
+          </a:xfrm>
+          <a:prstGeom prst="rect">
+            <a:avLst/>
+          </a:prstGeom>
+          <a:noFill/>
+          <a:ln/>
+        </p:spPr>
+        <p:txBody>
+          <a:bodyPr wrap="square" lIns="0" tIns="0" rIns="0" bIns="0" rtlCol="0" anchor="ctr"/>
+          <a:lstStyle/>
+          <a:p>
+            <a:pPr algn="r" indent="0" marL="0">
+              <a:buNone/>
+            </a:pPr>
+            <a:r>
+              <a:rPr lang="en-US" sz="1600" dirty="0">
+                <a:solidFill>
+                  <a:srgbClr val="A3C1AD"/>
+                </a:solidFill>
+                <a:latin typeface="Georgia" pitchFamily="34" charset="0"/>
+                <a:ea typeface="Georgia" pitchFamily="34" charset="-122"/>
+                <a:cs typeface="Georgia" pitchFamily="34" charset="-120"/>
+              </a:rPr>
+              <a:t>06</a:t>
             </a:r>
             <a:endParaRPr lang="en-US" sz="1600" dirty="0"/>
           </a:p>
@@ -3517,7 +3563,7 @@
                 <a:ea typeface="Georgia" pitchFamily="34" charset="-122"/>
                 <a:cs typeface="Georgia" pitchFamily="34" charset="-120"/>
               </a:rPr>
-              <a:t>06</a:t>
+              <a:t>07</a:t>
             </a:r>
             <a:endParaRPr lang="en-US" sz="1600" dirty="0"/>
           </a:p>
@@ -3816,7 +3862,7 @@
                 <a:ea typeface="Georgia" pitchFamily="34" charset="-122"/>
                 <a:cs typeface="Georgia" pitchFamily="34" charset="-120"/>
               </a:rPr>
-              <a:t>07</a:t>
+              <a:t>08</a:t>
             </a:r>
             <a:endParaRPr lang="en-US" sz="1600" dirty="0"/>
           </a:p>
@@ -4158,8 +4204,8 @@
         </p:nvSpPr>
         <p:spPr>
           <a:xfrm>
-            <a:off x="822960" y="932688"/>
-            <a:ext cx="10543032" cy="640080"/>
+            <a:off x="822960" y="914400"/>
+            <a:ext cx="10543032" cy="548640"/>
           </a:xfrm>
           <a:prstGeom prst="rect">
             <a:avLst/>
@@ -4175,7 +4221,7 @@
               <a:buNone/>
             </a:pPr>
             <a:r>
-              <a:rPr lang="en-US" sz="3200" dirty="0">
+              <a:rPr lang="en-US" sz="3000" dirty="0">
                 <a:solidFill>
                   <a:srgbClr val="24313F"/>
                 </a:solidFill>
@@ -4185,148 +4231,27 @@
               </a:rPr>
               <a:t>Count first, then say how it felt</a:t>
             </a:r>
-            <a:endParaRPr lang="en-US" sz="3200" dirty="0"/>
-          </a:p>
-        </p:txBody>
-      </p:sp>
-      <p:sp>
-        <p:nvSpPr>
-          <p:cNvPr id="6" name="Text 4"/>
-          <p:cNvSpPr/>
-          <p:nvPr/>
-        </p:nvSpPr>
-        <p:spPr>
-          <a:xfrm>
-            <a:off x="822960" y="1691640"/>
-            <a:ext cx="10241280" cy="914400"/>
-          </a:xfrm>
-          <a:prstGeom prst="rect">
-            <a:avLst/>
-          </a:prstGeom>
-          <a:noFill/>
-          <a:ln/>
-        </p:spPr>
-        <p:txBody>
-          <a:bodyPr wrap="square" lIns="0" tIns="0" rIns="0" bIns="0" rtlCol="0" anchor="t"/>
-          <a:lstStyle/>
-          <a:p>
-            <a:pPr indent="0" marL="0">
-              <a:lnSpc>
-                <a:spcPts val="2600"/>
-              </a:lnSpc>
-              <a:buNone/>
-            </a:pPr>
-            <a:r>
-              <a:rPr lang="en-US" sz="1850" dirty="0">
-                <a:solidFill>
-                  <a:srgbClr val="24313F"/>
-                </a:solidFill>
-                <a:latin typeface="Georgia" pitchFamily="34" charset="0"/>
-                <a:ea typeface="Georgia" pitchFamily="34" charset="-122"/>
-                <a:cs typeface="Georgia" pitchFamily="34" charset="-120"/>
-              </a:rPr>
-              <a:t>Two sequences, contrasting in pace. In pairs: one watches, one keeps a tally and claps on every cut. Then the numbers go on the board next to the feelings, and the link between them is the lesson.</a:t>
-            </a:r>
-            <a:endParaRPr lang="en-US" sz="1850" dirty="0"/>
-          </a:p>
-        </p:txBody>
-      </p:sp>
-      <p:sp>
-        <p:nvSpPr>
-          <p:cNvPr id="7" name="Text 5"/>
-          <p:cNvSpPr/>
-          <p:nvPr/>
-        </p:nvSpPr>
-        <p:spPr>
-          <a:xfrm>
-            <a:off x="822960" y="2926080"/>
-            <a:ext cx="914400" cy="457200"/>
-          </a:xfrm>
-          <a:prstGeom prst="rect">
-            <a:avLst/>
-          </a:prstGeom>
-          <a:noFill/>
-          <a:ln/>
-        </p:spPr>
-        <p:txBody>
-          <a:bodyPr wrap="square" lIns="0" tIns="0" rIns="0" bIns="0" rtlCol="0" anchor="ctr"/>
-          <a:lstStyle/>
-          <a:p>
-            <a:pPr indent="0" marL="0">
-              <a:buNone/>
-            </a:pPr>
-            <a:r>
-              <a:rPr lang="en-US" sz="2800" dirty="0">
-                <a:solidFill>
-                  <a:srgbClr val="A3C1AD"/>
-                </a:solidFill>
-                <a:latin typeface="Georgia" pitchFamily="34" charset="0"/>
-                <a:ea typeface="Georgia" pitchFamily="34" charset="-122"/>
-                <a:cs typeface="Georgia" pitchFamily="34" charset="-120"/>
-              </a:rPr>
-              <a:t>01</a:t>
-            </a:r>
-            <a:endParaRPr lang="en-US" sz="2800" dirty="0"/>
-          </a:p>
-        </p:txBody>
-      </p:sp>
-      <p:sp>
-        <p:nvSpPr>
-          <p:cNvPr id="8" name="Text 6"/>
-          <p:cNvSpPr/>
-          <p:nvPr/>
-        </p:nvSpPr>
-        <p:spPr>
-          <a:xfrm>
-            <a:off x="822960" y="3401568"/>
-            <a:ext cx="3209544" cy="777240"/>
-          </a:xfrm>
-          <a:prstGeom prst="rect">
-            <a:avLst/>
-          </a:prstGeom>
-          <a:noFill/>
-          <a:ln/>
-        </p:spPr>
-        <p:txBody>
-          <a:bodyPr wrap="square" lIns="0" tIns="0" rIns="0" bIns="0" rtlCol="0" anchor="t"/>
-          <a:lstStyle/>
-          <a:p>
-            <a:pPr indent="0" marL="0">
-              <a:lnSpc>
-                <a:spcPts val="2400"/>
-              </a:lnSpc>
-              <a:buNone/>
-            </a:pPr>
-            <a:r>
-              <a:rPr lang="en-US" sz="2000" dirty="0">
-                <a:solidFill>
-                  <a:srgbClr val="4A6B5D"/>
-                </a:solidFill>
-                <a:latin typeface="Georgia" pitchFamily="34" charset="0"/>
-                <a:ea typeface="Georgia" pitchFamily="34" charset="-122"/>
-                <a:cs typeface="Georgia" pitchFamily="34" charset="-120"/>
-              </a:rPr>
-              <a:t>How many claps?</a:t>
-            </a:r>
-            <a:endParaRPr lang="en-US" sz="2000" dirty="0"/>
-          </a:p>
-        </p:txBody>
-      </p:sp>
-      <p:sp>
-        <p:nvSpPr>
-          <p:cNvPr id="9" name="Shape 7"/>
-          <p:cNvSpPr/>
-          <p:nvPr/>
-        </p:nvSpPr>
-        <p:spPr>
-          <a:xfrm>
-            <a:off x="822960" y="4224528"/>
-            <a:ext cx="3209544" cy="0"/>
-          </a:xfrm>
-          <a:prstGeom prst="line">
-            <a:avLst/>
-          </a:prstGeom>
-          <a:noFill/>
+            <a:endParaRPr lang="en-US" sz="3000" dirty="0"/>
+          </a:p>
+        </p:txBody>
+      </p:sp>
+      <p:sp>
+        <p:nvSpPr>
+          <p:cNvPr id="6" name="Shape 4"/>
+          <p:cNvSpPr/>
+          <p:nvPr/>
+        </p:nvSpPr>
+        <p:spPr>
+          <a:xfrm>
+            <a:off x="822960" y="1554480"/>
+            <a:ext cx="2361438" cy="1645920"/>
+          </a:xfrm>
+          <a:prstGeom prst="rect">
+            <a:avLst/>
+          </a:prstGeom>
+          <a:solidFill>
+            <a:srgbClr val="FAF8F1"/>
+          </a:solidFill>
           <a:ln w="9525">
             <a:solidFill>
               <a:srgbClr val="D9D4C4"/>
@@ -4335,58 +4260,40 @@
           </a:ln>
         </p:spPr>
       </p:sp>
-      <p:sp>
-        <p:nvSpPr>
-          <p:cNvPr id="10" name="Text 8"/>
-          <p:cNvSpPr/>
-          <p:nvPr/>
-        </p:nvSpPr>
-        <p:spPr>
-          <a:xfrm>
-            <a:off x="822960" y="4370832"/>
-            <a:ext cx="3209544" cy="1371600"/>
-          </a:xfrm>
-          <a:prstGeom prst="rect">
-            <a:avLst/>
-          </a:prstGeom>
-          <a:noFill/>
-          <a:ln/>
-        </p:spPr>
-        <p:txBody>
-          <a:bodyPr wrap="square" lIns="0" tIns="0" rIns="0" bIns="0" rtlCol="0" anchor="t"/>
-          <a:lstStyle/>
-          <a:p>
-            <a:pPr indent="0" marL="0">
-              <a:lnSpc>
-                <a:spcPts val="2100"/>
-              </a:lnSpc>
-              <a:buNone/>
-            </a:pPr>
-            <a:r>
-              <a:rPr lang="en-US" sz="1550" dirty="0">
-                <a:solidFill>
-                  <a:srgbClr val="24313F"/>
-                </a:solidFill>
-                <a:latin typeface="Georgia" pitchFamily="34" charset="0"/>
-                <a:ea typeface="Georgia" pitchFamily="34" charset="-122"/>
-                <a:cs typeface="Georgia" pitchFamily="34" charset="-120"/>
-              </a:rPr>
-              <a:t>The count is objective. Write it down before anyone discusses the feeling.</a:t>
-            </a:r>
-            <a:endParaRPr lang="en-US" sz="1550" dirty="0"/>
-          </a:p>
-        </p:txBody>
-      </p:sp>
-      <p:sp>
-        <p:nvSpPr>
-          <p:cNvPr id="11" name="Text 9"/>
-          <p:cNvSpPr/>
-          <p:nvPr/>
-        </p:nvSpPr>
-        <p:spPr>
-          <a:xfrm>
-            <a:off x="4489704" y="2926080"/>
-            <a:ext cx="914400" cy="457200"/>
+      <p:pic>
+        <p:nvPicPr>
+          <p:cNvPr id="7" name="Image 0" descr="/Users/dogan/Documents/Vaults/Courses/wiki/classes/media-studies/decks/_build/img/toystory-rc-ms.jpg">    </p:cNvPr>
+          <p:cNvPicPr>
+            <a:picLocks noChangeAspect="1"/>
+          </p:cNvPicPr>
+          <p:nvPr/>
+        </p:nvPicPr>
+        <p:blipFill>
+          <a:blip r:embed="rId1"/>
+          <a:stretch>
+            <a:fillRect/>
+          </a:stretch>
+        </p:blipFill>
+        <p:spPr>
+          <a:xfrm>
+            <a:off x="896112" y="1661675"/>
+            <a:ext cx="2215134" cy="1431530"/>
+          </a:xfrm>
+          <a:prstGeom prst="rect">
+            <a:avLst/>
+          </a:prstGeom>
+        </p:spPr>
+      </p:pic>
+      <p:sp>
+        <p:nvSpPr>
+          <p:cNvPr id="8" name="Text 5"/>
+          <p:cNvSpPr/>
+          <p:nvPr/>
+        </p:nvSpPr>
+        <p:spPr>
+          <a:xfrm>
+            <a:off x="3166110" y="2148840"/>
+            <a:ext cx="411480" cy="457200"/>
           </a:xfrm>
           <a:prstGeom prst="rect">
             <a:avLst/>
@@ -4398,81 +4305,41 @@
           <a:bodyPr wrap="square" lIns="0" tIns="0" rIns="0" bIns="0" rtlCol="0" anchor="ctr"/>
           <a:lstStyle/>
           <a:p>
-            <a:pPr indent="0" marL="0">
-              <a:buNone/>
-            </a:pPr>
-            <a:r>
-              <a:rPr lang="en-US" sz="2800" dirty="0">
-                <a:solidFill>
-                  <a:srgbClr val="A3C1AD"/>
-                </a:solidFill>
-                <a:latin typeface="Georgia" pitchFamily="34" charset="0"/>
-                <a:ea typeface="Georgia" pitchFamily="34" charset="-122"/>
-                <a:cs typeface="Georgia" pitchFamily="34" charset="-120"/>
-              </a:rPr>
-              <a:t>02</a:t>
-            </a:r>
-            <a:endParaRPr lang="en-US" sz="2800" dirty="0"/>
-          </a:p>
-        </p:txBody>
-      </p:sp>
-      <p:sp>
-        <p:nvSpPr>
-          <p:cNvPr id="12" name="Text 10"/>
-          <p:cNvSpPr/>
-          <p:nvPr/>
-        </p:nvSpPr>
-        <p:spPr>
-          <a:xfrm>
-            <a:off x="4489704" y="3401568"/>
-            <a:ext cx="3209544" cy="777240"/>
-          </a:xfrm>
-          <a:prstGeom prst="rect">
-            <a:avLst/>
-          </a:prstGeom>
-          <a:noFill/>
-          <a:ln/>
-        </p:spPr>
-        <p:txBody>
-          <a:bodyPr wrap="square" lIns="0" tIns="0" rIns="0" bIns="0" rtlCol="0" anchor="t"/>
-          <a:lstStyle/>
-          <a:p>
-            <a:pPr indent="0" marL="0">
-              <a:lnSpc>
-                <a:spcPts val="2400"/>
-              </a:lnSpc>
-              <a:buNone/>
-            </a:pPr>
-            <a:r>
-              <a:rPr lang="en-US" sz="2000" dirty="0">
-                <a:solidFill>
-                  <a:srgbClr val="4A6B5D"/>
-                </a:solidFill>
-                <a:latin typeface="Georgia" pitchFamily="34" charset="0"/>
-                <a:ea typeface="Georgia" pitchFamily="34" charset="-122"/>
-                <a:cs typeface="Georgia" pitchFamily="34" charset="-120"/>
-              </a:rPr>
-              <a:t>How did you feel?</a:t>
-            </a:r>
-            <a:endParaRPr lang="en-US" sz="2000" dirty="0"/>
-          </a:p>
-        </p:txBody>
-      </p:sp>
-      <p:sp>
-        <p:nvSpPr>
-          <p:cNvPr id="13" name="Shape 11"/>
-          <p:cNvSpPr/>
-          <p:nvPr/>
-        </p:nvSpPr>
-        <p:spPr>
-          <a:xfrm>
-            <a:off x="4489704" y="4224528"/>
-            <a:ext cx="3209544" cy="0"/>
-          </a:xfrm>
-          <a:prstGeom prst="line">
-            <a:avLst/>
-          </a:prstGeom>
-          <a:noFill/>
+            <a:pPr algn="ctr" indent="0" marL="0">
+              <a:buNone/>
+            </a:pPr>
+            <a:r>
+              <a:rPr lang="en-US" sz="1800" dirty="0">
+                <a:solidFill>
+                  <a:srgbClr val="8C3A38"/>
+                </a:solidFill>
+                <a:latin typeface="Arial" pitchFamily="34" charset="0"/>
+                <a:ea typeface="Arial" pitchFamily="34" charset="-122"/>
+                <a:cs typeface="Arial" pitchFamily="34" charset="-120"/>
+              </a:rPr>
+              <a:t>✂</a:t>
+            </a:r>
+            <a:endParaRPr lang="en-US" sz="1800" dirty="0"/>
+          </a:p>
+        </p:txBody>
+      </p:sp>
+      <p:sp>
+        <p:nvSpPr>
+          <p:cNvPr id="9" name="Shape 6"/>
+          <p:cNvSpPr/>
+          <p:nvPr/>
+        </p:nvSpPr>
+        <p:spPr>
+          <a:xfrm>
+            <a:off x="3550158" y="1554480"/>
+            <a:ext cx="2361438" cy="1645920"/>
+          </a:xfrm>
+          <a:prstGeom prst="rect">
+            <a:avLst/>
+          </a:prstGeom>
+          <a:solidFill>
+            <a:srgbClr val="FAF8F1"/>
+          </a:solidFill>
           <a:ln w="9525">
             <a:solidFill>
               <a:srgbClr val="D9D4C4"/>
@@ -4481,58 +4348,40 @@
           </a:ln>
         </p:spPr>
       </p:sp>
-      <p:sp>
-        <p:nvSpPr>
-          <p:cNvPr id="14" name="Text 12"/>
-          <p:cNvSpPr/>
-          <p:nvPr/>
-        </p:nvSpPr>
-        <p:spPr>
-          <a:xfrm>
-            <a:off x="4489704" y="4370832"/>
-            <a:ext cx="3209544" cy="1371600"/>
-          </a:xfrm>
-          <a:prstGeom prst="rect">
-            <a:avLst/>
-          </a:prstGeom>
-          <a:noFill/>
-          <a:ln/>
-        </p:spPr>
-        <p:txBody>
-          <a:bodyPr wrap="square" lIns="0" tIns="0" rIns="0" bIns="0" rtlCol="0" anchor="t"/>
-          <a:lstStyle/>
-          <a:p>
-            <a:pPr indent="0" marL="0">
-              <a:lnSpc>
-                <a:spcPts val="2100"/>
-              </a:lnSpc>
-              <a:buNone/>
-            </a:pPr>
-            <a:r>
-              <a:rPr lang="en-US" sz="1550" dirty="0">
-                <a:solidFill>
-                  <a:srgbClr val="24313F"/>
-                </a:solidFill>
-                <a:latin typeface="Georgia" pitchFamily="34" charset="0"/>
-                <a:ea typeface="Georgia" pitchFamily="34" charset="-122"/>
-                <a:cs typeface="Georgia" pitchFamily="34" charset="-120"/>
-              </a:rPr>
-              <a:t>Restless, held, hurried, allowed to look. Name it before you explain it.</a:t>
-            </a:r>
-            <a:endParaRPr lang="en-US" sz="1550" dirty="0"/>
-          </a:p>
-        </p:txBody>
-      </p:sp>
-      <p:sp>
-        <p:nvSpPr>
-          <p:cNvPr id="15" name="Text 13"/>
-          <p:cNvSpPr/>
-          <p:nvPr/>
-        </p:nvSpPr>
-        <p:spPr>
-          <a:xfrm>
-            <a:off x="8156448" y="2926080"/>
-            <a:ext cx="914400" cy="457200"/>
+      <p:pic>
+        <p:nvPicPr>
+          <p:cNvPr id="10" name="Image 1" descr="/Users/dogan/Documents/Vaults/Courses/wiki/classes/media-studies/decks/_build/img/toystory-remote-ecu.jpg">    </p:cNvPr>
+          <p:cNvPicPr>
+            <a:picLocks noChangeAspect="1"/>
+          </p:cNvPicPr>
+          <p:nvPr/>
+        </p:nvPicPr>
+        <p:blipFill>
+          <a:blip r:embed="rId2"/>
+          <a:stretch>
+            <a:fillRect/>
+          </a:stretch>
+        </p:blipFill>
+        <p:spPr>
+          <a:xfrm>
+            <a:off x="3623310" y="1661675"/>
+            <a:ext cx="2215134" cy="1431530"/>
+          </a:xfrm>
+          <a:prstGeom prst="rect">
+            <a:avLst/>
+          </a:prstGeom>
+        </p:spPr>
+      </p:pic>
+      <p:sp>
+        <p:nvSpPr>
+          <p:cNvPr id="11" name="Text 7"/>
+          <p:cNvSpPr/>
+          <p:nvPr/>
+        </p:nvSpPr>
+        <p:spPr>
+          <a:xfrm>
+            <a:off x="5893308" y="2148840"/>
+            <a:ext cx="411480" cy="457200"/>
           </a:xfrm>
           <a:prstGeom prst="rect">
             <a:avLst/>
@@ -4544,81 +4393,41 @@
           <a:bodyPr wrap="square" lIns="0" tIns="0" rIns="0" bIns="0" rtlCol="0" anchor="ctr"/>
           <a:lstStyle/>
           <a:p>
-            <a:pPr indent="0" marL="0">
-              <a:buNone/>
-            </a:pPr>
-            <a:r>
-              <a:rPr lang="en-US" sz="2800" dirty="0">
-                <a:solidFill>
-                  <a:srgbClr val="A3C1AD"/>
-                </a:solidFill>
-                <a:latin typeface="Georgia" pitchFamily="34" charset="0"/>
-                <a:ea typeface="Georgia" pitchFamily="34" charset="-122"/>
-                <a:cs typeface="Georgia" pitchFamily="34" charset="-120"/>
-              </a:rPr>
-              <a:t>03</a:t>
-            </a:r>
-            <a:endParaRPr lang="en-US" sz="2800" dirty="0"/>
-          </a:p>
-        </p:txBody>
-      </p:sp>
-      <p:sp>
-        <p:nvSpPr>
-          <p:cNvPr id="16" name="Text 14"/>
-          <p:cNvSpPr/>
-          <p:nvPr/>
-        </p:nvSpPr>
-        <p:spPr>
-          <a:xfrm>
-            <a:off x="8156448" y="3401568"/>
-            <a:ext cx="3209544" cy="777240"/>
-          </a:xfrm>
-          <a:prstGeom prst="rect">
-            <a:avLst/>
-          </a:prstGeom>
-          <a:noFill/>
-          <a:ln/>
-        </p:spPr>
-        <p:txBody>
-          <a:bodyPr wrap="square" lIns="0" tIns="0" rIns="0" bIns="0" rtlCol="0" anchor="t"/>
-          <a:lstStyle/>
-          <a:p>
-            <a:pPr indent="0" marL="0">
-              <a:lnSpc>
-                <a:spcPts val="2400"/>
-              </a:lnSpc>
-              <a:buNone/>
-            </a:pPr>
-            <a:r>
-              <a:rPr lang="en-US" sz="2000" dirty="0">
-                <a:solidFill>
-                  <a:srgbClr val="4A6B5D"/>
-                </a:solidFill>
-                <a:latin typeface="Georgia" pitchFamily="34" charset="0"/>
-                <a:ea typeface="Georgia" pitchFamily="34" charset="-122"/>
-                <a:cs typeface="Georgia" pitchFamily="34" charset="-120"/>
-              </a:rPr>
-              <a:t>What was the editor doing to you?</a:t>
-            </a:r>
-            <a:endParaRPr lang="en-US" sz="2000" dirty="0"/>
-          </a:p>
-        </p:txBody>
-      </p:sp>
-      <p:sp>
-        <p:nvSpPr>
-          <p:cNvPr id="17" name="Shape 15"/>
-          <p:cNvSpPr/>
-          <p:nvPr/>
-        </p:nvSpPr>
-        <p:spPr>
-          <a:xfrm>
-            <a:off x="8156448" y="4224528"/>
-            <a:ext cx="3209544" cy="0"/>
-          </a:xfrm>
-          <a:prstGeom prst="line">
-            <a:avLst/>
-          </a:prstGeom>
-          <a:noFill/>
+            <a:pPr algn="ctr" indent="0" marL="0">
+              <a:buNone/>
+            </a:pPr>
+            <a:r>
+              <a:rPr lang="en-US" sz="1800" dirty="0">
+                <a:solidFill>
+                  <a:srgbClr val="8C3A38"/>
+                </a:solidFill>
+                <a:latin typeface="Arial" pitchFamily="34" charset="0"/>
+                <a:ea typeface="Arial" pitchFamily="34" charset="-122"/>
+                <a:cs typeface="Arial" pitchFamily="34" charset="-120"/>
+              </a:rPr>
+              <a:t>✂</a:t>
+            </a:r>
+            <a:endParaRPr lang="en-US" sz="1800" dirty="0"/>
+          </a:p>
+        </p:txBody>
+      </p:sp>
+      <p:sp>
+        <p:nvSpPr>
+          <p:cNvPr id="12" name="Shape 8"/>
+          <p:cNvSpPr/>
+          <p:nvPr/>
+        </p:nvSpPr>
+        <p:spPr>
+          <a:xfrm>
+            <a:off x="6277356" y="1554480"/>
+            <a:ext cx="2361438" cy="1645920"/>
+          </a:xfrm>
+          <a:prstGeom prst="rect">
+            <a:avLst/>
+          </a:prstGeom>
+          <a:solidFill>
+            <a:srgbClr val="FAF8F1"/>
+          </a:solidFill>
           <a:ln w="9525">
             <a:solidFill>
               <a:srgbClr val="D9D4C4"/>
@@ -4627,63 +4436,86 @@
           </a:ln>
         </p:spPr>
       </p:sp>
-      <p:sp>
-        <p:nvSpPr>
-          <p:cNvPr id="18" name="Text 16"/>
-          <p:cNvSpPr/>
-          <p:nvPr/>
-        </p:nvSpPr>
-        <p:spPr>
-          <a:xfrm>
-            <a:off x="8156448" y="4370832"/>
-            <a:ext cx="3209544" cy="1371600"/>
-          </a:xfrm>
-          <a:prstGeom prst="rect">
-            <a:avLst/>
-          </a:prstGeom>
-          <a:noFill/>
-          <a:ln/>
-        </p:spPr>
-        <p:txBody>
-          <a:bodyPr wrap="square" lIns="0" tIns="0" rIns="0" bIns="0" rtlCol="0" anchor="t"/>
-          <a:lstStyle/>
-          <a:p>
-            <a:pPr indent="0" marL="0">
-              <a:lnSpc>
-                <a:spcPts val="2100"/>
-              </a:lnSpc>
-              <a:buNone/>
-            </a:pPr>
-            <a:r>
-              <a:rPr lang="en-US" sz="1550" dirty="0">
-                <a:solidFill>
-                  <a:srgbClr val="24313F"/>
-                </a:solidFill>
-                <a:latin typeface="Georgia" pitchFamily="34" charset="0"/>
-                <a:ea typeface="Georgia" pitchFamily="34" charset="-122"/>
-                <a:cs typeface="Georgia" pitchFamily="34" charset="-120"/>
-              </a:rPr>
-              <a:t>Not what the scene was about. What the cutting rate did to your attention.</a:t>
-            </a:r>
-            <a:endParaRPr lang="en-US" sz="1550" dirty="0"/>
-          </a:p>
-        </p:txBody>
-      </p:sp>
-      <p:sp>
-        <p:nvSpPr>
-          <p:cNvPr id="19" name="Shape 17"/>
-          <p:cNvSpPr/>
-          <p:nvPr/>
-        </p:nvSpPr>
-        <p:spPr>
-          <a:xfrm>
-            <a:off x="822960" y="6382512"/>
-            <a:ext cx="10543032" cy="0"/>
-          </a:xfrm>
-          <a:prstGeom prst="line">
-            <a:avLst/>
-          </a:prstGeom>
-          <a:noFill/>
+      <p:pic>
+        <p:nvPicPr>
+          <p:cNvPr id="13" name="Image 2" descr="/Users/dogan/Documents/Vaults/Courses/wiki/classes/media-studies/decks/_build/img/toystory-buzz-out.jpg">    </p:cNvPr>
+          <p:cNvPicPr>
+            <a:picLocks noChangeAspect="1"/>
+          </p:cNvPicPr>
+          <p:nvPr/>
+        </p:nvPicPr>
+        <p:blipFill>
+          <a:blip r:embed="rId3"/>
+          <a:stretch>
+            <a:fillRect/>
+          </a:stretch>
+        </p:blipFill>
+        <p:spPr>
+          <a:xfrm>
+            <a:off x="6350508" y="1661675"/>
+            <a:ext cx="2215134" cy="1431530"/>
+          </a:xfrm>
+          <a:prstGeom prst="rect">
+            <a:avLst/>
+          </a:prstGeom>
+        </p:spPr>
+      </p:pic>
+      <p:sp>
+        <p:nvSpPr>
+          <p:cNvPr id="14" name="Text 9"/>
+          <p:cNvSpPr/>
+          <p:nvPr/>
+        </p:nvSpPr>
+        <p:spPr>
+          <a:xfrm>
+            <a:off x="8620506" y="2148840"/>
+            <a:ext cx="411480" cy="457200"/>
+          </a:xfrm>
+          <a:prstGeom prst="rect">
+            <a:avLst/>
+          </a:prstGeom>
+          <a:noFill/>
+          <a:ln/>
+        </p:spPr>
+        <p:txBody>
+          <a:bodyPr wrap="square" lIns="0" tIns="0" rIns="0" bIns="0" rtlCol="0" anchor="ctr"/>
+          <a:lstStyle/>
+          <a:p>
+            <a:pPr algn="ctr" indent="0" marL="0">
+              <a:buNone/>
+            </a:pPr>
+            <a:r>
+              <a:rPr lang="en-US" sz="1800" dirty="0">
+                <a:solidFill>
+                  <a:srgbClr val="8C3A38"/>
+                </a:solidFill>
+                <a:latin typeface="Arial" pitchFamily="34" charset="0"/>
+                <a:ea typeface="Arial" pitchFamily="34" charset="-122"/>
+                <a:cs typeface="Arial" pitchFamily="34" charset="-120"/>
+              </a:rPr>
+              <a:t>✂</a:t>
+            </a:r>
+            <a:endParaRPr lang="en-US" sz="1800" dirty="0"/>
+          </a:p>
+        </p:txBody>
+      </p:sp>
+      <p:sp>
+        <p:nvSpPr>
+          <p:cNvPr id="15" name="Shape 10"/>
+          <p:cNvSpPr/>
+          <p:nvPr/>
+        </p:nvSpPr>
+        <p:spPr>
+          <a:xfrm>
+            <a:off x="9004554" y="1554480"/>
+            <a:ext cx="2361438" cy="1645920"/>
+          </a:xfrm>
+          <a:prstGeom prst="rect">
+            <a:avLst/>
+          </a:prstGeom>
+          <a:solidFill>
+            <a:srgbClr val="FAF8F1"/>
+          </a:solidFill>
           <a:ln w="9525">
             <a:solidFill>
               <a:srgbClr val="D9D4C4"/>
@@ -4692,16 +4524,40 @@
           </a:ln>
         </p:spPr>
       </p:sp>
-      <p:sp>
-        <p:nvSpPr>
-          <p:cNvPr id="20" name="Text 18"/>
-          <p:cNvSpPr/>
-          <p:nvPr/>
-        </p:nvSpPr>
-        <p:spPr>
-          <a:xfrm>
-            <a:off x="822960" y="6419088"/>
-            <a:ext cx="7315200" cy="274320"/>
+      <p:pic>
+        <p:nvPicPr>
+          <p:cNvPr id="16" name="Image 3" descr="/Users/dogan/Documents/Vaults/Courses/wiki/classes/media-studies/decks/_build/img/toystory-woody-window.jpg">    </p:cNvPr>
+          <p:cNvPicPr>
+            <a:picLocks noChangeAspect="1"/>
+          </p:cNvPicPr>
+          <p:nvPr/>
+        </p:nvPicPr>
+        <p:blipFill>
+          <a:blip r:embed="rId4"/>
+          <a:stretch>
+            <a:fillRect/>
+          </a:stretch>
+        </p:blipFill>
+        <p:spPr>
+          <a:xfrm>
+            <a:off x="9077706" y="1661675"/>
+            <a:ext cx="2215134" cy="1431530"/>
+          </a:xfrm>
+          <a:prstGeom prst="rect">
+            <a:avLst/>
+          </a:prstGeom>
+        </p:spPr>
+      </p:pic>
+      <p:sp>
+        <p:nvSpPr>
+          <p:cNvPr id="17" name="Text 11"/>
+          <p:cNvSpPr/>
+          <p:nvPr/>
+        </p:nvSpPr>
+        <p:spPr>
+          <a:xfrm>
+            <a:off x="822960" y="3246120"/>
+            <a:ext cx="10543032" cy="320040"/>
           </a:xfrm>
           <a:prstGeom prst="rect">
             <a:avLst/>
@@ -4713,11 +4569,11 @@
           <a:bodyPr wrap="square" lIns="0" tIns="0" rIns="0" bIns="0" rtlCol="0" anchor="ctr"/>
           <a:lstStyle/>
           <a:p>
-            <a:pPr indent="0" marL="0">
-              <a:buNone/>
-            </a:pPr>
-            <a:r>
-              <a:rPr lang="en-US" sz="900" spc="150" kern="0" dirty="0">
+            <a:pPr algn="ctr" indent="0" marL="0">
+              <a:buNone/>
+            </a:pPr>
+            <a:r>
+              <a:rPr lang="en-US" sz="1100" dirty="0">
                 <a:solidFill>
                   <a:srgbClr val="7A7F72"/>
                 </a:solidFill>
@@ -4725,6 +4581,506 @@
                 <a:ea typeface="Arial" pitchFamily="34" charset="-122"/>
                 <a:cs typeface="Arial" pitchFamily="34" charset="-120"/>
               </a:rPr>
+              <a:t>Toy Story (1995): four shots, three cuts, a few seconds. Mid shot, insert, action, reaction: clap-clap-clap.</a:t>
+            </a:r>
+            <a:endParaRPr lang="en-US" sz="1100" dirty="0"/>
+          </a:p>
+        </p:txBody>
+      </p:sp>
+      <p:sp>
+        <p:nvSpPr>
+          <p:cNvPr id="18" name="Text 12"/>
+          <p:cNvSpPr/>
+          <p:nvPr/>
+        </p:nvSpPr>
+        <p:spPr>
+          <a:xfrm>
+            <a:off x="822960" y="3794760"/>
+            <a:ext cx="914400" cy="411480"/>
+          </a:xfrm>
+          <a:prstGeom prst="rect">
+            <a:avLst/>
+          </a:prstGeom>
+          <a:noFill/>
+          <a:ln/>
+        </p:spPr>
+        <p:txBody>
+          <a:bodyPr wrap="square" lIns="0" tIns="0" rIns="0" bIns="0" rtlCol="0" anchor="ctr"/>
+          <a:lstStyle/>
+          <a:p>
+            <a:pPr indent="0" marL="0">
+              <a:buNone/>
+            </a:pPr>
+            <a:r>
+              <a:rPr lang="en-US" sz="2400" dirty="0">
+                <a:solidFill>
+                  <a:srgbClr val="A3C1AD"/>
+                </a:solidFill>
+                <a:latin typeface="Georgia" pitchFamily="34" charset="0"/>
+                <a:ea typeface="Georgia" pitchFamily="34" charset="-122"/>
+                <a:cs typeface="Georgia" pitchFamily="34" charset="-120"/>
+              </a:rPr>
+              <a:t>01</a:t>
+            </a:r>
+            <a:endParaRPr lang="en-US" sz="2400" dirty="0"/>
+          </a:p>
+        </p:txBody>
+      </p:sp>
+      <p:sp>
+        <p:nvSpPr>
+          <p:cNvPr id="19" name="Text 13"/>
+          <p:cNvSpPr/>
+          <p:nvPr/>
+        </p:nvSpPr>
+        <p:spPr>
+          <a:xfrm>
+            <a:off x="822960" y="4206240"/>
+            <a:ext cx="3209544" cy="731520"/>
+          </a:xfrm>
+          <a:prstGeom prst="rect">
+            <a:avLst/>
+          </a:prstGeom>
+          <a:noFill/>
+          <a:ln/>
+        </p:spPr>
+        <p:txBody>
+          <a:bodyPr wrap="square" lIns="0" tIns="0" rIns="0" bIns="0" rtlCol="0" anchor="t"/>
+          <a:lstStyle/>
+          <a:p>
+            <a:pPr indent="0" marL="0">
+              <a:lnSpc>
+                <a:spcPts val="2200"/>
+              </a:lnSpc>
+              <a:buNone/>
+            </a:pPr>
+            <a:r>
+              <a:rPr lang="en-US" sz="1800" dirty="0">
+                <a:solidFill>
+                  <a:srgbClr val="4A6B5D"/>
+                </a:solidFill>
+                <a:latin typeface="Georgia" pitchFamily="34" charset="0"/>
+                <a:ea typeface="Georgia" pitchFamily="34" charset="-122"/>
+                <a:cs typeface="Georgia" pitchFamily="34" charset="-120"/>
+              </a:rPr>
+              <a:t>How many claps?</a:t>
+            </a:r>
+            <a:endParaRPr lang="en-US" sz="1800" dirty="0"/>
+          </a:p>
+        </p:txBody>
+      </p:sp>
+      <p:sp>
+        <p:nvSpPr>
+          <p:cNvPr id="20" name="Shape 14"/>
+          <p:cNvSpPr/>
+          <p:nvPr/>
+        </p:nvSpPr>
+        <p:spPr>
+          <a:xfrm>
+            <a:off x="822960" y="4983480"/>
+            <a:ext cx="3209544" cy="0"/>
+          </a:xfrm>
+          <a:prstGeom prst="line">
+            <a:avLst/>
+          </a:prstGeom>
+          <a:noFill/>
+          <a:ln w="9525">
+            <a:solidFill>
+              <a:srgbClr val="D9D4C4"/>
+            </a:solidFill>
+            <a:prstDash val="solid"/>
+          </a:ln>
+        </p:spPr>
+      </p:sp>
+      <p:sp>
+        <p:nvSpPr>
+          <p:cNvPr id="21" name="Text 15"/>
+          <p:cNvSpPr/>
+          <p:nvPr/>
+        </p:nvSpPr>
+        <p:spPr>
+          <a:xfrm>
+            <a:off x="822960" y="5102352"/>
+            <a:ext cx="3209544" cy="914400"/>
+          </a:xfrm>
+          <a:prstGeom prst="rect">
+            <a:avLst/>
+          </a:prstGeom>
+          <a:noFill/>
+          <a:ln/>
+        </p:spPr>
+        <p:txBody>
+          <a:bodyPr wrap="square" lIns="0" tIns="0" rIns="0" bIns="0" rtlCol="0" anchor="t"/>
+          <a:lstStyle/>
+          <a:p>
+            <a:pPr indent="0" marL="0">
+              <a:lnSpc>
+                <a:spcPts val="1800"/>
+              </a:lnSpc>
+              <a:buNone/>
+            </a:pPr>
+            <a:r>
+              <a:rPr lang="en-US" sz="1350" dirty="0">
+                <a:solidFill>
+                  <a:srgbClr val="24313F"/>
+                </a:solidFill>
+                <a:latin typeface="Georgia" pitchFamily="34" charset="0"/>
+                <a:ea typeface="Georgia" pitchFamily="34" charset="-122"/>
+                <a:cs typeface="Georgia" pitchFamily="34" charset="-120"/>
+              </a:rPr>
+              <a:t>The count is objective. Write it down first.</a:t>
+            </a:r>
+            <a:endParaRPr lang="en-US" sz="1350" dirty="0"/>
+          </a:p>
+        </p:txBody>
+      </p:sp>
+      <p:sp>
+        <p:nvSpPr>
+          <p:cNvPr id="22" name="Text 16"/>
+          <p:cNvSpPr/>
+          <p:nvPr/>
+        </p:nvSpPr>
+        <p:spPr>
+          <a:xfrm>
+            <a:off x="4489704" y="3794760"/>
+            <a:ext cx="914400" cy="411480"/>
+          </a:xfrm>
+          <a:prstGeom prst="rect">
+            <a:avLst/>
+          </a:prstGeom>
+          <a:noFill/>
+          <a:ln/>
+        </p:spPr>
+        <p:txBody>
+          <a:bodyPr wrap="square" lIns="0" tIns="0" rIns="0" bIns="0" rtlCol="0" anchor="ctr"/>
+          <a:lstStyle/>
+          <a:p>
+            <a:pPr indent="0" marL="0">
+              <a:buNone/>
+            </a:pPr>
+            <a:r>
+              <a:rPr lang="en-US" sz="2400" dirty="0">
+                <a:solidFill>
+                  <a:srgbClr val="A3C1AD"/>
+                </a:solidFill>
+                <a:latin typeface="Georgia" pitchFamily="34" charset="0"/>
+                <a:ea typeface="Georgia" pitchFamily="34" charset="-122"/>
+                <a:cs typeface="Georgia" pitchFamily="34" charset="-120"/>
+              </a:rPr>
+              <a:t>02</a:t>
+            </a:r>
+            <a:endParaRPr lang="en-US" sz="2400" dirty="0"/>
+          </a:p>
+        </p:txBody>
+      </p:sp>
+      <p:sp>
+        <p:nvSpPr>
+          <p:cNvPr id="23" name="Text 17"/>
+          <p:cNvSpPr/>
+          <p:nvPr/>
+        </p:nvSpPr>
+        <p:spPr>
+          <a:xfrm>
+            <a:off x="4489704" y="4206240"/>
+            <a:ext cx="3209544" cy="731520"/>
+          </a:xfrm>
+          <a:prstGeom prst="rect">
+            <a:avLst/>
+          </a:prstGeom>
+          <a:noFill/>
+          <a:ln/>
+        </p:spPr>
+        <p:txBody>
+          <a:bodyPr wrap="square" lIns="0" tIns="0" rIns="0" bIns="0" rtlCol="0" anchor="t"/>
+          <a:lstStyle/>
+          <a:p>
+            <a:pPr indent="0" marL="0">
+              <a:lnSpc>
+                <a:spcPts val="2200"/>
+              </a:lnSpc>
+              <a:buNone/>
+            </a:pPr>
+            <a:r>
+              <a:rPr lang="en-US" sz="1800" dirty="0">
+                <a:solidFill>
+                  <a:srgbClr val="4A6B5D"/>
+                </a:solidFill>
+                <a:latin typeface="Georgia" pitchFamily="34" charset="0"/>
+                <a:ea typeface="Georgia" pitchFamily="34" charset="-122"/>
+                <a:cs typeface="Georgia" pitchFamily="34" charset="-120"/>
+              </a:rPr>
+              <a:t>How did you feel?</a:t>
+            </a:r>
+            <a:endParaRPr lang="en-US" sz="1800" dirty="0"/>
+          </a:p>
+        </p:txBody>
+      </p:sp>
+      <p:sp>
+        <p:nvSpPr>
+          <p:cNvPr id="24" name="Shape 18"/>
+          <p:cNvSpPr/>
+          <p:nvPr/>
+        </p:nvSpPr>
+        <p:spPr>
+          <a:xfrm>
+            <a:off x="4489704" y="4983480"/>
+            <a:ext cx="3209544" cy="0"/>
+          </a:xfrm>
+          <a:prstGeom prst="line">
+            <a:avLst/>
+          </a:prstGeom>
+          <a:noFill/>
+          <a:ln w="9525">
+            <a:solidFill>
+              <a:srgbClr val="D9D4C4"/>
+            </a:solidFill>
+            <a:prstDash val="solid"/>
+          </a:ln>
+        </p:spPr>
+      </p:sp>
+      <p:sp>
+        <p:nvSpPr>
+          <p:cNvPr id="25" name="Text 19"/>
+          <p:cNvSpPr/>
+          <p:nvPr/>
+        </p:nvSpPr>
+        <p:spPr>
+          <a:xfrm>
+            <a:off x="4489704" y="5102352"/>
+            <a:ext cx="3209544" cy="914400"/>
+          </a:xfrm>
+          <a:prstGeom prst="rect">
+            <a:avLst/>
+          </a:prstGeom>
+          <a:noFill/>
+          <a:ln/>
+        </p:spPr>
+        <p:txBody>
+          <a:bodyPr wrap="square" lIns="0" tIns="0" rIns="0" bIns="0" rtlCol="0" anchor="t"/>
+          <a:lstStyle/>
+          <a:p>
+            <a:pPr indent="0" marL="0">
+              <a:lnSpc>
+                <a:spcPts val="1800"/>
+              </a:lnSpc>
+              <a:buNone/>
+            </a:pPr>
+            <a:r>
+              <a:rPr lang="en-US" sz="1350" dirty="0">
+                <a:solidFill>
+                  <a:srgbClr val="24313F"/>
+                </a:solidFill>
+                <a:latin typeface="Georgia" pitchFamily="34" charset="0"/>
+                <a:ea typeface="Georgia" pitchFamily="34" charset="-122"/>
+                <a:cs typeface="Georgia" pitchFamily="34" charset="-120"/>
+              </a:rPr>
+              <a:t>Restless, held, hurried, allowed to look.</a:t>
+            </a:r>
+            <a:endParaRPr lang="en-US" sz="1350" dirty="0"/>
+          </a:p>
+        </p:txBody>
+      </p:sp>
+      <p:sp>
+        <p:nvSpPr>
+          <p:cNvPr id="26" name="Text 20"/>
+          <p:cNvSpPr/>
+          <p:nvPr/>
+        </p:nvSpPr>
+        <p:spPr>
+          <a:xfrm>
+            <a:off x="8156448" y="3794760"/>
+            <a:ext cx="914400" cy="411480"/>
+          </a:xfrm>
+          <a:prstGeom prst="rect">
+            <a:avLst/>
+          </a:prstGeom>
+          <a:noFill/>
+          <a:ln/>
+        </p:spPr>
+        <p:txBody>
+          <a:bodyPr wrap="square" lIns="0" tIns="0" rIns="0" bIns="0" rtlCol="0" anchor="ctr"/>
+          <a:lstStyle/>
+          <a:p>
+            <a:pPr indent="0" marL="0">
+              <a:buNone/>
+            </a:pPr>
+            <a:r>
+              <a:rPr lang="en-US" sz="2400" dirty="0">
+                <a:solidFill>
+                  <a:srgbClr val="A3C1AD"/>
+                </a:solidFill>
+                <a:latin typeface="Georgia" pitchFamily="34" charset="0"/>
+                <a:ea typeface="Georgia" pitchFamily="34" charset="-122"/>
+                <a:cs typeface="Georgia" pitchFamily="34" charset="-120"/>
+              </a:rPr>
+              <a:t>03</a:t>
+            </a:r>
+            <a:endParaRPr lang="en-US" sz="2400" dirty="0"/>
+          </a:p>
+        </p:txBody>
+      </p:sp>
+      <p:sp>
+        <p:nvSpPr>
+          <p:cNvPr id="27" name="Text 21"/>
+          <p:cNvSpPr/>
+          <p:nvPr/>
+        </p:nvSpPr>
+        <p:spPr>
+          <a:xfrm>
+            <a:off x="8156448" y="4206240"/>
+            <a:ext cx="3209544" cy="731520"/>
+          </a:xfrm>
+          <a:prstGeom prst="rect">
+            <a:avLst/>
+          </a:prstGeom>
+          <a:noFill/>
+          <a:ln/>
+        </p:spPr>
+        <p:txBody>
+          <a:bodyPr wrap="square" lIns="0" tIns="0" rIns="0" bIns="0" rtlCol="0" anchor="t"/>
+          <a:lstStyle/>
+          <a:p>
+            <a:pPr indent="0" marL="0">
+              <a:lnSpc>
+                <a:spcPts val="2200"/>
+              </a:lnSpc>
+              <a:buNone/>
+            </a:pPr>
+            <a:r>
+              <a:rPr lang="en-US" sz="1800" dirty="0">
+                <a:solidFill>
+                  <a:srgbClr val="4A6B5D"/>
+                </a:solidFill>
+                <a:latin typeface="Georgia" pitchFamily="34" charset="0"/>
+                <a:ea typeface="Georgia" pitchFamily="34" charset="-122"/>
+                <a:cs typeface="Georgia" pitchFamily="34" charset="-120"/>
+              </a:rPr>
+              <a:t>What was the editor doing to you?</a:t>
+            </a:r>
+            <a:endParaRPr lang="en-US" sz="1800" dirty="0"/>
+          </a:p>
+        </p:txBody>
+      </p:sp>
+      <p:sp>
+        <p:nvSpPr>
+          <p:cNvPr id="28" name="Shape 22"/>
+          <p:cNvSpPr/>
+          <p:nvPr/>
+        </p:nvSpPr>
+        <p:spPr>
+          <a:xfrm>
+            <a:off x="8156448" y="4983480"/>
+            <a:ext cx="3209544" cy="0"/>
+          </a:xfrm>
+          <a:prstGeom prst="line">
+            <a:avLst/>
+          </a:prstGeom>
+          <a:noFill/>
+          <a:ln w="9525">
+            <a:solidFill>
+              <a:srgbClr val="D9D4C4"/>
+            </a:solidFill>
+            <a:prstDash val="solid"/>
+          </a:ln>
+        </p:spPr>
+      </p:sp>
+      <p:sp>
+        <p:nvSpPr>
+          <p:cNvPr id="29" name="Text 23"/>
+          <p:cNvSpPr/>
+          <p:nvPr/>
+        </p:nvSpPr>
+        <p:spPr>
+          <a:xfrm>
+            <a:off x="8156448" y="5102352"/>
+            <a:ext cx="3209544" cy="914400"/>
+          </a:xfrm>
+          <a:prstGeom prst="rect">
+            <a:avLst/>
+          </a:prstGeom>
+          <a:noFill/>
+          <a:ln/>
+        </p:spPr>
+        <p:txBody>
+          <a:bodyPr wrap="square" lIns="0" tIns="0" rIns="0" bIns="0" rtlCol="0" anchor="t"/>
+          <a:lstStyle/>
+          <a:p>
+            <a:pPr indent="0" marL="0">
+              <a:lnSpc>
+                <a:spcPts val="1800"/>
+              </a:lnSpc>
+              <a:buNone/>
+            </a:pPr>
+            <a:r>
+              <a:rPr lang="en-US" sz="1350" dirty="0">
+                <a:solidFill>
+                  <a:srgbClr val="24313F"/>
+                </a:solidFill>
+                <a:latin typeface="Georgia" pitchFamily="34" charset="0"/>
+                <a:ea typeface="Georgia" pitchFamily="34" charset="-122"/>
+                <a:cs typeface="Georgia" pitchFamily="34" charset="-120"/>
+              </a:rPr>
+              <a:t>Not the scene's subject: the cutting rate's work on your attention.</a:t>
+            </a:r>
+            <a:endParaRPr lang="en-US" sz="1350" dirty="0"/>
+          </a:p>
+        </p:txBody>
+      </p:sp>
+      <p:sp>
+        <p:nvSpPr>
+          <p:cNvPr id="30" name="Shape 24"/>
+          <p:cNvSpPr/>
+          <p:nvPr/>
+        </p:nvSpPr>
+        <p:spPr>
+          <a:xfrm>
+            <a:off x="822960" y="6382512"/>
+            <a:ext cx="10543032" cy="0"/>
+          </a:xfrm>
+          <a:prstGeom prst="line">
+            <a:avLst/>
+          </a:prstGeom>
+          <a:noFill/>
+          <a:ln w="9525">
+            <a:solidFill>
+              <a:srgbClr val="D9D4C4"/>
+            </a:solidFill>
+            <a:prstDash val="solid"/>
+          </a:ln>
+        </p:spPr>
+      </p:sp>
+      <p:sp>
+        <p:nvSpPr>
+          <p:cNvPr id="31" name="Text 25"/>
+          <p:cNvSpPr/>
+          <p:nvPr/>
+        </p:nvSpPr>
+        <p:spPr>
+          <a:xfrm>
+            <a:off x="822960" y="6419088"/>
+            <a:ext cx="7315200" cy="274320"/>
+          </a:xfrm>
+          <a:prstGeom prst="rect">
+            <a:avLst/>
+          </a:prstGeom>
+          <a:noFill/>
+          <a:ln/>
+        </p:spPr>
+        <p:txBody>
+          <a:bodyPr wrap="square" lIns="0" tIns="0" rIns="0" bIns="0" rtlCol="0" anchor="ctr"/>
+          <a:lstStyle/>
+          <a:p>
+            <a:pPr indent="0" marL="0">
+              <a:buNone/>
+            </a:pPr>
+            <a:r>
+              <a:rPr lang="en-US" sz="900" spc="150" kern="0" dirty="0">
+                <a:solidFill>
+                  <a:srgbClr val="7A7F72"/>
+                </a:solidFill>
+                <a:latin typeface="Arial" pitchFamily="34" charset="0"/>
+                <a:ea typeface="Arial" pitchFamily="34" charset="-122"/>
+                <a:cs typeface="Arial" pitchFamily="34" charset="-120"/>
+              </a:rPr>
               <a:t>MEDIA STUDIES 9607 · SEMESTER I</a:t>
             </a:r>
             <a:endParaRPr lang="en-US" sz="900" dirty="0"/>
@@ -4733,7 +5089,7 @@
       </p:sp>
       <p:sp>
         <p:nvSpPr>
-          <p:cNvPr id="21" name="Text 19"/>
+          <p:cNvPr id="32" name="Text 26"/>
           <p:cNvSpPr/>
           <p:nvPr/>
         </p:nvSpPr>
@@ -4849,7 +5205,7 @@
         </p:nvSpPr>
         <p:spPr>
           <a:xfrm>
-            <a:off x="822960" y="1783080"/>
+            <a:off x="822960" y="1737360"/>
             <a:ext cx="10424160" cy="3291840"/>
           </a:xfrm>
           <a:prstGeom prst="rect">
@@ -4864,12 +5220,12 @@
           <a:p>
             <a:pPr indent="0" marL="0">
               <a:lnSpc>
-                <a:spcPts val="4000"/>
+                <a:spcPts val="3600"/>
               </a:lnSpc>
               <a:buNone/>
             </a:pPr>
             <a:r>
-              <a:rPr lang="en-US" sz="3000" dirty="0">
+              <a:rPr lang="en-US" sz="2600" dirty="0">
                 <a:solidFill>
                   <a:srgbClr val="24313F"/>
                 </a:solidFill>
@@ -4877,9 +5233,9 @@
                 <a:ea typeface="Georgia" pitchFamily="34" charset="-122"/>
                 <a:cs typeface="Georgia" pitchFamily="34" charset="-120"/>
               </a:rPr>
-              <a:t>Editing short sequences, just two or three shots to begin with: shot / reverse shot for a conversation between two people, which is also an opportunity to highlight the 180-degree rule.</a:t>
-            </a:r>
-            <a:endParaRPr lang="en-US" sz="3000" dirty="0"/>
+              <a:t>Editing short sequences, just two or three shots to begin with: someone looking off-screen followed by the object they are looking at; shot / reverse shot for a conversation between two people (which is also an opportunity to highlight the 180-degree rule).</a:t>
+            </a:r>
+            <a:endParaRPr lang="en-US" sz="2600" dirty="0"/>
           </a:p>
         </p:txBody>
       </p:sp>
@@ -5049,7 +5405,7 @@
                 <a:ea typeface="Arial" pitchFamily="34" charset="-122"/>
                 <a:cs typeface="Arial" pitchFamily="34" charset="-120"/>
               </a:rPr>
-              <a:t>AN INVISIBLE GRAMMAR, EACH ITEM ON A CLIP</a:t>
+              <a:t>AN INVISIBLE GRAMMAR, EACH ITEM ON A FRAME</a:t>
             </a:r>
             <a:endParaRPr lang="en-US" sz="1100" dirty="0"/>
           </a:p>
@@ -5080,97 +5436,21 @@
       </p:sp>
       <p:sp>
         <p:nvSpPr>
-          <p:cNvPr id="5" name="Text 3"/>
-          <p:cNvSpPr/>
-          <p:nvPr/>
-        </p:nvSpPr>
-        <p:spPr>
-          <a:xfrm>
-            <a:off x="822960" y="932688"/>
-            <a:ext cx="10543032" cy="640080"/>
-          </a:xfrm>
-          <a:prstGeom prst="rect">
-            <a:avLst/>
-          </a:prstGeom>
-          <a:noFill/>
-          <a:ln/>
-        </p:spPr>
-        <p:txBody>
-          <a:bodyPr wrap="square" lIns="0" tIns="0" rIns="0" bIns="0" rtlCol="0" anchor="ctr"/>
-          <a:lstStyle/>
-          <a:p>
-            <a:pPr indent="0" marL="0">
-              <a:buNone/>
-            </a:pPr>
-            <a:r>
-              <a:rPr lang="en-US" sz="3200" dirty="0">
-                <a:solidFill>
-                  <a:srgbClr val="24313F"/>
-                </a:solidFill>
-                <a:latin typeface="Georgia" pitchFamily="34" charset="0"/>
-                <a:ea typeface="Georgia" pitchFamily="34" charset="-122"/>
-                <a:cs typeface="Georgia" pitchFamily="34" charset="-120"/>
-              </a:rPr>
-              <a:t>The rules that stop you noticing</a:t>
-            </a:r>
-            <a:endParaRPr lang="en-US" sz="3200" dirty="0"/>
-          </a:p>
-        </p:txBody>
-      </p:sp>
-      <p:sp>
-        <p:nvSpPr>
-          <p:cNvPr id="6" name="Text 4"/>
-          <p:cNvSpPr/>
-          <p:nvPr/>
-        </p:nvSpPr>
-        <p:spPr>
-          <a:xfrm>
-            <a:off x="822960" y="1828800"/>
-            <a:ext cx="4997196" cy="384048"/>
-          </a:xfrm>
-          <a:prstGeom prst="rect">
-            <a:avLst/>
-          </a:prstGeom>
-          <a:noFill/>
-          <a:ln/>
-        </p:spPr>
-        <p:txBody>
-          <a:bodyPr wrap="square" lIns="0" tIns="0" rIns="0" bIns="0" rtlCol="0" anchor="ctr"/>
-          <a:lstStyle/>
-          <a:p>
-            <a:pPr indent="0" marL="0">
-              <a:buNone/>
-            </a:pPr>
-            <a:r>
-              <a:rPr lang="en-US" sz="2000" dirty="0">
-                <a:solidFill>
-                  <a:srgbClr val="4A6B5D"/>
-                </a:solidFill>
-                <a:latin typeface="Georgia" pitchFamily="34" charset="0"/>
-                <a:ea typeface="Georgia" pitchFamily="34" charset="-122"/>
-                <a:cs typeface="Georgia" pitchFamily="34" charset="-120"/>
-              </a:rPr>
-              <a:t>The 180-degree rule</a:t>
-            </a:r>
-            <a:endParaRPr lang="en-US" sz="2000" dirty="0"/>
-          </a:p>
-        </p:txBody>
-      </p:sp>
-      <p:sp>
-        <p:nvSpPr>
-          <p:cNvPr id="7" name="Shape 5"/>
-          <p:cNvSpPr/>
-          <p:nvPr/>
-        </p:nvSpPr>
-        <p:spPr>
-          <a:xfrm>
-            <a:off x="822960" y="2249424"/>
-            <a:ext cx="4997196" cy="0"/>
-          </a:xfrm>
-          <a:prstGeom prst="line">
-            <a:avLst/>
-          </a:prstGeom>
-          <a:noFill/>
+          <p:cNvPr id="5" name="Shape 3"/>
+          <p:cNvSpPr/>
+          <p:nvPr/>
+        </p:nvSpPr>
+        <p:spPr>
+          <a:xfrm>
+            <a:off x="822960" y="1051560"/>
+            <a:ext cx="3270504" cy="1691640"/>
+          </a:xfrm>
+          <a:prstGeom prst="rect">
+            <a:avLst/>
+          </a:prstGeom>
+          <a:solidFill>
+            <a:srgbClr val="FAF8F1"/>
+          </a:solidFill>
           <a:ln w="9525">
             <a:solidFill>
               <a:srgbClr val="D9D4C4"/>
@@ -5179,102 +5459,128 @@
           </a:ln>
         </p:spPr>
       </p:sp>
-      <p:sp>
-        <p:nvSpPr>
-          <p:cNvPr id="8" name="Text 6"/>
-          <p:cNvSpPr/>
-          <p:nvPr/>
-        </p:nvSpPr>
-        <p:spPr>
-          <a:xfrm>
-            <a:off x="822960" y="2359152"/>
-            <a:ext cx="4997196" cy="685800"/>
-          </a:xfrm>
-          <a:prstGeom prst="rect">
-            <a:avLst/>
-          </a:prstGeom>
-          <a:noFill/>
-          <a:ln/>
-        </p:spPr>
-        <p:txBody>
-          <a:bodyPr wrap="square" lIns="0" tIns="0" rIns="0" bIns="0" rtlCol="0" anchor="t"/>
+      <p:pic>
+        <p:nvPicPr>
+          <p:cNvPr id="6" name="Image 0" descr="/Users/dogan/Documents/Vaults/Courses/wiki/classes/media-studies/decks/_build/img/adolescence-father-ots.jpg">    </p:cNvPr>
+          <p:cNvPicPr>
+            <a:picLocks noChangeAspect="1"/>
+          </p:cNvPicPr>
+          <p:nvPr/>
+        </p:nvPicPr>
+        <p:blipFill>
+          <a:blip r:embed="rId1"/>
+          <a:stretch>
+            <a:fillRect/>
+          </a:stretch>
+        </p:blipFill>
+        <p:spPr>
+          <a:xfrm>
+            <a:off x="913659" y="1124712"/>
+            <a:ext cx="3089106" cy="1545336"/>
+          </a:xfrm>
+          <a:prstGeom prst="rect">
+            <a:avLst/>
+          </a:prstGeom>
+        </p:spPr>
+      </p:pic>
+      <p:sp>
+        <p:nvSpPr>
+          <p:cNvPr id="7" name="Text 4"/>
+          <p:cNvSpPr/>
+          <p:nvPr/>
+        </p:nvSpPr>
+        <p:spPr>
+          <a:xfrm>
+            <a:off x="822960" y="2788920"/>
+            <a:ext cx="3270504" cy="310896"/>
+          </a:xfrm>
+          <a:prstGeom prst="rect">
+            <a:avLst/>
+          </a:prstGeom>
+          <a:noFill/>
+          <a:ln/>
+        </p:spPr>
+        <p:txBody>
+          <a:bodyPr wrap="square" lIns="0" tIns="0" rIns="0" bIns="0" rtlCol="0" anchor="ctr"/>
           <a:lstStyle/>
           <a:p>
             <a:pPr indent="0" marL="0">
-              <a:lnSpc>
-                <a:spcPts val="2000"/>
-              </a:lnSpc>
-              <a:buNone/>
-            </a:pPr>
-            <a:r>
-              <a:rPr lang="en-US" sz="1500" dirty="0">
-                <a:solidFill>
-                  <a:srgbClr val="24313F"/>
+              <a:buNone/>
+            </a:pPr>
+            <a:r>
+              <a:rPr lang="en-US" sz="1550" dirty="0">
+                <a:solidFill>
+                  <a:srgbClr val="4A6B5D"/>
                 </a:solidFill>
                 <a:latin typeface="Georgia" pitchFamily="34" charset="0"/>
                 <a:ea typeface="Georgia" pitchFamily="34" charset="-122"/>
                 <a:cs typeface="Georgia" pitchFamily="34" charset="-120"/>
               </a:rPr>
-              <a:t>Stay one side of the line drawn between two subjects, and screen direction holds.</a:t>
-            </a:r>
-            <a:endParaRPr lang="en-US" sz="1500" dirty="0"/>
-          </a:p>
-        </p:txBody>
-      </p:sp>
-      <p:sp>
-        <p:nvSpPr>
-          <p:cNvPr id="9" name="Text 7"/>
-          <p:cNvSpPr/>
-          <p:nvPr/>
-        </p:nvSpPr>
-        <p:spPr>
-          <a:xfrm>
-            <a:off x="6368796" y="1828800"/>
-            <a:ext cx="4997196" cy="384048"/>
-          </a:xfrm>
-          <a:prstGeom prst="rect">
-            <a:avLst/>
-          </a:prstGeom>
-          <a:noFill/>
-          <a:ln/>
-        </p:spPr>
-        <p:txBody>
-          <a:bodyPr wrap="square" lIns="0" tIns="0" rIns="0" bIns="0" rtlCol="0" anchor="ctr"/>
+              <a:t>Shot / reverse shot</a:t>
+            </a:r>
+            <a:endParaRPr lang="en-US" sz="1550" dirty="0"/>
+          </a:p>
+        </p:txBody>
+      </p:sp>
+      <p:sp>
+        <p:nvSpPr>
+          <p:cNvPr id="8" name="Text 5"/>
+          <p:cNvSpPr/>
+          <p:nvPr/>
+        </p:nvSpPr>
+        <p:spPr>
+          <a:xfrm>
+            <a:off x="822960" y="3099816"/>
+            <a:ext cx="3270504" cy="457200"/>
+          </a:xfrm>
+          <a:prstGeom prst="rect">
+            <a:avLst/>
+          </a:prstGeom>
+          <a:noFill/>
+          <a:ln/>
+        </p:spPr>
+        <p:txBody>
+          <a:bodyPr wrap="square" lIns="0" tIns="0" rIns="0" bIns="0" rtlCol="0" anchor="t"/>
           <a:lstStyle/>
           <a:p>
             <a:pPr indent="0" marL="0">
-              <a:buNone/>
-            </a:pPr>
-            <a:r>
-              <a:rPr lang="en-US" sz="2000" dirty="0">
-                <a:solidFill>
-                  <a:srgbClr val="4A6B5D"/>
-                </a:solidFill>
-                <a:latin typeface="Georgia" pitchFamily="34" charset="0"/>
-                <a:ea typeface="Georgia" pitchFamily="34" charset="-122"/>
-                <a:cs typeface="Georgia" pitchFamily="34" charset="-120"/>
-              </a:rPr>
-              <a:t>Shot / reverse shot</a:t>
-            </a:r>
-            <a:endParaRPr lang="en-US" sz="2000" dirty="0"/>
-          </a:p>
-        </p:txBody>
-      </p:sp>
-      <p:sp>
-        <p:nvSpPr>
-          <p:cNvPr id="10" name="Shape 8"/>
-          <p:cNvSpPr/>
-          <p:nvPr/>
-        </p:nvSpPr>
-        <p:spPr>
-          <a:xfrm>
-            <a:off x="6368796" y="2249424"/>
-            <a:ext cx="4997196" cy="0"/>
-          </a:xfrm>
-          <a:prstGeom prst="line">
-            <a:avLst/>
-          </a:prstGeom>
-          <a:noFill/>
+              <a:lnSpc>
+                <a:spcPts val="1300"/>
+              </a:lnSpc>
+              <a:buNone/>
+            </a:pPr>
+            <a:r>
+              <a:rPr lang="en-US" sz="1050" i="1" dirty="0">
+                <a:solidFill>
+                  <a:srgbClr val="7A7F72"/>
+                </a:solidFill>
+                <a:latin typeface="Arial" pitchFamily="34" charset="0"/>
+                <a:ea typeface="Arial" pitchFamily="34" charset="-122"/>
+                <a:cs typeface="Arial" pitchFamily="34" charset="-120"/>
+              </a:rPr>
+              <a:t>two angles that never share a frame</a:t>
+            </a:r>
+            <a:endParaRPr lang="en-US" sz="1050" dirty="0"/>
+          </a:p>
+        </p:txBody>
+      </p:sp>
+      <p:sp>
+        <p:nvSpPr>
+          <p:cNvPr id="9" name="Shape 6"/>
+          <p:cNvSpPr/>
+          <p:nvPr/>
+        </p:nvSpPr>
+        <p:spPr>
+          <a:xfrm>
+            <a:off x="4459224" y="1051560"/>
+            <a:ext cx="3270504" cy="1691640"/>
+          </a:xfrm>
+          <a:prstGeom prst="rect">
+            <a:avLst/>
+          </a:prstGeom>
+          <a:solidFill>
+            <a:srgbClr val="FAF8F1"/>
+          </a:solidFill>
           <a:ln w="9525">
             <a:solidFill>
               <a:srgbClr val="D9D4C4"/>
@@ -5283,102 +5589,128 @@
           </a:ln>
         </p:spPr>
       </p:sp>
-      <p:sp>
-        <p:nvSpPr>
-          <p:cNvPr id="11" name="Text 9"/>
-          <p:cNvSpPr/>
-          <p:nvPr/>
-        </p:nvSpPr>
-        <p:spPr>
-          <a:xfrm>
-            <a:off x="6368796" y="2359152"/>
-            <a:ext cx="4997196" cy="685800"/>
-          </a:xfrm>
-          <a:prstGeom prst="rect">
-            <a:avLst/>
-          </a:prstGeom>
-          <a:noFill/>
-          <a:ln/>
-        </p:spPr>
-        <p:txBody>
-          <a:bodyPr wrap="square" lIns="0" tIns="0" rIns="0" bIns="0" rtlCol="0" anchor="t"/>
+      <p:pic>
+        <p:nvPicPr>
+          <p:cNvPr id="10" name="Image 1" descr="/Users/dogan/Documents/Vaults/Courses/wiki/classes/media-studies/decks/_build/img/toystory-woody-window.jpg">    </p:cNvPr>
+          <p:cNvPicPr>
+            <a:picLocks noChangeAspect="1"/>
+          </p:cNvPicPr>
+          <p:nvPr/>
+        </p:nvPicPr>
+        <p:blipFill>
+          <a:blip r:embed="rId2"/>
+          <a:stretch>
+            <a:fillRect/>
+          </a:stretch>
+        </p:blipFill>
+        <p:spPr>
+          <a:xfrm>
+            <a:off x="4898858" y="1124712"/>
+            <a:ext cx="2391236" cy="1545336"/>
+          </a:xfrm>
+          <a:prstGeom prst="rect">
+            <a:avLst/>
+          </a:prstGeom>
+        </p:spPr>
+      </p:pic>
+      <p:sp>
+        <p:nvSpPr>
+          <p:cNvPr id="11" name="Text 7"/>
+          <p:cNvSpPr/>
+          <p:nvPr/>
+        </p:nvSpPr>
+        <p:spPr>
+          <a:xfrm>
+            <a:off x="4459224" y="2788920"/>
+            <a:ext cx="3270504" cy="310896"/>
+          </a:xfrm>
+          <a:prstGeom prst="rect">
+            <a:avLst/>
+          </a:prstGeom>
+          <a:noFill/>
+          <a:ln/>
+        </p:spPr>
+        <p:txBody>
+          <a:bodyPr wrap="square" lIns="0" tIns="0" rIns="0" bIns="0" rtlCol="0" anchor="ctr"/>
           <a:lstStyle/>
           <a:p>
             <a:pPr indent="0" marL="0">
-              <a:lnSpc>
-                <a:spcPts val="2000"/>
-              </a:lnSpc>
-              <a:buNone/>
-            </a:pPr>
-            <a:r>
-              <a:rPr lang="en-US" sz="1500" dirty="0">
-                <a:solidFill>
-                  <a:srgbClr val="24313F"/>
+              <a:buNone/>
+            </a:pPr>
+            <a:r>
+              <a:rPr lang="en-US" sz="1550" dirty="0">
+                <a:solidFill>
+                  <a:srgbClr val="4A6B5D"/>
                 </a:solidFill>
                 <a:latin typeface="Georgia" pitchFamily="34" charset="0"/>
                 <a:ea typeface="Georgia" pitchFamily="34" charset="-122"/>
                 <a:cs typeface="Georgia" pitchFamily="34" charset="-120"/>
               </a:rPr>
-              <a:t>A conversation assembled from two angles that never appear in the same frame.</a:t>
-            </a:r>
-            <a:endParaRPr lang="en-US" sz="1500" dirty="0"/>
-          </a:p>
-        </p:txBody>
-      </p:sp>
-      <p:sp>
-        <p:nvSpPr>
-          <p:cNvPr id="12" name="Text 10"/>
-          <p:cNvSpPr/>
-          <p:nvPr/>
-        </p:nvSpPr>
-        <p:spPr>
-          <a:xfrm>
-            <a:off x="822960" y="3127248"/>
-            <a:ext cx="4997196" cy="384048"/>
-          </a:xfrm>
-          <a:prstGeom prst="rect">
-            <a:avLst/>
-          </a:prstGeom>
-          <a:noFill/>
-          <a:ln/>
-        </p:spPr>
-        <p:txBody>
-          <a:bodyPr wrap="square" lIns="0" tIns="0" rIns="0" bIns="0" rtlCol="0" anchor="ctr"/>
+              <a:t>Eyeline match</a:t>
+            </a:r>
+            <a:endParaRPr lang="en-US" sz="1550" dirty="0"/>
+          </a:p>
+        </p:txBody>
+      </p:sp>
+      <p:sp>
+        <p:nvSpPr>
+          <p:cNvPr id="12" name="Text 8"/>
+          <p:cNvSpPr/>
+          <p:nvPr/>
+        </p:nvSpPr>
+        <p:spPr>
+          <a:xfrm>
+            <a:off x="4459224" y="3099816"/>
+            <a:ext cx="3270504" cy="457200"/>
+          </a:xfrm>
+          <a:prstGeom prst="rect">
+            <a:avLst/>
+          </a:prstGeom>
+          <a:noFill/>
+          <a:ln/>
+        </p:spPr>
+        <p:txBody>
+          <a:bodyPr wrap="square" lIns="0" tIns="0" rIns="0" bIns="0" rtlCol="0" anchor="t"/>
           <a:lstStyle/>
           <a:p>
             <a:pPr indent="0" marL="0">
-              <a:buNone/>
-            </a:pPr>
-            <a:r>
-              <a:rPr lang="en-US" sz="2000" dirty="0">
-                <a:solidFill>
-                  <a:srgbClr val="4A6B5D"/>
-                </a:solidFill>
-                <a:latin typeface="Georgia" pitchFamily="34" charset="0"/>
-                <a:ea typeface="Georgia" pitchFamily="34" charset="-122"/>
-                <a:cs typeface="Georgia" pitchFamily="34" charset="-120"/>
-              </a:rPr>
-              <a:t>Eyeline match</a:t>
-            </a:r>
-            <a:endParaRPr lang="en-US" sz="2000" dirty="0"/>
-          </a:p>
-        </p:txBody>
-      </p:sp>
-      <p:sp>
-        <p:nvSpPr>
-          <p:cNvPr id="13" name="Shape 11"/>
-          <p:cNvSpPr/>
-          <p:nvPr/>
-        </p:nvSpPr>
-        <p:spPr>
-          <a:xfrm>
-            <a:off x="822960" y="3547872"/>
-            <a:ext cx="4997196" cy="0"/>
-          </a:xfrm>
-          <a:prstGeom prst="line">
-            <a:avLst/>
-          </a:prstGeom>
-          <a:noFill/>
+              <a:lnSpc>
+                <a:spcPts val="1300"/>
+              </a:lnSpc>
+              <a:buNone/>
+            </a:pPr>
+            <a:r>
+              <a:rPr lang="en-US" sz="1050" i="1" dirty="0">
+                <a:solidFill>
+                  <a:srgbClr val="7A7F72"/>
+                </a:solidFill>
+                <a:latin typeface="Arial" pitchFamily="34" charset="0"/>
+                <a:ea typeface="Arial" pitchFamily="34" charset="-122"/>
+                <a:cs typeface="Arial" pitchFamily="34" charset="-120"/>
+              </a:rPr>
+              <a:t>he looks down; the next shot is what he sees</a:t>
+            </a:r>
+            <a:endParaRPr lang="en-US" sz="1050" dirty="0"/>
+          </a:p>
+        </p:txBody>
+      </p:sp>
+      <p:sp>
+        <p:nvSpPr>
+          <p:cNvPr id="13" name="Shape 9"/>
+          <p:cNvSpPr/>
+          <p:nvPr/>
+        </p:nvSpPr>
+        <p:spPr>
+          <a:xfrm>
+            <a:off x="8095488" y="1051560"/>
+            <a:ext cx="3270504" cy="1691640"/>
+          </a:xfrm>
+          <a:prstGeom prst="rect">
+            <a:avLst/>
+          </a:prstGeom>
+          <a:solidFill>
+            <a:srgbClr val="FAF8F1"/>
+          </a:solidFill>
           <a:ln w="9525">
             <a:solidFill>
               <a:srgbClr val="D9D4C4"/>
@@ -5387,102 +5719,128 @@
           </a:ln>
         </p:spPr>
       </p:sp>
-      <p:sp>
-        <p:nvSpPr>
-          <p:cNvPr id="14" name="Text 12"/>
-          <p:cNvSpPr/>
-          <p:nvPr/>
-        </p:nvSpPr>
-        <p:spPr>
-          <a:xfrm>
-            <a:off x="822960" y="3657600"/>
-            <a:ext cx="4997196" cy="685800"/>
-          </a:xfrm>
-          <a:prstGeom prst="rect">
-            <a:avLst/>
-          </a:prstGeom>
-          <a:noFill/>
-          <a:ln/>
-        </p:spPr>
-        <p:txBody>
-          <a:bodyPr wrap="square" lIns="0" tIns="0" rIns="0" bIns="0" rtlCol="0" anchor="t"/>
+      <p:pic>
+        <p:nvPicPr>
+          <p:cNvPr id="14" name="Image 2" descr="/Users/dogan/Documents/Vaults/Courses/wiki/classes/media-studies/decks/_build/img/toystory-remote-ecu.jpg">    </p:cNvPr>
+          <p:cNvPicPr>
+            <a:picLocks noChangeAspect="1"/>
+          </p:cNvPicPr>
+          <p:nvPr/>
+        </p:nvPicPr>
+        <p:blipFill>
+          <a:blip r:embed="rId3"/>
+          <a:stretch>
+            <a:fillRect/>
+          </a:stretch>
+        </p:blipFill>
+        <p:spPr>
+          <a:xfrm>
+            <a:off x="8535122" y="1124712"/>
+            <a:ext cx="2391236" cy="1545336"/>
+          </a:xfrm>
+          <a:prstGeom prst="rect">
+            <a:avLst/>
+          </a:prstGeom>
+        </p:spPr>
+      </p:pic>
+      <p:sp>
+        <p:nvSpPr>
+          <p:cNvPr id="15" name="Text 10"/>
+          <p:cNvSpPr/>
+          <p:nvPr/>
+        </p:nvSpPr>
+        <p:spPr>
+          <a:xfrm>
+            <a:off x="8095488" y="2788920"/>
+            <a:ext cx="3270504" cy="310896"/>
+          </a:xfrm>
+          <a:prstGeom prst="rect">
+            <a:avLst/>
+          </a:prstGeom>
+          <a:noFill/>
+          <a:ln/>
+        </p:spPr>
+        <p:txBody>
+          <a:bodyPr wrap="square" lIns="0" tIns="0" rIns="0" bIns="0" rtlCol="0" anchor="ctr"/>
           <a:lstStyle/>
           <a:p>
             <a:pPr indent="0" marL="0">
-              <a:lnSpc>
-                <a:spcPts val="2000"/>
-              </a:lnSpc>
-              <a:buNone/>
-            </a:pPr>
-            <a:r>
-              <a:rPr lang="en-US" sz="1500" dirty="0">
-                <a:solidFill>
-                  <a:srgbClr val="24313F"/>
+              <a:buNone/>
+            </a:pPr>
+            <a:r>
+              <a:rPr lang="en-US" sz="1550" dirty="0">
+                <a:solidFill>
+                  <a:srgbClr val="4A6B5D"/>
                 </a:solidFill>
                 <a:latin typeface="Georgia" pitchFamily="34" charset="0"/>
                 <a:ea typeface="Georgia" pitchFamily="34" charset="-122"/>
                 <a:cs typeface="Georgia" pitchFamily="34" charset="-120"/>
               </a:rPr>
-              <a:t>Someone looks off-screen; the next shot is what they are looking at. The cut supplies the sightline.</a:t>
-            </a:r>
-            <a:endParaRPr lang="en-US" sz="1500" dirty="0"/>
-          </a:p>
-        </p:txBody>
-      </p:sp>
-      <p:sp>
-        <p:nvSpPr>
-          <p:cNvPr id="15" name="Text 13"/>
-          <p:cNvSpPr/>
-          <p:nvPr/>
-        </p:nvSpPr>
-        <p:spPr>
-          <a:xfrm>
-            <a:off x="6368796" y="3127248"/>
-            <a:ext cx="4997196" cy="384048"/>
-          </a:xfrm>
-          <a:prstGeom prst="rect">
-            <a:avLst/>
-          </a:prstGeom>
-          <a:noFill/>
-          <a:ln/>
-        </p:spPr>
-        <p:txBody>
-          <a:bodyPr wrap="square" lIns="0" tIns="0" rIns="0" bIns="0" rtlCol="0" anchor="ctr"/>
+              <a:t>Cutaway and insert</a:t>
+            </a:r>
+            <a:endParaRPr lang="en-US" sz="1550" dirty="0"/>
+          </a:p>
+        </p:txBody>
+      </p:sp>
+      <p:sp>
+        <p:nvSpPr>
+          <p:cNvPr id="16" name="Text 11"/>
+          <p:cNvSpPr/>
+          <p:nvPr/>
+        </p:nvSpPr>
+        <p:spPr>
+          <a:xfrm>
+            <a:off x="8095488" y="3099816"/>
+            <a:ext cx="3270504" cy="457200"/>
+          </a:xfrm>
+          <a:prstGeom prst="rect">
+            <a:avLst/>
+          </a:prstGeom>
+          <a:noFill/>
+          <a:ln/>
+        </p:spPr>
+        <p:txBody>
+          <a:bodyPr wrap="square" lIns="0" tIns="0" rIns="0" bIns="0" rtlCol="0" anchor="t"/>
           <a:lstStyle/>
           <a:p>
             <a:pPr indent="0" marL="0">
-              <a:buNone/>
-            </a:pPr>
-            <a:r>
-              <a:rPr lang="en-US" sz="2000" dirty="0">
-                <a:solidFill>
-                  <a:srgbClr val="4A6B5D"/>
-                </a:solidFill>
-                <a:latin typeface="Georgia" pitchFamily="34" charset="0"/>
-                <a:ea typeface="Georgia" pitchFamily="34" charset="-122"/>
-                <a:cs typeface="Georgia" pitchFamily="34" charset="-120"/>
-              </a:rPr>
-              <a:t>Match on action</a:t>
-            </a:r>
-            <a:endParaRPr lang="en-US" sz="2000" dirty="0"/>
-          </a:p>
-        </p:txBody>
-      </p:sp>
-      <p:sp>
-        <p:nvSpPr>
-          <p:cNvPr id="16" name="Shape 14"/>
-          <p:cNvSpPr/>
-          <p:nvPr/>
-        </p:nvSpPr>
-        <p:spPr>
-          <a:xfrm>
-            <a:off x="6368796" y="3547872"/>
-            <a:ext cx="4997196" cy="0"/>
-          </a:xfrm>
-          <a:prstGeom prst="line">
-            <a:avLst/>
-          </a:prstGeom>
-          <a:noFill/>
+              <a:lnSpc>
+                <a:spcPts val="1300"/>
+              </a:lnSpc>
+              <a:buNone/>
+            </a:pPr>
+            <a:r>
+              <a:rPr lang="en-US" sz="1050" i="1" dirty="0">
+                <a:solidFill>
+                  <a:srgbClr val="7A7F72"/>
+                </a:solidFill>
+                <a:latin typeface="Arial" pitchFamily="34" charset="0"/>
+                <a:ea typeface="Arial" pitchFamily="34" charset="-122"/>
+                <a:cs typeface="Arial" pitchFamily="34" charset="-120"/>
+              </a:rPr>
+              <a:t>a detail that buys time and hides a join</a:t>
+            </a:r>
+            <a:endParaRPr lang="en-US" sz="1050" dirty="0"/>
+          </a:p>
+        </p:txBody>
+      </p:sp>
+      <p:sp>
+        <p:nvSpPr>
+          <p:cNvPr id="17" name="Shape 12"/>
+          <p:cNvSpPr/>
+          <p:nvPr/>
+        </p:nvSpPr>
+        <p:spPr>
+          <a:xfrm>
+            <a:off x="822960" y="3657600"/>
+            <a:ext cx="3270504" cy="1691640"/>
+          </a:xfrm>
+          <a:prstGeom prst="rect">
+            <a:avLst/>
+          </a:prstGeom>
+          <a:solidFill>
+            <a:srgbClr val="FAF8F1"/>
+          </a:solidFill>
           <a:ln w="9525">
             <a:solidFill>
               <a:srgbClr val="D9D4C4"/>
@@ -5493,100 +5851,347 @@
       </p:sp>
       <p:sp>
         <p:nvSpPr>
-          <p:cNvPr id="17" name="Text 15"/>
-          <p:cNvSpPr/>
-          <p:nvPr/>
-        </p:nvSpPr>
-        <p:spPr>
-          <a:xfrm>
-            <a:off x="6368796" y="3657600"/>
-            <a:ext cx="4997196" cy="685800"/>
-          </a:xfrm>
-          <a:prstGeom prst="rect">
-            <a:avLst/>
-          </a:prstGeom>
-          <a:noFill/>
-          <a:ln/>
-        </p:spPr>
-        <p:txBody>
-          <a:bodyPr wrap="square" lIns="0" tIns="0" rIns="0" bIns="0" rtlCol="0" anchor="t"/>
+          <p:cNvPr id="18" name="Shape 13"/>
+          <p:cNvSpPr/>
+          <p:nvPr/>
+        </p:nvSpPr>
+        <p:spPr>
+          <a:xfrm>
+            <a:off x="1874520" y="3913632"/>
+            <a:ext cx="365760" cy="365760"/>
+          </a:xfrm>
+          <a:prstGeom prst="ellipse">
+            <a:avLst/>
+          </a:prstGeom>
+          <a:solidFill>
+            <a:srgbClr val="4A6B5D"/>
+          </a:solidFill>
+          <a:ln/>
+        </p:spPr>
+      </p:sp>
+      <p:sp>
+        <p:nvSpPr>
+          <p:cNvPr id="19" name="Shape 14"/>
+          <p:cNvSpPr/>
+          <p:nvPr/>
+        </p:nvSpPr>
+        <p:spPr>
+          <a:xfrm>
+            <a:off x="2676144" y="3913632"/>
+            <a:ext cx="365760" cy="365760"/>
+          </a:xfrm>
+          <a:prstGeom prst="ellipse">
+            <a:avLst/>
+          </a:prstGeom>
+          <a:solidFill>
+            <a:srgbClr val="5C7A6B"/>
+          </a:solidFill>
+          <a:ln/>
+        </p:spPr>
+      </p:sp>
+      <p:sp>
+        <p:nvSpPr>
+          <p:cNvPr id="20" name="Shape 15"/>
+          <p:cNvSpPr/>
+          <p:nvPr/>
+        </p:nvSpPr>
+        <p:spPr>
+          <a:xfrm>
+            <a:off x="1143000" y="4096512"/>
+            <a:ext cx="2630424" cy="0"/>
+          </a:xfrm>
+          <a:prstGeom prst="line">
+            <a:avLst/>
+          </a:prstGeom>
+          <a:noFill/>
+          <a:ln w="19050">
+            <a:solidFill>
+              <a:srgbClr val="8C3A38"/>
+            </a:solidFill>
+            <a:prstDash val="dash"/>
+          </a:ln>
+        </p:spPr>
+      </p:sp>
+      <p:sp>
+        <p:nvSpPr>
+          <p:cNvPr id="21" name="Shape 16"/>
+          <p:cNvSpPr/>
+          <p:nvPr/>
+        </p:nvSpPr>
+        <p:spPr>
+          <a:xfrm>
+            <a:off x="1508760" y="4800600"/>
+            <a:ext cx="457200" cy="292608"/>
+          </a:xfrm>
+          <a:prstGeom prst="rect">
+            <a:avLst/>
+          </a:prstGeom>
+          <a:solidFill>
+            <a:srgbClr val="24313F"/>
+          </a:solidFill>
+          <a:ln/>
+        </p:spPr>
+      </p:sp>
+      <p:sp>
+        <p:nvSpPr>
+          <p:cNvPr id="22" name="Text 17"/>
+          <p:cNvSpPr/>
+          <p:nvPr/>
+        </p:nvSpPr>
+        <p:spPr>
+          <a:xfrm>
+            <a:off x="1508760" y="4800600"/>
+            <a:ext cx="457200" cy="292608"/>
+          </a:xfrm>
+          <a:prstGeom prst="rect">
+            <a:avLst/>
+          </a:prstGeom>
+          <a:noFill/>
+          <a:ln/>
+        </p:spPr>
+        <p:txBody>
+          <a:bodyPr wrap="square" lIns="0" tIns="0" rIns="0" bIns="0" rtlCol="0" anchor="ctr"/>
+          <a:lstStyle/>
+          <a:p>
+            <a:pPr algn="ctr" indent="0" marL="0">
+              <a:buNone/>
+            </a:pPr>
+            <a:r>
+              <a:rPr lang="en-US" sz="1000" b="1" dirty="0">
+                <a:solidFill>
+                  <a:srgbClr val="FAF8F1"/>
+                </a:solidFill>
+                <a:latin typeface="Arial" pitchFamily="34" charset="0"/>
+                <a:ea typeface="Arial" pitchFamily="34" charset="-122"/>
+                <a:cs typeface="Arial" pitchFamily="34" charset="-120"/>
+              </a:rPr>
+              <a:t>A</a:t>
+            </a:r>
+            <a:endParaRPr lang="en-US" sz="1000" dirty="0"/>
+          </a:p>
+        </p:txBody>
+      </p:sp>
+      <p:sp>
+        <p:nvSpPr>
+          <p:cNvPr id="23" name="Shape 18"/>
+          <p:cNvSpPr/>
+          <p:nvPr/>
+        </p:nvSpPr>
+        <p:spPr>
+          <a:xfrm>
+            <a:off x="2950464" y="4800600"/>
+            <a:ext cx="457200" cy="292608"/>
+          </a:xfrm>
+          <a:prstGeom prst="rect">
+            <a:avLst/>
+          </a:prstGeom>
+          <a:solidFill>
+            <a:srgbClr val="24313F"/>
+          </a:solidFill>
+          <a:ln/>
+        </p:spPr>
+      </p:sp>
+      <p:sp>
+        <p:nvSpPr>
+          <p:cNvPr id="24" name="Text 19"/>
+          <p:cNvSpPr/>
+          <p:nvPr/>
+        </p:nvSpPr>
+        <p:spPr>
+          <a:xfrm>
+            <a:off x="2950464" y="4800600"/>
+            <a:ext cx="457200" cy="292608"/>
+          </a:xfrm>
+          <a:prstGeom prst="rect">
+            <a:avLst/>
+          </a:prstGeom>
+          <a:noFill/>
+          <a:ln/>
+        </p:spPr>
+        <p:txBody>
+          <a:bodyPr wrap="square" lIns="0" tIns="0" rIns="0" bIns="0" rtlCol="0" anchor="ctr"/>
+          <a:lstStyle/>
+          <a:p>
+            <a:pPr algn="ctr" indent="0" marL="0">
+              <a:buNone/>
+            </a:pPr>
+            <a:r>
+              <a:rPr lang="en-US" sz="1000" b="1" dirty="0">
+                <a:solidFill>
+                  <a:srgbClr val="FAF8F1"/>
+                </a:solidFill>
+                <a:latin typeface="Arial" pitchFamily="34" charset="0"/>
+                <a:ea typeface="Arial" pitchFamily="34" charset="-122"/>
+                <a:cs typeface="Arial" pitchFamily="34" charset="-120"/>
+              </a:rPr>
+              <a:t>B</a:t>
+            </a:r>
+            <a:endParaRPr lang="en-US" sz="1000" dirty="0"/>
+          </a:p>
+        </p:txBody>
+      </p:sp>
+      <p:sp>
+        <p:nvSpPr>
+          <p:cNvPr id="25" name="Shape 20"/>
+          <p:cNvSpPr/>
+          <p:nvPr/>
+        </p:nvSpPr>
+        <p:spPr>
+          <a:xfrm>
+            <a:off x="2229612" y="3675888"/>
+            <a:ext cx="457200" cy="292608"/>
+          </a:xfrm>
+          <a:prstGeom prst="rect">
+            <a:avLst/>
+          </a:prstGeom>
+          <a:solidFill>
+            <a:srgbClr val="FAF8F1"/>
+          </a:solidFill>
+          <a:ln w="12700">
+            <a:solidFill>
+              <a:srgbClr val="8C3A38"/>
+            </a:solidFill>
+            <a:prstDash val="solid"/>
+          </a:ln>
+        </p:spPr>
+      </p:sp>
+      <p:sp>
+        <p:nvSpPr>
+          <p:cNvPr id="26" name="Text 21"/>
+          <p:cNvSpPr/>
+          <p:nvPr/>
+        </p:nvSpPr>
+        <p:spPr>
+          <a:xfrm>
+            <a:off x="2229612" y="3675888"/>
+            <a:ext cx="457200" cy="292608"/>
+          </a:xfrm>
+          <a:prstGeom prst="rect">
+            <a:avLst/>
+          </a:prstGeom>
+          <a:noFill/>
+          <a:ln/>
+        </p:spPr>
+        <p:txBody>
+          <a:bodyPr wrap="square" lIns="0" tIns="0" rIns="0" bIns="0" rtlCol="0" anchor="ctr"/>
+          <a:lstStyle/>
+          <a:p>
+            <a:pPr algn="ctr" indent="0" marL="0">
+              <a:buNone/>
+            </a:pPr>
+            <a:r>
+              <a:rPr lang="en-US" sz="1000" b="1" dirty="0">
+                <a:solidFill>
+                  <a:srgbClr val="8C3A38"/>
+                </a:solidFill>
+                <a:latin typeface="Arial" pitchFamily="34" charset="0"/>
+                <a:ea typeface="Arial" pitchFamily="34" charset="-122"/>
+                <a:cs typeface="Arial" pitchFamily="34" charset="-120"/>
+              </a:rPr>
+              <a:t>C ✕</a:t>
+            </a:r>
+            <a:endParaRPr lang="en-US" sz="1000" dirty="0"/>
+          </a:p>
+        </p:txBody>
+      </p:sp>
+      <p:sp>
+        <p:nvSpPr>
+          <p:cNvPr id="27" name="Text 22"/>
+          <p:cNvSpPr/>
+          <p:nvPr/>
+        </p:nvSpPr>
+        <p:spPr>
+          <a:xfrm>
+            <a:off x="822960" y="5394960"/>
+            <a:ext cx="3270504" cy="310896"/>
+          </a:xfrm>
+          <a:prstGeom prst="rect">
+            <a:avLst/>
+          </a:prstGeom>
+          <a:noFill/>
+          <a:ln/>
+        </p:spPr>
+        <p:txBody>
+          <a:bodyPr wrap="square" lIns="0" tIns="0" rIns="0" bIns="0" rtlCol="0" anchor="ctr"/>
           <a:lstStyle/>
           <a:p>
             <a:pPr indent="0" marL="0">
-              <a:lnSpc>
-                <a:spcPts val="2000"/>
-              </a:lnSpc>
-              <a:buNone/>
-            </a:pPr>
-            <a:r>
-              <a:rPr lang="en-US" sz="1500" dirty="0">
-                <a:solidFill>
-                  <a:srgbClr val="24313F"/>
+              <a:buNone/>
+            </a:pPr>
+            <a:r>
+              <a:rPr lang="en-US" sz="1550" dirty="0">
+                <a:solidFill>
+                  <a:srgbClr val="4A6B5D"/>
                 </a:solidFill>
                 <a:latin typeface="Georgia" pitchFamily="34" charset="0"/>
                 <a:ea typeface="Georgia" pitchFamily="34" charset="-122"/>
                 <a:cs typeface="Georgia" pitchFamily="34" charset="-120"/>
               </a:rPr>
-              <a:t>The cut lands mid-movement, so the movement carries the viewer across it.</a:t>
-            </a:r>
-            <a:endParaRPr lang="en-US" sz="1500" dirty="0"/>
-          </a:p>
-        </p:txBody>
-      </p:sp>
-      <p:sp>
-        <p:nvSpPr>
-          <p:cNvPr id="18" name="Text 16"/>
-          <p:cNvSpPr/>
-          <p:nvPr/>
-        </p:nvSpPr>
-        <p:spPr>
-          <a:xfrm>
-            <a:off x="822960" y="4425696"/>
-            <a:ext cx="4997196" cy="384048"/>
-          </a:xfrm>
-          <a:prstGeom prst="rect">
-            <a:avLst/>
-          </a:prstGeom>
-          <a:noFill/>
-          <a:ln/>
-        </p:spPr>
-        <p:txBody>
-          <a:bodyPr wrap="square" lIns="0" tIns="0" rIns="0" bIns="0" rtlCol="0" anchor="ctr"/>
+              <a:t>The 180-degree rule</a:t>
+            </a:r>
+            <a:endParaRPr lang="en-US" sz="1550" dirty="0"/>
+          </a:p>
+        </p:txBody>
+      </p:sp>
+      <p:sp>
+        <p:nvSpPr>
+          <p:cNvPr id="28" name="Text 23"/>
+          <p:cNvSpPr/>
+          <p:nvPr/>
+        </p:nvSpPr>
+        <p:spPr>
+          <a:xfrm>
+            <a:off x="822960" y="5705856"/>
+            <a:ext cx="3270504" cy="457200"/>
+          </a:xfrm>
+          <a:prstGeom prst="rect">
+            <a:avLst/>
+          </a:prstGeom>
+          <a:noFill/>
+          <a:ln/>
+        </p:spPr>
+        <p:txBody>
+          <a:bodyPr wrap="square" lIns="0" tIns="0" rIns="0" bIns="0" rtlCol="0" anchor="t"/>
           <a:lstStyle/>
           <a:p>
             <a:pPr indent="0" marL="0">
-              <a:buNone/>
-            </a:pPr>
-            <a:r>
-              <a:rPr lang="en-US" sz="2000" dirty="0">
-                <a:solidFill>
-                  <a:srgbClr val="4A6B5D"/>
-                </a:solidFill>
-                <a:latin typeface="Georgia" pitchFamily="34" charset="0"/>
-                <a:ea typeface="Georgia" pitchFamily="34" charset="-122"/>
-                <a:cs typeface="Georgia" pitchFamily="34" charset="-120"/>
-              </a:rPr>
-              <a:t>Establishing to interior</a:t>
-            </a:r>
-            <a:endParaRPr lang="en-US" sz="2000" dirty="0"/>
-          </a:p>
-        </p:txBody>
-      </p:sp>
-      <p:sp>
-        <p:nvSpPr>
-          <p:cNvPr id="19" name="Shape 17"/>
-          <p:cNvSpPr/>
-          <p:nvPr/>
-        </p:nvSpPr>
-        <p:spPr>
-          <a:xfrm>
-            <a:off x="822960" y="4846320"/>
-            <a:ext cx="4997196" cy="0"/>
-          </a:xfrm>
-          <a:prstGeom prst="line">
-            <a:avLst/>
-          </a:prstGeom>
-          <a:noFill/>
+              <a:lnSpc>
+                <a:spcPts val="1300"/>
+              </a:lnSpc>
+              <a:buNone/>
+            </a:pPr>
+            <a:r>
+              <a:rPr lang="en-US" sz="1050" i="1" dirty="0">
+                <a:solidFill>
+                  <a:srgbClr val="7A7F72"/>
+                </a:solidFill>
+                <a:latin typeface="Arial" pitchFamily="34" charset="0"/>
+                <a:ea typeface="Arial" pitchFamily="34" charset="-122"/>
+                <a:cs typeface="Arial" pitchFamily="34" charset="-120"/>
+              </a:rPr>
+              <a:t>stay one side of the line and direction holds</a:t>
+            </a:r>
+            <a:endParaRPr lang="en-US" sz="1050" dirty="0"/>
+          </a:p>
+        </p:txBody>
+      </p:sp>
+      <p:sp>
+        <p:nvSpPr>
+          <p:cNvPr id="29" name="Shape 24"/>
+          <p:cNvSpPr/>
+          <p:nvPr/>
+        </p:nvSpPr>
+        <p:spPr>
+          <a:xfrm>
+            <a:off x="4459224" y="3657600"/>
+            <a:ext cx="3270504" cy="1691640"/>
+          </a:xfrm>
+          <a:prstGeom prst="rect">
+            <a:avLst/>
+          </a:prstGeom>
+          <a:solidFill>
+            <a:srgbClr val="FAF8F1"/>
+          </a:solidFill>
           <a:ln w="9525">
             <a:solidFill>
               <a:srgbClr val="D9D4C4"/>
@@ -5595,102 +6200,128 @@
           </a:ln>
         </p:spPr>
       </p:sp>
-      <p:sp>
-        <p:nvSpPr>
-          <p:cNvPr id="20" name="Text 18"/>
-          <p:cNvSpPr/>
-          <p:nvPr/>
-        </p:nvSpPr>
-        <p:spPr>
-          <a:xfrm>
-            <a:off x="822960" y="4956048"/>
-            <a:ext cx="4997196" cy="685800"/>
-          </a:xfrm>
-          <a:prstGeom prst="rect">
-            <a:avLst/>
-          </a:prstGeom>
-          <a:noFill/>
-          <a:ln/>
-        </p:spPr>
-        <p:txBody>
-          <a:bodyPr wrap="square" lIns="0" tIns="0" rIns="0" bIns="0" rtlCol="0" anchor="t"/>
+      <p:pic>
+        <p:nvPicPr>
+          <p:cNvPr id="30" name="Image 3" descr="/Users/dogan/Documents/Vaults/Courses/wiki/classes/media-studies/decks/_build/img/toystory-buzz-out.jpg">    </p:cNvPr>
+          <p:cNvPicPr>
+            <a:picLocks noChangeAspect="1"/>
+          </p:cNvPicPr>
+          <p:nvPr/>
+        </p:nvPicPr>
+        <p:blipFill>
+          <a:blip r:embed="rId4"/>
+          <a:stretch>
+            <a:fillRect/>
+          </a:stretch>
+        </p:blipFill>
+        <p:spPr>
+          <a:xfrm>
+            <a:off x="4898858" y="3730752"/>
+            <a:ext cx="2391236" cy="1545336"/>
+          </a:xfrm>
+          <a:prstGeom prst="rect">
+            <a:avLst/>
+          </a:prstGeom>
+        </p:spPr>
+      </p:pic>
+      <p:sp>
+        <p:nvSpPr>
+          <p:cNvPr id="31" name="Text 25"/>
+          <p:cNvSpPr/>
+          <p:nvPr/>
+        </p:nvSpPr>
+        <p:spPr>
+          <a:xfrm>
+            <a:off x="4459224" y="5394960"/>
+            <a:ext cx="3270504" cy="310896"/>
+          </a:xfrm>
+          <a:prstGeom prst="rect">
+            <a:avLst/>
+          </a:prstGeom>
+          <a:noFill/>
+          <a:ln/>
+        </p:spPr>
+        <p:txBody>
+          <a:bodyPr wrap="square" lIns="0" tIns="0" rIns="0" bIns="0" rtlCol="0" anchor="ctr"/>
           <a:lstStyle/>
           <a:p>
             <a:pPr indent="0" marL="0">
-              <a:lnSpc>
-                <a:spcPts val="2000"/>
-              </a:lnSpc>
-              <a:buNone/>
-            </a:pPr>
-            <a:r>
-              <a:rPr lang="en-US" sz="1500" dirty="0">
-                <a:solidFill>
-                  <a:srgbClr val="24313F"/>
+              <a:buNone/>
+            </a:pPr>
+            <a:r>
+              <a:rPr lang="en-US" sz="1550" dirty="0">
+                <a:solidFill>
+                  <a:srgbClr val="4A6B5D"/>
                 </a:solidFill>
                 <a:latin typeface="Georgia" pitchFamily="34" charset="0"/>
                 <a:ea typeface="Georgia" pitchFamily="34" charset="-122"/>
                 <a:cs typeface="Georgia" pitchFamily="34" charset="-120"/>
               </a:rPr>
-              <a:t>An exterior, then a room. Nothing proves they are the same building except the order.</a:t>
-            </a:r>
-            <a:endParaRPr lang="en-US" sz="1500" dirty="0"/>
-          </a:p>
-        </p:txBody>
-      </p:sp>
-      <p:sp>
-        <p:nvSpPr>
-          <p:cNvPr id="21" name="Text 19"/>
-          <p:cNvSpPr/>
-          <p:nvPr/>
-        </p:nvSpPr>
-        <p:spPr>
-          <a:xfrm>
-            <a:off x="6368796" y="4425696"/>
-            <a:ext cx="4997196" cy="384048"/>
-          </a:xfrm>
-          <a:prstGeom prst="rect">
-            <a:avLst/>
-          </a:prstGeom>
-          <a:noFill/>
-          <a:ln/>
-        </p:spPr>
-        <p:txBody>
-          <a:bodyPr wrap="square" lIns="0" tIns="0" rIns="0" bIns="0" rtlCol="0" anchor="ctr"/>
+              <a:t>Match on action</a:t>
+            </a:r>
+            <a:endParaRPr lang="en-US" sz="1550" dirty="0"/>
+          </a:p>
+        </p:txBody>
+      </p:sp>
+      <p:sp>
+        <p:nvSpPr>
+          <p:cNvPr id="32" name="Text 26"/>
+          <p:cNvSpPr/>
+          <p:nvPr/>
+        </p:nvSpPr>
+        <p:spPr>
+          <a:xfrm>
+            <a:off x="4459224" y="5705856"/>
+            <a:ext cx="3270504" cy="457200"/>
+          </a:xfrm>
+          <a:prstGeom prst="rect">
+            <a:avLst/>
+          </a:prstGeom>
+          <a:noFill/>
+          <a:ln/>
+        </p:spPr>
+        <p:txBody>
+          <a:bodyPr wrap="square" lIns="0" tIns="0" rIns="0" bIns="0" rtlCol="0" anchor="t"/>
           <a:lstStyle/>
           <a:p>
             <a:pPr indent="0" marL="0">
-              <a:buNone/>
-            </a:pPr>
-            <a:r>
-              <a:rPr lang="en-US" sz="2000" dirty="0">
-                <a:solidFill>
-                  <a:srgbClr val="4A6B5D"/>
-                </a:solidFill>
-                <a:latin typeface="Georgia" pitchFamily="34" charset="0"/>
-                <a:ea typeface="Georgia" pitchFamily="34" charset="-122"/>
-                <a:cs typeface="Georgia" pitchFamily="34" charset="-120"/>
-              </a:rPr>
-              <a:t>Cutaway and insert</a:t>
-            </a:r>
-            <a:endParaRPr lang="en-US" sz="2000" dirty="0"/>
-          </a:p>
-        </p:txBody>
-      </p:sp>
-      <p:sp>
-        <p:nvSpPr>
-          <p:cNvPr id="22" name="Shape 20"/>
-          <p:cNvSpPr/>
-          <p:nvPr/>
-        </p:nvSpPr>
-        <p:spPr>
-          <a:xfrm>
-            <a:off x="6368796" y="4846320"/>
-            <a:ext cx="4997196" cy="0"/>
-          </a:xfrm>
-          <a:prstGeom prst="line">
-            <a:avLst/>
-          </a:prstGeom>
-          <a:noFill/>
+              <a:lnSpc>
+                <a:spcPts val="1300"/>
+              </a:lnSpc>
+              <a:buNone/>
+            </a:pPr>
+            <a:r>
+              <a:rPr lang="en-US" sz="1050" i="1" dirty="0">
+                <a:solidFill>
+                  <a:srgbClr val="7A7F72"/>
+                </a:solidFill>
+                <a:latin typeface="Arial" pitchFamily="34" charset="0"/>
+                <a:ea typeface="Arial" pitchFamily="34" charset="-122"/>
+                <a:cs typeface="Arial" pitchFamily="34" charset="-120"/>
+              </a:rPr>
+              <a:t>cut mid-movement and the motion carries you</a:t>
+            </a:r>
+            <a:endParaRPr lang="en-US" sz="1050" dirty="0"/>
+          </a:p>
+        </p:txBody>
+      </p:sp>
+      <p:sp>
+        <p:nvSpPr>
+          <p:cNvPr id="33" name="Shape 27"/>
+          <p:cNvSpPr/>
+          <p:nvPr/>
+        </p:nvSpPr>
+        <p:spPr>
+          <a:xfrm>
+            <a:off x="8095488" y="3657600"/>
+            <a:ext cx="3270504" cy="1691640"/>
+          </a:xfrm>
+          <a:prstGeom prst="rect">
+            <a:avLst/>
+          </a:prstGeom>
+          <a:solidFill>
+            <a:srgbClr val="FAF8F1"/>
+          </a:solidFill>
           <a:ln w="9525">
             <a:solidFill>
               <a:srgbClr val="D9D4C4"/>
@@ -5701,49 +6332,301 @@
       </p:sp>
       <p:sp>
         <p:nvSpPr>
-          <p:cNvPr id="23" name="Text 21"/>
-          <p:cNvSpPr/>
-          <p:nvPr/>
-        </p:nvSpPr>
-        <p:spPr>
-          <a:xfrm>
-            <a:off x="6368796" y="4956048"/>
-            <a:ext cx="4997196" cy="685800"/>
-          </a:xfrm>
-          <a:prstGeom prst="rect">
-            <a:avLst/>
-          </a:prstGeom>
-          <a:noFill/>
-          <a:ln/>
-        </p:spPr>
-        <p:txBody>
-          <a:bodyPr wrap="square" lIns="0" tIns="0" rIns="0" bIns="0" rtlCol="0" anchor="t"/>
-          <a:lstStyle/>
-          <a:p>
-            <a:pPr indent="0" marL="0">
+          <p:cNvPr id="34" name="Shape 28"/>
+          <p:cNvSpPr/>
+          <p:nvPr/>
+        </p:nvSpPr>
+        <p:spPr>
+          <a:xfrm>
+            <a:off x="8324088" y="3931920"/>
+            <a:ext cx="1223772" cy="1051560"/>
+          </a:xfrm>
+          <a:prstGeom prst="rect">
+            <a:avLst/>
+          </a:prstGeom>
+          <a:solidFill>
+            <a:srgbClr val="E8EFE7"/>
+          </a:solidFill>
+          <a:ln w="9525">
+            <a:solidFill>
+              <a:srgbClr val="8AA394"/>
+            </a:solidFill>
+            <a:prstDash val="solid"/>
+          </a:ln>
+        </p:spPr>
+      </p:sp>
+      <p:sp>
+        <p:nvSpPr>
+          <p:cNvPr id="35" name="Text 29"/>
+          <p:cNvSpPr/>
+          <p:nvPr/>
+        </p:nvSpPr>
+        <p:spPr>
+          <a:xfrm>
+            <a:off x="8324088" y="3931920"/>
+            <a:ext cx="1223772" cy="1051560"/>
+          </a:xfrm>
+          <a:prstGeom prst="rect">
+            <a:avLst/>
+          </a:prstGeom>
+          <a:noFill/>
+          <a:ln/>
+        </p:spPr>
+        <p:txBody>
+          <a:bodyPr wrap="square" lIns="0" tIns="0" rIns="0" bIns="0" rtlCol="0" anchor="ctr"/>
+          <a:lstStyle/>
+          <a:p>
+            <a:pPr algn="ctr" indent="0" marL="0">
               <a:lnSpc>
-                <a:spcPts val="2000"/>
+                <a:spcPts val="1400"/>
               </a:lnSpc>
               <a:buNone/>
             </a:pPr>
             <a:r>
-              <a:rPr lang="en-US" sz="1500" dirty="0">
-                <a:solidFill>
-                  <a:srgbClr val="24313F"/>
+              <a:rPr lang="en-US" sz="1100" dirty="0">
+                <a:solidFill>
+                  <a:srgbClr val="7A7F72"/>
+                </a:solidFill>
+                <a:latin typeface="Arial" pitchFamily="34" charset="0"/>
+                <a:ea typeface="Arial" pitchFamily="34" charset="-122"/>
+                <a:cs typeface="Arial" pitchFamily="34" charset="-120"/>
+              </a:rPr>
+              <a:t>EXT.</a:t>
+            </a:r>
+            <a:endParaRPr lang="en-US" sz="1100" dirty="0"/>
+          </a:p>
+          <a:p>
+            <a:pPr algn="ctr" indent="0" marL="0">
+              <a:lnSpc>
+                <a:spcPts val="1400"/>
+              </a:lnSpc>
+              <a:buNone/>
+            </a:pPr>
+            <a:r>
+              <a:rPr lang="en-US" sz="1100" dirty="0">
+                <a:solidFill>
+                  <a:srgbClr val="7A7F72"/>
+                </a:solidFill>
+                <a:latin typeface="Arial" pitchFamily="34" charset="0"/>
+                <a:ea typeface="Arial" pitchFamily="34" charset="-122"/>
+                <a:cs typeface="Arial" pitchFamily="34" charset="-120"/>
+              </a:rPr>
+              <a:t>wide</a:t>
+            </a:r>
+            <a:endParaRPr lang="en-US" sz="1100" dirty="0"/>
+          </a:p>
+        </p:txBody>
+      </p:sp>
+      <p:sp>
+        <p:nvSpPr>
+          <p:cNvPr id="36" name="Text 30"/>
+          <p:cNvSpPr/>
+          <p:nvPr/>
+        </p:nvSpPr>
+        <p:spPr>
+          <a:xfrm>
+            <a:off x="9502140" y="4160520"/>
+            <a:ext cx="457200" cy="548640"/>
+          </a:xfrm>
+          <a:prstGeom prst="rect">
+            <a:avLst/>
+          </a:prstGeom>
+          <a:noFill/>
+          <a:ln/>
+        </p:spPr>
+        <p:txBody>
+          <a:bodyPr wrap="square" lIns="0" tIns="0" rIns="0" bIns="0" rtlCol="0" anchor="ctr"/>
+          <a:lstStyle/>
+          <a:p>
+            <a:pPr algn="ctr" indent="0" marL="0">
+              <a:buNone/>
+            </a:pPr>
+            <a:r>
+              <a:rPr lang="en-US" sz="2200" dirty="0">
+                <a:solidFill>
+                  <a:srgbClr val="A3C1AD"/>
                 </a:solidFill>
                 <a:latin typeface="Georgia" pitchFamily="34" charset="0"/>
                 <a:ea typeface="Georgia" pitchFamily="34" charset="-122"/>
                 <a:cs typeface="Georgia" pitchFamily="34" charset="-120"/>
               </a:rPr>
-              <a:t>A glance elsewhere, or a detail. Both buy time and both hide a join.</a:t>
-            </a:r>
-            <a:endParaRPr lang="en-US" sz="1500" dirty="0"/>
-          </a:p>
-        </p:txBody>
-      </p:sp>
-      <p:sp>
-        <p:nvSpPr>
-          <p:cNvPr id="24" name="Shape 22"/>
+              <a:t>→</a:t>
+            </a:r>
+            <a:endParaRPr lang="en-US" sz="2200" dirty="0"/>
+          </a:p>
+        </p:txBody>
+      </p:sp>
+      <p:sp>
+        <p:nvSpPr>
+          <p:cNvPr id="37" name="Shape 31"/>
+          <p:cNvSpPr/>
+          <p:nvPr/>
+        </p:nvSpPr>
+        <p:spPr>
+          <a:xfrm>
+            <a:off x="9913620" y="3931920"/>
+            <a:ext cx="1223772" cy="1051560"/>
+          </a:xfrm>
+          <a:prstGeom prst="rect">
+            <a:avLst/>
+          </a:prstGeom>
+          <a:solidFill>
+            <a:srgbClr val="E8EFE7"/>
+          </a:solidFill>
+          <a:ln w="9525">
+            <a:solidFill>
+              <a:srgbClr val="8AA394"/>
+            </a:solidFill>
+            <a:prstDash val="solid"/>
+          </a:ln>
+        </p:spPr>
+      </p:sp>
+      <p:sp>
+        <p:nvSpPr>
+          <p:cNvPr id="38" name="Text 32"/>
+          <p:cNvSpPr/>
+          <p:nvPr/>
+        </p:nvSpPr>
+        <p:spPr>
+          <a:xfrm>
+            <a:off x="9913620" y="3931920"/>
+            <a:ext cx="1223772" cy="1051560"/>
+          </a:xfrm>
+          <a:prstGeom prst="rect">
+            <a:avLst/>
+          </a:prstGeom>
+          <a:noFill/>
+          <a:ln/>
+        </p:spPr>
+        <p:txBody>
+          <a:bodyPr wrap="square" lIns="0" tIns="0" rIns="0" bIns="0" rtlCol="0" anchor="ctr"/>
+          <a:lstStyle/>
+          <a:p>
+            <a:pPr algn="ctr" indent="0" marL="0">
+              <a:lnSpc>
+                <a:spcPts val="1400"/>
+              </a:lnSpc>
+              <a:buNone/>
+            </a:pPr>
+            <a:r>
+              <a:rPr lang="en-US" sz="1100" dirty="0">
+                <a:solidFill>
+                  <a:srgbClr val="7A7F72"/>
+                </a:solidFill>
+                <a:latin typeface="Arial" pitchFamily="34" charset="0"/>
+                <a:ea typeface="Arial" pitchFamily="34" charset="-122"/>
+                <a:cs typeface="Arial" pitchFamily="34" charset="-120"/>
+              </a:rPr>
+              <a:t>INT.</a:t>
+            </a:r>
+            <a:endParaRPr lang="en-US" sz="1100" dirty="0"/>
+          </a:p>
+          <a:p>
+            <a:pPr algn="ctr" indent="0" marL="0">
+              <a:lnSpc>
+                <a:spcPts val="1400"/>
+              </a:lnSpc>
+              <a:buNone/>
+            </a:pPr>
+            <a:r>
+              <a:rPr lang="en-US" sz="1100" dirty="0">
+                <a:solidFill>
+                  <a:srgbClr val="7A7F72"/>
+                </a:solidFill>
+                <a:latin typeface="Arial" pitchFamily="34" charset="0"/>
+                <a:ea typeface="Arial" pitchFamily="34" charset="-122"/>
+                <a:cs typeface="Arial" pitchFamily="34" charset="-120"/>
+              </a:rPr>
+              <a:t>room</a:t>
+            </a:r>
+            <a:endParaRPr lang="en-US" sz="1100" dirty="0"/>
+          </a:p>
+        </p:txBody>
+      </p:sp>
+      <p:sp>
+        <p:nvSpPr>
+          <p:cNvPr id="39" name="Text 33"/>
+          <p:cNvSpPr/>
+          <p:nvPr/>
+        </p:nvSpPr>
+        <p:spPr>
+          <a:xfrm>
+            <a:off x="8095488" y="5394960"/>
+            <a:ext cx="3270504" cy="310896"/>
+          </a:xfrm>
+          <a:prstGeom prst="rect">
+            <a:avLst/>
+          </a:prstGeom>
+          <a:noFill/>
+          <a:ln/>
+        </p:spPr>
+        <p:txBody>
+          <a:bodyPr wrap="square" lIns="0" tIns="0" rIns="0" bIns="0" rtlCol="0" anchor="ctr"/>
+          <a:lstStyle/>
+          <a:p>
+            <a:pPr indent="0" marL="0">
+              <a:buNone/>
+            </a:pPr>
+            <a:r>
+              <a:rPr lang="en-US" sz="1550" dirty="0">
+                <a:solidFill>
+                  <a:srgbClr val="4A6B5D"/>
+                </a:solidFill>
+                <a:latin typeface="Georgia" pitchFamily="34" charset="0"/>
+                <a:ea typeface="Georgia" pitchFamily="34" charset="-122"/>
+                <a:cs typeface="Georgia" pitchFamily="34" charset="-120"/>
+              </a:rPr>
+              <a:t>Establishing to interior</a:t>
+            </a:r>
+            <a:endParaRPr lang="en-US" sz="1550" dirty="0"/>
+          </a:p>
+        </p:txBody>
+      </p:sp>
+      <p:sp>
+        <p:nvSpPr>
+          <p:cNvPr id="40" name="Text 34"/>
+          <p:cNvSpPr/>
+          <p:nvPr/>
+        </p:nvSpPr>
+        <p:spPr>
+          <a:xfrm>
+            <a:off x="8095488" y="5705856"/>
+            <a:ext cx="3270504" cy="457200"/>
+          </a:xfrm>
+          <a:prstGeom prst="rect">
+            <a:avLst/>
+          </a:prstGeom>
+          <a:noFill/>
+          <a:ln/>
+        </p:spPr>
+        <p:txBody>
+          <a:bodyPr wrap="square" lIns="0" tIns="0" rIns="0" bIns="0" rtlCol="0" anchor="t"/>
+          <a:lstStyle/>
+          <a:p>
+            <a:pPr indent="0" marL="0">
+              <a:lnSpc>
+                <a:spcPts val="1300"/>
+              </a:lnSpc>
+              <a:buNone/>
+            </a:pPr>
+            <a:r>
+              <a:rPr lang="en-US" sz="1050" i="1" dirty="0">
+                <a:solidFill>
+                  <a:srgbClr val="7A7F72"/>
+                </a:solidFill>
+                <a:latin typeface="Arial" pitchFamily="34" charset="0"/>
+                <a:ea typeface="Arial" pitchFamily="34" charset="-122"/>
+                <a:cs typeface="Arial" pitchFamily="34" charset="-120"/>
+              </a:rPr>
+              <a:t>an exterior, then a room; order does the proving</a:t>
+            </a:r>
+            <a:endParaRPr lang="en-US" sz="1050" dirty="0"/>
+          </a:p>
+        </p:txBody>
+      </p:sp>
+      <p:sp>
+        <p:nvSpPr>
+          <p:cNvPr id="41" name="Shape 35"/>
           <p:cNvSpPr/>
           <p:nvPr/>
         </p:nvSpPr>
@@ -5766,7 +6649,7 @@
       </p:sp>
       <p:sp>
         <p:nvSpPr>
-          <p:cNvPr id="25" name="Text 23"/>
+          <p:cNvPr id="42" name="Text 36"/>
           <p:cNvSpPr/>
           <p:nvPr/>
         </p:nvSpPr>
@@ -5805,7 +6688,7 @@
       </p:sp>
       <p:sp>
         <p:nvSpPr>
-          <p:cNvPr id="26" name="Text 24"/>
+          <p:cNvPr id="43" name="Text 37"/>
           <p:cNvSpPr/>
           <p:nvPr/>
         </p:nvSpPr>
@@ -5856,7 +6739,7 @@
     <p:bg>
       <p:bgPr>
         <a:solidFill>
-          <a:srgbClr val="E8EFE7"/>
+          <a:srgbClr val="FAF8F1"/>
         </a:solidFill>
       </p:bgPr>
     </p:bg>
@@ -5882,8 +6765,109 @@
         </p:nvSpPr>
         <p:spPr>
           <a:xfrm>
-            <a:off x="502920" y="548640"/>
-            <a:ext cx="1828800" cy="1828800"/>
+            <a:off x="822960" y="457200"/>
+            <a:ext cx="6400800" cy="274320"/>
+          </a:xfrm>
+          <a:prstGeom prst="rect">
+            <a:avLst/>
+          </a:prstGeom>
+          <a:noFill/>
+          <a:ln/>
+        </p:spPr>
+        <p:txBody>
+          <a:bodyPr wrap="square" lIns="0" tIns="0" rIns="0" bIns="0" rtlCol="0" anchor="ctr"/>
+          <a:lstStyle/>
+          <a:p>
+            <a:pPr algn="l" indent="0" marL="0">
+              <a:buNone/>
+            </a:pPr>
+            <a:r>
+              <a:rPr lang="en-US" sz="1100" b="1" spc="250" kern="0" dirty="0">
+                <a:solidFill>
+                  <a:srgbClr val="4A6B5D"/>
+                </a:solidFill>
+                <a:latin typeface="Arial" pitchFamily="34" charset="0"/>
+                <a:ea typeface="Arial" pitchFamily="34" charset="-122"/>
+                <a:cs typeface="Arial" pitchFamily="34" charset="-120"/>
+              </a:rPr>
+              <a:t>THE 180-DEGREE RULE</a:t>
+            </a:r>
+            <a:endParaRPr lang="en-US" sz="1100" dirty="0"/>
+          </a:p>
+        </p:txBody>
+      </p:sp>
+      <p:sp>
+        <p:nvSpPr>
+          <p:cNvPr id="3" name="Text 1"/>
+          <p:cNvSpPr/>
+          <p:nvPr/>
+        </p:nvSpPr>
+        <p:spPr>
+          <a:xfrm>
+            <a:off x="6793992" y="457200"/>
+            <a:ext cx="4572000" cy="274320"/>
+          </a:xfrm>
+          <a:prstGeom prst="rect">
+            <a:avLst/>
+          </a:prstGeom>
+          <a:noFill/>
+          <a:ln/>
+        </p:spPr>
+        <p:txBody>
+          <a:bodyPr wrap="square" lIns="0" tIns="0" rIns="0" bIns="0" rtlCol="0" anchor="ctr"/>
+          <a:lstStyle/>
+          <a:p>
+            <a:pPr algn="r" indent="0" marL="0">
+              <a:buNone/>
+            </a:pPr>
+            <a:r>
+              <a:rPr lang="en-US" sz="1100" b="1" spc="250" kern="0" dirty="0">
+                <a:solidFill>
+                  <a:srgbClr val="7A7F72"/>
+                </a:solidFill>
+                <a:latin typeface="Arial" pitchFamily="34" charset="0"/>
+                <a:ea typeface="Arial" pitchFamily="34" charset="-122"/>
+                <a:cs typeface="Arial" pitchFamily="34" charset="-120"/>
+              </a:rPr>
+              <a:t>CROSS IT AND THE ROOM FLIPS</a:t>
+            </a:r>
+            <a:endParaRPr lang="en-US" sz="1100" dirty="0"/>
+          </a:p>
+        </p:txBody>
+      </p:sp>
+      <p:sp>
+        <p:nvSpPr>
+          <p:cNvPr id="4" name="Shape 2"/>
+          <p:cNvSpPr/>
+          <p:nvPr/>
+        </p:nvSpPr>
+        <p:spPr>
+          <a:xfrm>
+            <a:off x="822960" y="786384"/>
+            <a:ext cx="10543032" cy="0"/>
+          </a:xfrm>
+          <a:prstGeom prst="line">
+            <a:avLst/>
+          </a:prstGeom>
+          <a:noFill/>
+          <a:ln w="9525">
+            <a:solidFill>
+              <a:srgbClr val="D9D4C4"/>
+            </a:solidFill>
+            <a:prstDash val="solid"/>
+          </a:ln>
+        </p:spPr>
+      </p:sp>
+      <p:sp>
+        <p:nvSpPr>
+          <p:cNvPr id="5" name="Text 3"/>
+          <p:cNvSpPr/>
+          <p:nvPr/>
+        </p:nvSpPr>
+        <p:spPr>
+          <a:xfrm>
+            <a:off x="822960" y="1188720"/>
+            <a:ext cx="5760720" cy="1463040"/>
           </a:xfrm>
           <a:prstGeom prst="rect">
             <a:avLst/>
@@ -5896,52 +6880,33 @@
           <a:lstStyle/>
           <a:p>
             <a:pPr indent="0" marL="0">
-              <a:buNone/>
-            </a:pPr>
-            <a:r>
-              <a:rPr lang="en-US" sz="20000" dirty="0">
-                <a:solidFill>
-                  <a:srgbClr val="A3C1AD"/>
+              <a:lnSpc>
+                <a:spcPts val="3600"/>
+              </a:lnSpc>
+              <a:buNone/>
+            </a:pPr>
+            <a:r>
+              <a:rPr lang="en-US" sz="3000" dirty="0">
+                <a:solidFill>
+                  <a:srgbClr val="24313F"/>
                 </a:solidFill>
                 <a:latin typeface="Georgia" pitchFamily="34" charset="0"/>
                 <a:ea typeface="Georgia" pitchFamily="34" charset="-122"/>
                 <a:cs typeface="Georgia" pitchFamily="34" charset="-120"/>
               </a:rPr>
-              <a:t>“</a:t>
-            </a:r>
-            <a:endParaRPr lang="en-US" sz="20000" dirty="0"/>
-          </a:p>
-        </p:txBody>
-      </p:sp>
-      <p:sp>
-        <p:nvSpPr>
-          <p:cNvPr id="3" name="Text 1"/>
-          <p:cNvSpPr/>
-          <p:nvPr/>
-        </p:nvSpPr>
-        <p:spPr>
-          <a:xfrm>
-            <a:off x="822960" y="1828800"/>
-            <a:ext cx="10424160" cy="2560320"/>
-          </a:xfrm>
-          <a:prstGeom prst="rect">
-            <a:avLst/>
-          </a:prstGeom>
-          <a:noFill/>
-          <a:ln/>
-        </p:spPr>
-        <p:txBody>
-          <a:bodyPr wrap="square" lIns="0" tIns="0" rIns="0" bIns="0" rtlCol="0" anchor="ctr"/>
-          <a:lstStyle/>
+              <a:t>Cross the line and two people</a:t>
+            </a:r>
+            <a:endParaRPr lang="en-US" sz="3000" dirty="0"/>
+          </a:p>
           <a:p>
             <a:pPr indent="0" marL="0">
               <a:lnSpc>
-                <a:spcPts val="5600"/>
+                <a:spcPts val="3600"/>
               </a:lnSpc>
               <a:buNone/>
             </a:pPr>
             <a:r>
-              <a:rPr lang="en-US" sz="4800" dirty="0">
+              <a:rPr lang="en-US" sz="3000" dirty="0">
                 <a:solidFill>
                   <a:srgbClr val="24313F"/>
                 </a:solidFill>
@@ -5949,61 +6914,21 @@
                 <a:ea typeface="Georgia" pitchFamily="34" charset="-122"/>
                 <a:cs typeface="Georgia" pitchFamily="34" charset="-120"/>
               </a:rPr>
-              <a:t>Cross the line and two</a:t>
-            </a:r>
-            <a:endParaRPr lang="en-US" sz="4800" dirty="0"/>
-          </a:p>
-          <a:p>
-            <a:pPr indent="0" marL="0">
-              <a:lnSpc>
-                <a:spcPts val="5600"/>
-              </a:lnSpc>
-              <a:buNone/>
-            </a:pPr>
-            <a:r>
-              <a:rPr lang="en-US" sz="4800" dirty="0">
-                <a:solidFill>
-                  <a:srgbClr val="24313F"/>
-                </a:solidFill>
-                <a:latin typeface="Georgia" pitchFamily="34" charset="0"/>
-                <a:ea typeface="Georgia" pitchFamily="34" charset="-122"/>
-                <a:cs typeface="Georgia" pitchFamily="34" charset="-120"/>
-              </a:rPr>
-              <a:t>people swap sides of</a:t>
-            </a:r>
-            <a:endParaRPr lang="en-US" sz="4800" dirty="0"/>
-          </a:p>
-          <a:p>
-            <a:pPr indent="0" marL="0">
-              <a:lnSpc>
-                <a:spcPts val="5600"/>
-              </a:lnSpc>
-              <a:buNone/>
-            </a:pPr>
-            <a:r>
-              <a:rPr lang="en-US" sz="4800" dirty="0">
-                <a:solidFill>
-                  <a:srgbClr val="24313F"/>
-                </a:solidFill>
-                <a:latin typeface="Georgia" pitchFamily="34" charset="0"/>
-                <a:ea typeface="Georgia" pitchFamily="34" charset="-122"/>
-                <a:cs typeface="Georgia" pitchFamily="34" charset="-120"/>
-              </a:rPr>
-              <a:t>the room.</a:t>
-            </a:r>
-            <a:endParaRPr lang="en-US" sz="4800" dirty="0"/>
-          </a:p>
-        </p:txBody>
-      </p:sp>
-      <p:sp>
-        <p:nvSpPr>
-          <p:cNvPr id="4" name="Shape 2"/>
-          <p:cNvSpPr/>
-          <p:nvPr/>
-        </p:nvSpPr>
-        <p:spPr>
-          <a:xfrm>
-            <a:off x="822960" y="4754880"/>
+              <a:t>swap sides of the room</a:t>
+            </a:r>
+            <a:endParaRPr lang="en-US" sz="3000" dirty="0"/>
+          </a:p>
+        </p:txBody>
+      </p:sp>
+      <p:sp>
+        <p:nvSpPr>
+          <p:cNvPr id="6" name="Shape 4"/>
+          <p:cNvSpPr/>
+          <p:nvPr/>
+        </p:nvSpPr>
+        <p:spPr>
+          <a:xfrm>
+            <a:off x="822960" y="2834640"/>
             <a:ext cx="914400" cy="0"/>
           </a:xfrm>
           <a:prstGeom prst="line">
@@ -6020,14 +6945,14 @@
       </p:sp>
       <p:sp>
         <p:nvSpPr>
-          <p:cNvPr id="5" name="Text 3"/>
-          <p:cNvSpPr/>
-          <p:nvPr/>
-        </p:nvSpPr>
-        <p:spPr>
-          <a:xfrm>
-            <a:off x="822960" y="4937760"/>
-            <a:ext cx="10241280" cy="822960"/>
+          <p:cNvPr id="7" name="Text 5"/>
+          <p:cNvSpPr/>
+          <p:nvPr/>
+        </p:nvSpPr>
+        <p:spPr>
+          <a:xfrm>
+            <a:off x="822960" y="3063240"/>
+            <a:ext cx="5669280" cy="2743200"/>
           </a:xfrm>
           <a:prstGeom prst="rect">
             <a:avLst/>
@@ -6041,22 +6966,670 @@
           <a:p>
             <a:pPr indent="0" marL="0">
               <a:lnSpc>
-                <a:spcPts val="1900"/>
+                <a:spcPts val="2200"/>
               </a:lnSpc>
               <a:buNone/>
             </a:pPr>
             <a:r>
-              <a:rPr lang="en-US" sz="1400" spc="100" kern="0" dirty="0">
-                <a:solidFill>
-                  <a:srgbClr val="4A6B5D"/>
+              <a:rPr lang="en-US" sz="1550" dirty="0">
+                <a:solidFill>
+                  <a:srgbClr val="24313F"/>
+                </a:solidFill>
+                <a:latin typeface="Georgia" pitchFamily="34" charset="0"/>
+                <a:ea typeface="Georgia" pitchFamily="34" charset="-122"/>
+                <a:cs typeface="Georgia" pitchFamily="34" charset="-120"/>
+              </a:rPr>
+              <a:t>Camera A and camera B keep both faces on the sides the audience has learned. Camera C, across the line, swaps them mid-conversation for no story reason.</a:t>
+            </a:r>
+            <a:endParaRPr lang="en-US" sz="1550" dirty="0"/>
+          </a:p>
+          <a:p>
+            <a:pPr indent="0" marL="0">
+              <a:lnSpc>
+                <a:spcPts val="2200"/>
+              </a:lnSpc>
+              <a:buNone/>
+            </a:pPr>
+            <a:endParaRPr lang="en-US" sz="1550" dirty="0"/>
+          </a:p>
+          <a:p>
+            <a:pPr indent="0" marL="0">
+              <a:lnSpc>
+                <a:spcPts val="2200"/>
+              </a:lnSpc>
+              <a:buNone/>
+            </a:pPr>
+            <a:r>
+              <a:rPr lang="en-US" sz="1550" dirty="0">
+                <a:solidFill>
+                  <a:srgbClr val="24313F"/>
+                </a:solidFill>
+                <a:latin typeface="Georgia" pitchFamily="34" charset="0"/>
+                <a:ea typeface="Georgia" pitchFamily="34" charset="-122"/>
+                <a:cs typeface="Georgia" pitchFamily="34" charset="-120"/>
+              </a:rPr>
+              <a:t>Demonstrated live from a prepared clip, then produced by every pair on Monday: version two of CS6 is this exact error, made on purpose.</a:t>
+            </a:r>
+            <a:endParaRPr lang="en-US" sz="1550" dirty="0"/>
+          </a:p>
+        </p:txBody>
+      </p:sp>
+      <p:sp>
+        <p:nvSpPr>
+          <p:cNvPr id="8" name="Shape 6"/>
+          <p:cNvSpPr/>
+          <p:nvPr/>
+        </p:nvSpPr>
+        <p:spPr>
+          <a:xfrm>
+            <a:off x="6675120" y="1280160"/>
+            <a:ext cx="4663440" cy="4480560"/>
+          </a:xfrm>
+          <a:prstGeom prst="rect">
+            <a:avLst/>
+          </a:prstGeom>
+          <a:solidFill>
+            <a:srgbClr val="FAF8F1"/>
+          </a:solidFill>
+          <a:ln w="9525">
+            <a:solidFill>
+              <a:srgbClr val="D9D4C4"/>
+            </a:solidFill>
+            <a:prstDash val="solid"/>
+          </a:ln>
+        </p:spPr>
+      </p:sp>
+      <p:sp>
+        <p:nvSpPr>
+          <p:cNvPr id="9" name="Shape 7"/>
+          <p:cNvSpPr/>
+          <p:nvPr/>
+        </p:nvSpPr>
+        <p:spPr>
+          <a:xfrm>
+            <a:off x="7589520" y="2834640"/>
+            <a:ext cx="685800" cy="685800"/>
+          </a:xfrm>
+          <a:prstGeom prst="ellipse">
+            <a:avLst/>
+          </a:prstGeom>
+          <a:solidFill>
+            <a:srgbClr val="4A6B5D"/>
+          </a:solidFill>
+          <a:ln/>
+        </p:spPr>
+      </p:sp>
+      <p:sp>
+        <p:nvSpPr>
+          <p:cNvPr id="10" name="Text 8"/>
+          <p:cNvSpPr/>
+          <p:nvPr/>
+        </p:nvSpPr>
+        <p:spPr>
+          <a:xfrm>
+            <a:off x="7589520" y="2834640"/>
+            <a:ext cx="685800" cy="685800"/>
+          </a:xfrm>
+          <a:prstGeom prst="rect">
+            <a:avLst/>
+          </a:prstGeom>
+          <a:noFill/>
+          <a:ln/>
+        </p:spPr>
+        <p:txBody>
+          <a:bodyPr wrap="square" lIns="0" tIns="0" rIns="0" bIns="0" rtlCol="0" anchor="ctr"/>
+          <a:lstStyle/>
+          <a:p>
+            <a:pPr algn="ctr" indent="0" marL="0">
+              <a:buNone/>
+            </a:pPr>
+            <a:r>
+              <a:rPr lang="en-US" sz="1300" b="1" dirty="0">
+                <a:solidFill>
+                  <a:srgbClr val="FAF8F1"/>
                 </a:solidFill>
                 <a:latin typeface="Arial" pitchFamily="34" charset="0"/>
                 <a:ea typeface="Arial" pitchFamily="34" charset="-122"/>
                 <a:cs typeface="Arial" pitchFamily="34" charset="-120"/>
               </a:rPr>
-              <a:t>Demonstrated live from a prepared clip, then produced by every pair on Monday. Nobody who has made that error forgets the rule, and nobody who has made it writes 'the editing is fast-paced' in an exam again.</a:t>
-            </a:r>
-            <a:endParaRPr lang="en-US" sz="1400" dirty="0"/>
+              <a:t>F1</a:t>
+            </a:r>
+            <a:endParaRPr lang="en-US" sz="1300" dirty="0"/>
+          </a:p>
+        </p:txBody>
+      </p:sp>
+      <p:sp>
+        <p:nvSpPr>
+          <p:cNvPr id="11" name="Shape 9"/>
+          <p:cNvSpPr/>
+          <p:nvPr/>
+        </p:nvSpPr>
+        <p:spPr>
+          <a:xfrm>
+            <a:off x="9738360" y="2834640"/>
+            <a:ext cx="685800" cy="685800"/>
+          </a:xfrm>
+          <a:prstGeom prst="ellipse">
+            <a:avLst/>
+          </a:prstGeom>
+          <a:solidFill>
+            <a:srgbClr val="5C7A6B"/>
+          </a:solidFill>
+          <a:ln/>
+        </p:spPr>
+      </p:sp>
+      <p:sp>
+        <p:nvSpPr>
+          <p:cNvPr id="12" name="Text 10"/>
+          <p:cNvSpPr/>
+          <p:nvPr/>
+        </p:nvSpPr>
+        <p:spPr>
+          <a:xfrm>
+            <a:off x="9738360" y="2834640"/>
+            <a:ext cx="685800" cy="685800"/>
+          </a:xfrm>
+          <a:prstGeom prst="rect">
+            <a:avLst/>
+          </a:prstGeom>
+          <a:noFill/>
+          <a:ln/>
+        </p:spPr>
+        <p:txBody>
+          <a:bodyPr wrap="square" lIns="0" tIns="0" rIns="0" bIns="0" rtlCol="0" anchor="ctr"/>
+          <a:lstStyle/>
+          <a:p>
+            <a:pPr algn="ctr" indent="0" marL="0">
+              <a:buNone/>
+            </a:pPr>
+            <a:r>
+              <a:rPr lang="en-US" sz="1300" b="1" dirty="0">
+                <a:solidFill>
+                  <a:srgbClr val="FAF8F1"/>
+                </a:solidFill>
+                <a:latin typeface="Arial" pitchFamily="34" charset="0"/>
+                <a:ea typeface="Arial" pitchFamily="34" charset="-122"/>
+                <a:cs typeface="Arial" pitchFamily="34" charset="-120"/>
+              </a:rPr>
+              <a:t>F2</a:t>
+            </a:r>
+            <a:endParaRPr lang="en-US" sz="1300" dirty="0"/>
+          </a:p>
+        </p:txBody>
+      </p:sp>
+      <p:sp>
+        <p:nvSpPr>
+          <p:cNvPr id="13" name="Shape 11"/>
+          <p:cNvSpPr/>
+          <p:nvPr/>
+        </p:nvSpPr>
+        <p:spPr>
+          <a:xfrm>
+            <a:off x="6949440" y="3172968"/>
+            <a:ext cx="4114800" cy="0"/>
+          </a:xfrm>
+          <a:prstGeom prst="line">
+            <a:avLst/>
+          </a:prstGeom>
+          <a:noFill/>
+          <a:ln w="25400">
+            <a:solidFill>
+              <a:srgbClr val="8C3A38"/>
+            </a:solidFill>
+            <a:prstDash val="dash"/>
+          </a:ln>
+        </p:spPr>
+      </p:sp>
+      <p:sp>
+        <p:nvSpPr>
+          <p:cNvPr id="14" name="Text 12"/>
+          <p:cNvSpPr/>
+          <p:nvPr/>
+        </p:nvSpPr>
+        <p:spPr>
+          <a:xfrm>
+            <a:off x="8366760" y="3218688"/>
+            <a:ext cx="1280160" cy="274320"/>
+          </a:xfrm>
+          <a:prstGeom prst="rect">
+            <a:avLst/>
+          </a:prstGeom>
+          <a:noFill/>
+          <a:ln/>
+        </p:spPr>
+        <p:txBody>
+          <a:bodyPr wrap="square" lIns="0" tIns="0" rIns="0" bIns="0" rtlCol="0" anchor="ctr"/>
+          <a:lstStyle/>
+          <a:p>
+            <a:pPr algn="ctr" indent="0" marL="0">
+              <a:buNone/>
+            </a:pPr>
+            <a:r>
+              <a:rPr lang="en-US" sz="950" i="1" dirty="0">
+                <a:solidFill>
+                  <a:srgbClr val="8C3A38"/>
+                </a:solidFill>
+                <a:latin typeface="Arial" pitchFamily="34" charset="0"/>
+                <a:ea typeface="Arial" pitchFamily="34" charset="-122"/>
+                <a:cs typeface="Arial" pitchFamily="34" charset="-120"/>
+              </a:rPr>
+              <a:t>the line</a:t>
+            </a:r>
+            <a:endParaRPr lang="en-US" sz="950" dirty="0"/>
+          </a:p>
+        </p:txBody>
+      </p:sp>
+      <p:sp>
+        <p:nvSpPr>
+          <p:cNvPr id="15" name="Shape 13"/>
+          <p:cNvSpPr/>
+          <p:nvPr/>
+        </p:nvSpPr>
+        <p:spPr>
+          <a:xfrm>
+            <a:off x="7452360" y="4663440"/>
+            <a:ext cx="777240" cy="457200"/>
+          </a:xfrm>
+          <a:prstGeom prst="rect">
+            <a:avLst/>
+          </a:prstGeom>
+          <a:solidFill>
+            <a:srgbClr val="24313F"/>
+          </a:solidFill>
+          <a:ln/>
+        </p:spPr>
+      </p:sp>
+      <p:sp>
+        <p:nvSpPr>
+          <p:cNvPr id="16" name="Text 14"/>
+          <p:cNvSpPr/>
+          <p:nvPr/>
+        </p:nvSpPr>
+        <p:spPr>
+          <a:xfrm>
+            <a:off x="7452360" y="4663440"/>
+            <a:ext cx="777240" cy="457200"/>
+          </a:xfrm>
+          <a:prstGeom prst="rect">
+            <a:avLst/>
+          </a:prstGeom>
+          <a:noFill/>
+          <a:ln/>
+        </p:spPr>
+        <p:txBody>
+          <a:bodyPr wrap="square" lIns="0" tIns="0" rIns="0" bIns="0" rtlCol="0" anchor="ctr"/>
+          <a:lstStyle/>
+          <a:p>
+            <a:pPr algn="ctr" indent="0" marL="0">
+              <a:buNone/>
+            </a:pPr>
+            <a:r>
+              <a:rPr lang="en-US" sz="1300" b="1" dirty="0">
+                <a:solidFill>
+                  <a:srgbClr val="FAF8F1"/>
+                </a:solidFill>
+                <a:latin typeface="Arial" pitchFamily="34" charset="0"/>
+                <a:ea typeface="Arial" pitchFamily="34" charset="-122"/>
+                <a:cs typeface="Arial" pitchFamily="34" charset="-120"/>
+              </a:rPr>
+              <a:t>A</a:t>
+            </a:r>
+            <a:endParaRPr lang="en-US" sz="1300" dirty="0"/>
+          </a:p>
+        </p:txBody>
+      </p:sp>
+      <p:sp>
+        <p:nvSpPr>
+          <p:cNvPr id="17" name="Shape 15"/>
+          <p:cNvSpPr/>
+          <p:nvPr/>
+        </p:nvSpPr>
+        <p:spPr>
+          <a:xfrm>
+            <a:off x="9784080" y="4663440"/>
+            <a:ext cx="777240" cy="457200"/>
+          </a:xfrm>
+          <a:prstGeom prst="rect">
+            <a:avLst/>
+          </a:prstGeom>
+          <a:solidFill>
+            <a:srgbClr val="24313F"/>
+          </a:solidFill>
+          <a:ln/>
+        </p:spPr>
+      </p:sp>
+      <p:sp>
+        <p:nvSpPr>
+          <p:cNvPr id="18" name="Text 16"/>
+          <p:cNvSpPr/>
+          <p:nvPr/>
+        </p:nvSpPr>
+        <p:spPr>
+          <a:xfrm>
+            <a:off x="9784080" y="4663440"/>
+            <a:ext cx="777240" cy="457200"/>
+          </a:xfrm>
+          <a:prstGeom prst="rect">
+            <a:avLst/>
+          </a:prstGeom>
+          <a:noFill/>
+          <a:ln/>
+        </p:spPr>
+        <p:txBody>
+          <a:bodyPr wrap="square" lIns="0" tIns="0" rIns="0" bIns="0" rtlCol="0" anchor="ctr"/>
+          <a:lstStyle/>
+          <a:p>
+            <a:pPr algn="ctr" indent="0" marL="0">
+              <a:buNone/>
+            </a:pPr>
+            <a:r>
+              <a:rPr lang="en-US" sz="1300" b="1" dirty="0">
+                <a:solidFill>
+                  <a:srgbClr val="FAF8F1"/>
+                </a:solidFill>
+                <a:latin typeface="Arial" pitchFamily="34" charset="0"/>
+                <a:ea typeface="Arial" pitchFamily="34" charset="-122"/>
+                <a:cs typeface="Arial" pitchFamily="34" charset="-120"/>
+              </a:rPr>
+              <a:t>B</a:t>
+            </a:r>
+            <a:endParaRPr lang="en-US" sz="1300" dirty="0"/>
+          </a:p>
+        </p:txBody>
+      </p:sp>
+      <p:sp>
+        <p:nvSpPr>
+          <p:cNvPr id="19" name="Shape 17"/>
+          <p:cNvSpPr/>
+          <p:nvPr/>
+        </p:nvSpPr>
+        <p:spPr>
+          <a:xfrm>
+            <a:off x="7836408" y="3520440"/>
+            <a:ext cx="320040" cy="1143000"/>
+          </a:xfrm>
+          <a:prstGeom prst="line">
+            <a:avLst/>
+          </a:prstGeom>
+          <a:noFill/>
+          <a:ln w="12700">
+            <a:solidFill>
+              <a:srgbClr val="7A7F72"/>
+            </a:solidFill>
+            <a:prstDash val="solid"/>
+          </a:ln>
+        </p:spPr>
+      </p:sp>
+      <p:sp>
+        <p:nvSpPr>
+          <p:cNvPr id="20" name="Shape 18"/>
+          <p:cNvSpPr/>
+          <p:nvPr/>
+        </p:nvSpPr>
+        <p:spPr>
+          <a:xfrm>
+            <a:off x="9857232" y="3520440"/>
+            <a:ext cx="320040" cy="1143000"/>
+          </a:xfrm>
+          <a:prstGeom prst="line">
+            <a:avLst/>
+          </a:prstGeom>
+          <a:noFill/>
+          <a:ln w="12700">
+            <a:solidFill>
+              <a:srgbClr val="7A7F72"/>
+            </a:solidFill>
+            <a:prstDash val="solid"/>
+          </a:ln>
+        </p:spPr>
+      </p:sp>
+      <p:sp>
+        <p:nvSpPr>
+          <p:cNvPr id="21" name="Shape 19"/>
+          <p:cNvSpPr/>
+          <p:nvPr/>
+        </p:nvSpPr>
+        <p:spPr>
+          <a:xfrm>
+            <a:off x="8622792" y="1600200"/>
+            <a:ext cx="777240" cy="457200"/>
+          </a:xfrm>
+          <a:prstGeom prst="rect">
+            <a:avLst/>
+          </a:prstGeom>
+          <a:solidFill>
+            <a:srgbClr val="FAF8F1"/>
+          </a:solidFill>
+          <a:ln w="19050">
+            <a:solidFill>
+              <a:srgbClr val="8C3A38"/>
+            </a:solidFill>
+            <a:prstDash val="solid"/>
+          </a:ln>
+        </p:spPr>
+      </p:sp>
+      <p:sp>
+        <p:nvSpPr>
+          <p:cNvPr id="22" name="Text 20"/>
+          <p:cNvSpPr/>
+          <p:nvPr/>
+        </p:nvSpPr>
+        <p:spPr>
+          <a:xfrm>
+            <a:off x="8622792" y="1600200"/>
+            <a:ext cx="777240" cy="457200"/>
+          </a:xfrm>
+          <a:prstGeom prst="rect">
+            <a:avLst/>
+          </a:prstGeom>
+          <a:noFill/>
+          <a:ln/>
+        </p:spPr>
+        <p:txBody>
+          <a:bodyPr wrap="square" lIns="0" tIns="0" rIns="0" bIns="0" rtlCol="0" anchor="ctr"/>
+          <a:lstStyle/>
+          <a:p>
+            <a:pPr algn="ctr" indent="0" marL="0">
+              <a:buNone/>
+            </a:pPr>
+            <a:r>
+              <a:rPr lang="en-US" sz="1300" b="1" dirty="0">
+                <a:solidFill>
+                  <a:srgbClr val="8C3A38"/>
+                </a:solidFill>
+                <a:latin typeface="Arial" pitchFamily="34" charset="0"/>
+                <a:ea typeface="Arial" pitchFamily="34" charset="-122"/>
+                <a:cs typeface="Arial" pitchFamily="34" charset="-120"/>
+              </a:rPr>
+              <a:t>C</a:t>
+            </a:r>
+            <a:endParaRPr lang="en-US" sz="1300" dirty="0"/>
+          </a:p>
+        </p:txBody>
+      </p:sp>
+      <p:sp>
+        <p:nvSpPr>
+          <p:cNvPr id="23" name="Shape 21"/>
+          <p:cNvSpPr/>
+          <p:nvPr/>
+        </p:nvSpPr>
+        <p:spPr>
+          <a:xfrm>
+            <a:off x="8503920" y="1536192"/>
+            <a:ext cx="1005840" cy="594360"/>
+          </a:xfrm>
+          <a:prstGeom prst="line">
+            <a:avLst/>
+          </a:prstGeom>
+          <a:noFill/>
+          <a:ln w="25400">
+            <a:solidFill>
+              <a:srgbClr val="8C3A38"/>
+            </a:solidFill>
+            <a:prstDash val="solid"/>
+          </a:ln>
+        </p:spPr>
+      </p:sp>
+      <p:sp>
+        <p:nvSpPr>
+          <p:cNvPr id="24" name="Shape 22"/>
+          <p:cNvSpPr/>
+          <p:nvPr/>
+        </p:nvSpPr>
+        <p:spPr>
+          <a:xfrm flipV="1">
+            <a:off x="8503920" y="1536192"/>
+            <a:ext cx="1005840" cy="594360"/>
+          </a:xfrm>
+          <a:prstGeom prst="line">
+            <a:avLst/>
+          </a:prstGeom>
+          <a:noFill/>
+          <a:ln w="25400">
+            <a:solidFill>
+              <a:srgbClr val="8C3A38"/>
+            </a:solidFill>
+            <a:prstDash val="solid"/>
+          </a:ln>
+        </p:spPr>
+      </p:sp>
+      <p:sp>
+        <p:nvSpPr>
+          <p:cNvPr id="25" name="Text 23"/>
+          <p:cNvSpPr/>
+          <p:nvPr/>
+        </p:nvSpPr>
+        <p:spPr>
+          <a:xfrm>
+            <a:off x="6675120" y="5833872"/>
+            <a:ext cx="4663440" cy="320040"/>
+          </a:xfrm>
+          <a:prstGeom prst="rect">
+            <a:avLst/>
+          </a:prstGeom>
+          <a:noFill/>
+          <a:ln/>
+        </p:spPr>
+        <p:txBody>
+          <a:bodyPr wrap="square" lIns="0" tIns="0" rIns="0" bIns="0" rtlCol="0" anchor="ctr"/>
+          <a:lstStyle/>
+          <a:p>
+            <a:pPr algn="ctr" indent="0" marL="0">
+              <a:buNone/>
+            </a:pPr>
+            <a:r>
+              <a:rPr lang="en-US" sz="1050" dirty="0">
+                <a:solidFill>
+                  <a:srgbClr val="7A7F72"/>
+                </a:solidFill>
+                <a:latin typeface="Arial" pitchFamily="34" charset="0"/>
+                <a:ea typeface="Arial" pitchFamily="34" charset="-122"/>
+                <a:cs typeface="Arial" pitchFamily="34" charset="-120"/>
+              </a:rPr>
+              <a:t>Keep A and B on one side; C flips the geography.</a:t>
+            </a:r>
+            <a:endParaRPr lang="en-US" sz="1050" dirty="0"/>
+          </a:p>
+        </p:txBody>
+      </p:sp>
+      <p:sp>
+        <p:nvSpPr>
+          <p:cNvPr id="26" name="Shape 24"/>
+          <p:cNvSpPr/>
+          <p:nvPr/>
+        </p:nvSpPr>
+        <p:spPr>
+          <a:xfrm>
+            <a:off x="822960" y="6382512"/>
+            <a:ext cx="10543032" cy="0"/>
+          </a:xfrm>
+          <a:prstGeom prst="line">
+            <a:avLst/>
+          </a:prstGeom>
+          <a:noFill/>
+          <a:ln w="9525">
+            <a:solidFill>
+              <a:srgbClr val="D9D4C4"/>
+            </a:solidFill>
+            <a:prstDash val="solid"/>
+          </a:ln>
+        </p:spPr>
+      </p:sp>
+      <p:sp>
+        <p:nvSpPr>
+          <p:cNvPr id="27" name="Text 25"/>
+          <p:cNvSpPr/>
+          <p:nvPr/>
+        </p:nvSpPr>
+        <p:spPr>
+          <a:xfrm>
+            <a:off x="822960" y="6419088"/>
+            <a:ext cx="7315200" cy="274320"/>
+          </a:xfrm>
+          <a:prstGeom prst="rect">
+            <a:avLst/>
+          </a:prstGeom>
+          <a:noFill/>
+          <a:ln/>
+        </p:spPr>
+        <p:txBody>
+          <a:bodyPr wrap="square" lIns="0" tIns="0" rIns="0" bIns="0" rtlCol="0" anchor="ctr"/>
+          <a:lstStyle/>
+          <a:p>
+            <a:pPr indent="0" marL="0">
+              <a:buNone/>
+            </a:pPr>
+            <a:r>
+              <a:rPr lang="en-US" sz="900" spc="150" kern="0" dirty="0">
+                <a:solidFill>
+                  <a:srgbClr val="7A7F72"/>
+                </a:solidFill>
+                <a:latin typeface="Arial" pitchFamily="34" charset="0"/>
+                <a:ea typeface="Arial" pitchFamily="34" charset="-122"/>
+                <a:cs typeface="Arial" pitchFamily="34" charset="-120"/>
+              </a:rPr>
+              <a:t>MEDIA STUDIES 9607 · SEMESTER I</a:t>
+            </a:r>
+            <a:endParaRPr lang="en-US" sz="900" dirty="0"/>
+          </a:p>
+        </p:txBody>
+      </p:sp>
+      <p:sp>
+        <p:nvSpPr>
+          <p:cNvPr id="28" name="Text 26"/>
+          <p:cNvSpPr/>
+          <p:nvPr/>
+        </p:nvSpPr>
+        <p:spPr>
+          <a:xfrm>
+            <a:off x="10268712" y="6355080"/>
+            <a:ext cx="1097280" cy="365760"/>
+          </a:xfrm>
+          <a:prstGeom prst="rect">
+            <a:avLst/>
+          </a:prstGeom>
+          <a:noFill/>
+          <a:ln/>
+        </p:spPr>
+        <p:txBody>
+          <a:bodyPr wrap="square" lIns="0" tIns="0" rIns="0" bIns="0" rtlCol="0" anchor="ctr"/>
+          <a:lstStyle/>
+          <a:p>
+            <a:pPr algn="r" indent="0" marL="0">
+              <a:buNone/>
+            </a:pPr>
+            <a:r>
+              <a:rPr lang="en-US" sz="1600" dirty="0">
+                <a:solidFill>
+                  <a:srgbClr val="A3C1AD"/>
+                </a:solidFill>
+                <a:latin typeface="Georgia" pitchFamily="34" charset="0"/>
+                <a:ea typeface="Georgia" pitchFamily="34" charset="-122"/>
+                <a:cs typeface="Georgia" pitchFamily="34" charset="-120"/>
+              </a:rPr>
+              <a:t>03</a:t>
+            </a:r>
+            <a:endParaRPr lang="en-US" sz="1600" dirty="0"/>
           </a:p>
         </p:txBody>
       </p:sp>
@@ -6396,7 +7969,7 @@
                 <a:ea typeface="Arial" pitchFamily="34" charset="-122"/>
                 <a:cs typeface="Arial" pitchFamily="34" charset="-120"/>
               </a:rPr>
-              <a:t>FOUR GROUPS, FOUR MINUTES, THEN TEACH BACK</a:t>
+              <a:t>WHEN THE SYSTEM IS REFUSED</a:t>
             </a:r>
             <a:endParaRPr lang="en-US" sz="1100" dirty="0"/>
           </a:p>
@@ -6427,139 +8000,21 @@
       </p:sp>
       <p:sp>
         <p:nvSpPr>
-          <p:cNvPr id="5" name="Text 3"/>
-          <p:cNvSpPr/>
-          <p:nvPr/>
-        </p:nvSpPr>
-        <p:spPr>
-          <a:xfrm>
-            <a:off x="822960" y="932688"/>
-            <a:ext cx="10543032" cy="640080"/>
-          </a:xfrm>
-          <a:prstGeom prst="rect">
-            <a:avLst/>
-          </a:prstGeom>
-          <a:noFill/>
-          <a:ln/>
-        </p:spPr>
-        <p:txBody>
-          <a:bodyPr wrap="square" lIns="0" tIns="0" rIns="0" bIns="0" rtlCol="0" anchor="ctr"/>
-          <a:lstStyle/>
-          <a:p>
-            <a:pPr indent="0" marL="0">
-              <a:buNone/>
-            </a:pPr>
-            <a:r>
-              <a:rPr lang="en-US" sz="3200" dirty="0">
-                <a:solidFill>
-                  <a:srgbClr val="24313F"/>
-                </a:solidFill>
-                <a:latin typeface="Georgia" pitchFamily="34" charset="0"/>
-                <a:ea typeface="Georgia" pitchFamily="34" charset="-122"/>
-                <a:cs typeface="Georgia" pitchFamily="34" charset="-120"/>
-              </a:rPr>
-              <a:t>When the system is refused</a:t>
-            </a:r>
-            <a:endParaRPr lang="en-US" sz="3200" dirty="0"/>
-          </a:p>
-        </p:txBody>
-      </p:sp>
-      <p:sp>
-        <p:nvSpPr>
-          <p:cNvPr id="6" name="Text 4"/>
-          <p:cNvSpPr/>
-          <p:nvPr/>
-        </p:nvSpPr>
-        <p:spPr>
-          <a:xfrm>
-            <a:off x="822960" y="1828800"/>
-            <a:ext cx="914400" cy="457200"/>
-          </a:xfrm>
-          <a:prstGeom prst="rect">
-            <a:avLst/>
-          </a:prstGeom>
-          <a:noFill/>
-          <a:ln/>
-        </p:spPr>
-        <p:txBody>
-          <a:bodyPr wrap="square" lIns="0" tIns="0" rIns="0" bIns="0" rtlCol="0" anchor="ctr"/>
-          <a:lstStyle/>
-          <a:p>
-            <a:pPr indent="0" marL="0">
-              <a:buNone/>
-            </a:pPr>
-            <a:r>
-              <a:rPr lang="en-US" sz="2600" dirty="0">
-                <a:solidFill>
-                  <a:srgbClr val="A3C1AD"/>
-                </a:solidFill>
-                <a:latin typeface="Georgia" pitchFamily="34" charset="0"/>
-                <a:ea typeface="Georgia" pitchFamily="34" charset="-122"/>
-                <a:cs typeface="Georgia" pitchFamily="34" charset="-120"/>
-              </a:rPr>
-              <a:t>01</a:t>
-            </a:r>
-            <a:endParaRPr lang="en-US" sz="2600" dirty="0"/>
-          </a:p>
-        </p:txBody>
-      </p:sp>
-      <p:sp>
-        <p:nvSpPr>
-          <p:cNvPr id="7" name="Text 5"/>
-          <p:cNvSpPr/>
-          <p:nvPr/>
-        </p:nvSpPr>
-        <p:spPr>
-          <a:xfrm>
-            <a:off x="822960" y="2286000"/>
-            <a:ext cx="2361438" cy="777240"/>
-          </a:xfrm>
-          <a:prstGeom prst="rect">
-            <a:avLst/>
-          </a:prstGeom>
-          <a:noFill/>
-          <a:ln/>
-        </p:spPr>
-        <p:txBody>
-          <a:bodyPr wrap="square" lIns="0" tIns="0" rIns="0" bIns="0" rtlCol="0" anchor="t"/>
-          <a:lstStyle/>
-          <a:p>
-            <a:pPr indent="0" marL="0">
-              <a:lnSpc>
-                <a:spcPts val="2300"/>
-              </a:lnSpc>
-              <a:buNone/>
-            </a:pPr>
-            <a:r>
-              <a:rPr lang="en-US" sz="2000" dirty="0">
-                <a:solidFill>
-                  <a:srgbClr val="4A6B5D"/>
-                </a:solidFill>
-                <a:latin typeface="Georgia" pitchFamily="34" charset="0"/>
-                <a:ea typeface="Georgia" pitchFamily="34" charset="-122"/>
-                <a:cs typeface="Georgia" pitchFamily="34" charset="-120"/>
-              </a:rPr>
-              <a:t>Breaking continuity</a:t>
-            </a:r>
-            <a:endParaRPr lang="en-US" sz="2000" dirty="0"/>
-          </a:p>
-        </p:txBody>
-      </p:sp>
-      <p:sp>
-        <p:nvSpPr>
-          <p:cNvPr id="8" name="Shape 6"/>
-          <p:cNvSpPr/>
-          <p:nvPr/>
-        </p:nvSpPr>
-        <p:spPr>
-          <a:xfrm>
-            <a:off x="822960" y="3127248"/>
-            <a:ext cx="2361438" cy="0"/>
-          </a:xfrm>
-          <a:prstGeom prst="line">
-            <a:avLst/>
-          </a:prstGeom>
-          <a:noFill/>
+          <p:cNvPr id="5" name="Shape 3"/>
+          <p:cNvSpPr/>
+          <p:nvPr/>
+        </p:nvSpPr>
+        <p:spPr>
+          <a:xfrm>
+            <a:off x="822960" y="1051560"/>
+            <a:ext cx="5042916" cy="1645920"/>
+          </a:xfrm>
+          <a:prstGeom prst="rect">
+            <a:avLst/>
+          </a:prstGeom>
+          <a:solidFill>
+            <a:srgbClr val="FAF8F1"/>
+          </a:solidFill>
           <a:ln w="9525">
             <a:solidFill>
               <a:srgbClr val="D9D4C4"/>
@@ -6568,97 +8023,79 @@
           </a:ln>
         </p:spPr>
       </p:sp>
-      <p:sp>
-        <p:nvSpPr>
-          <p:cNvPr id="9" name="Text 7"/>
-          <p:cNvSpPr/>
-          <p:nvPr/>
-        </p:nvSpPr>
-        <p:spPr>
-          <a:xfrm>
-            <a:off x="822960" y="3273552"/>
-            <a:ext cx="2361438" cy="1463040"/>
-          </a:xfrm>
-          <a:prstGeom prst="rect">
-            <a:avLst/>
-          </a:prstGeom>
-          <a:noFill/>
-          <a:ln/>
-        </p:spPr>
-        <p:txBody>
-          <a:bodyPr wrap="square" lIns="0" tIns="0" rIns="0" bIns="0" rtlCol="0" anchor="t"/>
+      <p:pic>
+        <p:nvPicPr>
+          <p:cNvPr id="6" name="Image 0" descr="/Users/dogan/Documents/Vaults/Courses/wiki/classes/media-studies/decks/_build/img/breathless-jump-1.jpg">    </p:cNvPr>
+          <p:cNvPicPr>
+            <a:picLocks noChangeAspect="1"/>
+          </p:cNvPicPr>
+          <p:nvPr/>
+        </p:nvPicPr>
+        <p:blipFill>
+          <a:blip r:embed="rId1"/>
+          <a:stretch>
+            <a:fillRect/>
+          </a:stretch>
+        </p:blipFill>
+        <p:spPr>
+          <a:xfrm>
+            <a:off x="2351904" y="1106424"/>
+            <a:ext cx="1985027" cy="1536192"/>
+          </a:xfrm>
+          <a:prstGeom prst="rect">
+            <a:avLst/>
+          </a:prstGeom>
+        </p:spPr>
+      </p:pic>
+      <p:sp>
+        <p:nvSpPr>
+          <p:cNvPr id="7" name="Text 4"/>
+          <p:cNvSpPr/>
+          <p:nvPr/>
+        </p:nvSpPr>
+        <p:spPr>
+          <a:xfrm>
+            <a:off x="822960" y="2734056"/>
+            <a:ext cx="2651760" cy="310896"/>
+          </a:xfrm>
+          <a:prstGeom prst="rect">
+            <a:avLst/>
+          </a:prstGeom>
+          <a:noFill/>
+          <a:ln/>
+        </p:spPr>
+        <p:txBody>
+          <a:bodyPr wrap="square" lIns="0" tIns="0" rIns="0" bIns="0" rtlCol="0" anchor="ctr"/>
           <a:lstStyle/>
           <a:p>
             <a:pPr indent="0" marL="0">
-              <a:lnSpc>
-                <a:spcPts val="2200"/>
-              </a:lnSpc>
-              <a:buNone/>
-            </a:pPr>
-            <a:r>
-              <a:rPr lang="en-US" sz="1550" dirty="0">
-                <a:solidFill>
-                  <a:srgbClr val="24313F"/>
+              <a:buNone/>
+            </a:pPr>
+            <a:r>
+              <a:rPr lang="en-US" sz="1600" dirty="0">
+                <a:solidFill>
+                  <a:srgbClr val="4A6B5D"/>
                 </a:solidFill>
                 <a:latin typeface="Georgia" pitchFamily="34" charset="0"/>
                 <a:ea typeface="Georgia" pitchFamily="34" charset="-122"/>
                 <a:cs typeface="Georgia" pitchFamily="34" charset="-120"/>
               </a:rPr>
-              <a:t>jump cut, and what it signals</a:t>
-            </a:r>
-            <a:endParaRPr lang="en-US" sz="1550" dirty="0"/>
-          </a:p>
-        </p:txBody>
-      </p:sp>
-      <p:sp>
-        <p:nvSpPr>
-          <p:cNvPr id="10" name="Text 8"/>
-          <p:cNvSpPr/>
-          <p:nvPr/>
-        </p:nvSpPr>
-        <p:spPr>
-          <a:xfrm>
-            <a:off x="3550158" y="1828800"/>
-            <a:ext cx="914400" cy="457200"/>
-          </a:xfrm>
-          <a:prstGeom prst="rect">
-            <a:avLst/>
-          </a:prstGeom>
-          <a:noFill/>
-          <a:ln/>
-        </p:spPr>
-        <p:txBody>
-          <a:bodyPr wrap="square" lIns="0" tIns="0" rIns="0" bIns="0" rtlCol="0" anchor="ctr"/>
-          <a:lstStyle/>
-          <a:p>
-            <a:pPr indent="0" marL="0">
-              <a:buNone/>
-            </a:pPr>
-            <a:r>
-              <a:rPr lang="en-US" sz="2600" dirty="0">
-                <a:solidFill>
-                  <a:srgbClr val="A3C1AD"/>
-                </a:solidFill>
-                <a:latin typeface="Georgia" pitchFamily="34" charset="0"/>
-                <a:ea typeface="Georgia" pitchFamily="34" charset="-122"/>
-                <a:cs typeface="Georgia" pitchFamily="34" charset="-120"/>
-              </a:rPr>
-              <a:t>02</a:t>
-            </a:r>
-            <a:endParaRPr lang="en-US" sz="2600" dirty="0"/>
-          </a:p>
-        </p:txBody>
-      </p:sp>
-      <p:sp>
-        <p:nvSpPr>
-          <p:cNvPr id="11" name="Text 9"/>
-          <p:cNvSpPr/>
-          <p:nvPr/>
-        </p:nvSpPr>
-        <p:spPr>
-          <a:xfrm>
-            <a:off x="3550158" y="2286000"/>
-            <a:ext cx="2361438" cy="777240"/>
+              <a:t>Jump cut</a:t>
+            </a:r>
+            <a:endParaRPr lang="en-US" sz="1600" dirty="0"/>
+          </a:p>
+        </p:txBody>
+      </p:sp>
+      <p:sp>
+        <p:nvSpPr>
+          <p:cNvPr id="8" name="Text 5"/>
+          <p:cNvSpPr/>
+          <p:nvPr/>
+        </p:nvSpPr>
+        <p:spPr>
+          <a:xfrm>
+            <a:off x="3474720" y="2734056"/>
+            <a:ext cx="2391156" cy="566928"/>
           </a:xfrm>
           <a:prstGeom prst="rect">
             <a:avLst/>
@@ -6672,40 +8109,42 @@
           <a:p>
             <a:pPr indent="0" marL="0">
               <a:lnSpc>
-                <a:spcPts val="2300"/>
+                <a:spcPts val="1200"/>
               </a:lnSpc>
               <a:buNone/>
             </a:pPr>
             <a:r>
-              <a:rPr lang="en-US" sz="2000" dirty="0">
-                <a:solidFill>
-                  <a:srgbClr val="4A6B5D"/>
-                </a:solidFill>
-                <a:latin typeface="Georgia" pitchFamily="34" charset="0"/>
-                <a:ea typeface="Georgia" pitchFamily="34" charset="-122"/>
-                <a:cs typeface="Georgia" pitchFamily="34" charset="-120"/>
-              </a:rPr>
-              <a:t>Two actions at once</a:t>
-            </a:r>
-            <a:endParaRPr lang="en-US" sz="2000" dirty="0"/>
-          </a:p>
-        </p:txBody>
-      </p:sp>
-      <p:sp>
-        <p:nvSpPr>
-          <p:cNvPr id="12" name="Shape 10"/>
-          <p:cNvSpPr/>
-          <p:nvPr/>
-        </p:nvSpPr>
-        <p:spPr>
-          <a:xfrm>
-            <a:off x="3550158" y="3127248"/>
-            <a:ext cx="2361438" cy="0"/>
-          </a:xfrm>
-          <a:prstGeom prst="line">
-            <a:avLst/>
-          </a:prstGeom>
-          <a:noFill/>
+              <a:rPr lang="en-US" sz="950" i="1" dirty="0">
+                <a:solidFill>
+                  <a:srgbClr val="7A7F72"/>
+                </a:solidFill>
+                <a:latin typeface="Arial" pitchFamily="34" charset="0"/>
+                <a:ea typeface="Arial" pitchFamily="34" charset="-122"/>
+                <a:cs typeface="Arial" pitchFamily="34" charset="-120"/>
+              </a:rPr>
+              <a:t>Breathless (1960): the shot repeats with time missing. Breaking continuity as a signature.</a:t>
+            </a:r>
+            <a:endParaRPr lang="en-US" sz="950" dirty="0"/>
+          </a:p>
+        </p:txBody>
+      </p:sp>
+      <p:sp>
+        <p:nvSpPr>
+          <p:cNvPr id="9" name="Shape 6"/>
+          <p:cNvSpPr/>
+          <p:nvPr/>
+        </p:nvSpPr>
+        <p:spPr>
+          <a:xfrm>
+            <a:off x="6323076" y="1051560"/>
+            <a:ext cx="2430018" cy="1645920"/>
+          </a:xfrm>
+          <a:prstGeom prst="rect">
+            <a:avLst/>
+          </a:prstGeom>
+          <a:solidFill>
+            <a:srgbClr val="FAF8F1"/>
+          </a:solidFill>
           <a:ln w="9525">
             <a:solidFill>
               <a:srgbClr val="D9D4C4"/>
@@ -6714,144 +8153,47 @@
           </a:ln>
         </p:spPr>
       </p:sp>
-      <p:sp>
-        <p:nvSpPr>
-          <p:cNvPr id="13" name="Text 11"/>
-          <p:cNvSpPr/>
-          <p:nvPr/>
-        </p:nvSpPr>
-        <p:spPr>
-          <a:xfrm>
-            <a:off x="3550158" y="3273552"/>
-            <a:ext cx="2361438" cy="1463040"/>
-          </a:xfrm>
-          <a:prstGeom prst="rect">
-            <a:avLst/>
-          </a:prstGeom>
-          <a:noFill/>
-          <a:ln/>
-        </p:spPr>
-        <p:txBody>
-          <a:bodyPr wrap="square" lIns="0" tIns="0" rIns="0" bIns="0" rtlCol="0" anchor="t"/>
-          <a:lstStyle/>
-          <a:p>
-            <a:pPr indent="0" marL="0">
-              <a:lnSpc>
-                <a:spcPts val="2200"/>
-              </a:lnSpc>
-              <a:buNone/>
-            </a:pPr>
-            <a:r>
-              <a:rPr lang="en-US" sz="1550" dirty="0">
-                <a:solidFill>
-                  <a:srgbClr val="24313F"/>
-                </a:solidFill>
-                <a:latin typeface="Georgia" pitchFamily="34" charset="0"/>
-                <a:ea typeface="Georgia" pitchFamily="34" charset="-122"/>
-                <a:cs typeface="Georgia" pitchFamily="34" charset="-120"/>
-              </a:rPr>
-              <a:t>crosscutting  ·  parallel editing</a:t>
-            </a:r>
-            <a:endParaRPr lang="en-US" sz="1550" dirty="0"/>
-          </a:p>
-        </p:txBody>
-      </p:sp>
-      <p:sp>
-        <p:nvSpPr>
-          <p:cNvPr id="14" name="Text 12"/>
-          <p:cNvSpPr/>
-          <p:nvPr/>
-        </p:nvSpPr>
-        <p:spPr>
-          <a:xfrm>
-            <a:off x="6277356" y="1828800"/>
-            <a:ext cx="914400" cy="457200"/>
-          </a:xfrm>
-          <a:prstGeom prst="rect">
-            <a:avLst/>
-          </a:prstGeom>
-          <a:noFill/>
-          <a:ln/>
-        </p:spPr>
-        <p:txBody>
-          <a:bodyPr wrap="square" lIns="0" tIns="0" rIns="0" bIns="0" rtlCol="0" anchor="ctr"/>
-          <a:lstStyle/>
-          <a:p>
-            <a:pPr indent="0" marL="0">
-              <a:buNone/>
-            </a:pPr>
-            <a:r>
-              <a:rPr lang="en-US" sz="2600" dirty="0">
-                <a:solidFill>
-                  <a:srgbClr val="A3C1AD"/>
-                </a:solidFill>
-                <a:latin typeface="Georgia" pitchFamily="34" charset="0"/>
-                <a:ea typeface="Georgia" pitchFamily="34" charset="-122"/>
-                <a:cs typeface="Georgia" pitchFamily="34" charset="-120"/>
-              </a:rPr>
-              <a:t>03</a:t>
-            </a:r>
-            <a:endParaRPr lang="en-US" sz="2600" dirty="0"/>
-          </a:p>
-        </p:txBody>
-      </p:sp>
-      <p:sp>
-        <p:nvSpPr>
-          <p:cNvPr id="15" name="Text 13"/>
-          <p:cNvSpPr/>
-          <p:nvPr/>
-        </p:nvSpPr>
-        <p:spPr>
-          <a:xfrm>
-            <a:off x="6277356" y="2286000"/>
-            <a:ext cx="2361438" cy="777240"/>
-          </a:xfrm>
-          <a:prstGeom prst="rect">
-            <a:avLst/>
-          </a:prstGeom>
-          <a:noFill/>
-          <a:ln/>
-        </p:spPr>
-        <p:txBody>
-          <a:bodyPr wrap="square" lIns="0" tIns="0" rIns="0" bIns="0" rtlCol="0" anchor="t"/>
-          <a:lstStyle/>
-          <a:p>
-            <a:pPr indent="0" marL="0">
-              <a:lnSpc>
-                <a:spcPts val="2300"/>
-              </a:lnSpc>
-              <a:buNone/>
-            </a:pPr>
-            <a:r>
-              <a:rPr lang="en-US" sz="2000" dirty="0">
-                <a:solidFill>
-                  <a:srgbClr val="4A6B5D"/>
-                </a:solidFill>
-                <a:latin typeface="Georgia" pitchFamily="34" charset="0"/>
-                <a:ea typeface="Georgia" pitchFamily="34" charset="-122"/>
-                <a:cs typeface="Georgia" pitchFamily="34" charset="-120"/>
-              </a:rPr>
-              <a:t>Transitions</a:t>
-            </a:r>
-            <a:endParaRPr lang="en-US" sz="2000" dirty="0"/>
-          </a:p>
-        </p:txBody>
-      </p:sp>
-      <p:sp>
-        <p:nvSpPr>
-          <p:cNvPr id="16" name="Shape 14"/>
-          <p:cNvSpPr/>
-          <p:nvPr/>
-        </p:nvSpPr>
-        <p:spPr>
-          <a:xfrm>
-            <a:off x="6277356" y="3127248"/>
-            <a:ext cx="2361438" cy="0"/>
-          </a:xfrm>
-          <a:prstGeom prst="line">
-            <a:avLst/>
-          </a:prstGeom>
-          <a:noFill/>
+      <p:pic>
+        <p:nvPicPr>
+          <p:cNvPr id="10" name="Image 1" descr="/Users/dogan/Documents/Vaults/Courses/wiki/classes/media-studies/decks/_build/img/dunkirk-beach.jpg">    </p:cNvPr>
+          <p:cNvPicPr>
+            <a:picLocks noChangeAspect="1"/>
+          </p:cNvPicPr>
+          <p:nvPr/>
+        </p:nvPicPr>
+        <p:blipFill>
+          <a:blip r:embed="rId2"/>
+          <a:stretch>
+            <a:fillRect/>
+          </a:stretch>
+        </p:blipFill>
+        <p:spPr>
+          <a:xfrm>
+            <a:off x="6377940" y="1221938"/>
+            <a:ext cx="2320290" cy="1305163"/>
+          </a:xfrm>
+          <a:prstGeom prst="rect">
+            <a:avLst/>
+          </a:prstGeom>
+        </p:spPr>
+      </p:pic>
+      <p:sp>
+        <p:nvSpPr>
+          <p:cNvPr id="11" name="Shape 7"/>
+          <p:cNvSpPr/>
+          <p:nvPr/>
+        </p:nvSpPr>
+        <p:spPr>
+          <a:xfrm>
+            <a:off x="8935974" y="1051560"/>
+            <a:ext cx="2430018" cy="1645920"/>
+          </a:xfrm>
+          <a:prstGeom prst="rect">
+            <a:avLst/>
+          </a:prstGeom>
+          <a:solidFill>
+            <a:srgbClr val="FAF8F1"/>
+          </a:solidFill>
           <a:ln w="9525">
             <a:solidFill>
               <a:srgbClr val="D9D4C4"/>
@@ -6860,164 +8202,128 @@
           </a:ln>
         </p:spPr>
       </p:sp>
-      <p:sp>
-        <p:nvSpPr>
-          <p:cNvPr id="17" name="Text 15"/>
-          <p:cNvSpPr/>
-          <p:nvPr/>
-        </p:nvSpPr>
-        <p:spPr>
-          <a:xfrm>
-            <a:off x="6277356" y="3273552"/>
-            <a:ext cx="2361438" cy="1463040"/>
-          </a:xfrm>
-          <a:prstGeom prst="rect">
-            <a:avLst/>
-          </a:prstGeom>
-          <a:noFill/>
-          <a:ln/>
-        </p:spPr>
-        <p:txBody>
-          <a:bodyPr wrap="square" lIns="0" tIns="0" rIns="0" bIns="0" rtlCol="0" anchor="t"/>
+      <p:pic>
+        <p:nvPicPr>
+          <p:cNvPr id="12" name="Image 2" descr="/Users/dogan/Documents/Vaults/Courses/wiki/classes/media-studies/decks/_build/img/dunkirk-air.jpg">    </p:cNvPr>
+          <p:cNvPicPr>
+            <a:picLocks noChangeAspect="1"/>
+          </p:cNvPicPr>
+          <p:nvPr/>
+        </p:nvPicPr>
+        <p:blipFill>
+          <a:blip r:embed="rId3"/>
+          <a:stretch>
+            <a:fillRect/>
+          </a:stretch>
+        </p:blipFill>
+        <p:spPr>
+          <a:xfrm>
+            <a:off x="8990838" y="1221938"/>
+            <a:ext cx="2320290" cy="1305163"/>
+          </a:xfrm>
+          <a:prstGeom prst="rect">
+            <a:avLst/>
+          </a:prstGeom>
+        </p:spPr>
+      </p:pic>
+      <p:sp>
+        <p:nvSpPr>
+          <p:cNvPr id="13" name="Text 8"/>
+          <p:cNvSpPr/>
+          <p:nvPr/>
+        </p:nvSpPr>
+        <p:spPr>
+          <a:xfrm>
+            <a:off x="6323076" y="2734056"/>
+            <a:ext cx="2651760" cy="310896"/>
+          </a:xfrm>
+          <a:prstGeom prst="rect">
+            <a:avLst/>
+          </a:prstGeom>
+          <a:noFill/>
+          <a:ln/>
+        </p:spPr>
+        <p:txBody>
+          <a:bodyPr wrap="square" lIns="0" tIns="0" rIns="0" bIns="0" rtlCol="0" anchor="ctr"/>
           <a:lstStyle/>
           <a:p>
             <a:pPr indent="0" marL="0">
-              <a:lnSpc>
-                <a:spcPts val="2200"/>
-              </a:lnSpc>
-              <a:buNone/>
-            </a:pPr>
-            <a:r>
-              <a:rPr lang="en-US" sz="1550" dirty="0">
-                <a:solidFill>
-                  <a:srgbClr val="24313F"/>
+              <a:buNone/>
+            </a:pPr>
+            <a:r>
+              <a:rPr lang="en-US" sz="1600" dirty="0">
+                <a:solidFill>
+                  <a:srgbClr val="4A6B5D"/>
                 </a:solidFill>
                 <a:latin typeface="Georgia" pitchFamily="34" charset="0"/>
                 <a:ea typeface="Georgia" pitchFamily="34" charset="-122"/>
                 <a:cs typeface="Georgia" pitchFamily="34" charset="-120"/>
               </a:rPr>
-              <a:t>dissolve  ·  fade in and out</a:t>
-            </a:r>
-            <a:endParaRPr lang="en-US" sz="1550" dirty="0"/>
-          </a:p>
+              <a:t>Crosscutting</a:t>
+            </a:r>
+            <a:endParaRPr lang="en-US" sz="1600" dirty="0"/>
+          </a:p>
+        </p:txBody>
+      </p:sp>
+      <p:sp>
+        <p:nvSpPr>
+          <p:cNvPr id="14" name="Text 9"/>
+          <p:cNvSpPr/>
+          <p:nvPr/>
+        </p:nvSpPr>
+        <p:spPr>
+          <a:xfrm>
+            <a:off x="8974836" y="2734056"/>
+            <a:ext cx="2391156" cy="566928"/>
+          </a:xfrm>
+          <a:prstGeom prst="rect">
+            <a:avLst/>
+          </a:prstGeom>
+          <a:noFill/>
+          <a:ln/>
+        </p:spPr>
+        <p:txBody>
+          <a:bodyPr wrap="square" lIns="0" tIns="0" rIns="0" bIns="0" rtlCol="0" anchor="t"/>
+          <a:lstStyle/>
           <a:p>
             <a:pPr indent="0" marL="0">
               <a:lnSpc>
-                <a:spcPts val="2200"/>
+                <a:spcPts val="1200"/>
               </a:lnSpc>
               <a:buNone/>
             </a:pPr>
             <a:r>
-              <a:rPr lang="en-US" sz="1550" dirty="0">
-                <a:solidFill>
-                  <a:srgbClr val="24313F"/>
-                </a:solidFill>
-                <a:latin typeface="Georgia" pitchFamily="34" charset="0"/>
-                <a:ea typeface="Georgia" pitchFamily="34" charset="-122"/>
-                <a:cs typeface="Georgia" pitchFamily="34" charset="-120"/>
-              </a:rPr>
-              <a:t>wipe  ·  superimposition</a:t>
-            </a:r>
-            <a:endParaRPr lang="en-US" sz="1550" dirty="0"/>
-          </a:p>
-        </p:txBody>
-      </p:sp>
-      <p:sp>
-        <p:nvSpPr>
-          <p:cNvPr id="18" name="Text 16"/>
-          <p:cNvSpPr/>
-          <p:nvPr/>
-        </p:nvSpPr>
-        <p:spPr>
-          <a:xfrm>
-            <a:off x="9004554" y="1828800"/>
-            <a:ext cx="914400" cy="457200"/>
-          </a:xfrm>
-          <a:prstGeom prst="rect">
-            <a:avLst/>
-          </a:prstGeom>
-          <a:noFill/>
-          <a:ln/>
-        </p:spPr>
-        <p:txBody>
-          <a:bodyPr wrap="square" lIns="0" tIns="0" rIns="0" bIns="0" rtlCol="0" anchor="ctr"/>
-          <a:lstStyle/>
-          <a:p>
-            <a:pPr indent="0" marL="0">
-              <a:buNone/>
-            </a:pPr>
-            <a:r>
-              <a:rPr lang="en-US" sz="2600" dirty="0">
-                <a:solidFill>
-                  <a:srgbClr val="A3C1AD"/>
-                </a:solidFill>
-                <a:latin typeface="Georgia" pitchFamily="34" charset="0"/>
-                <a:ea typeface="Georgia" pitchFamily="34" charset="-122"/>
-                <a:cs typeface="Georgia" pitchFamily="34" charset="-120"/>
-              </a:rPr>
-              <a:t>04</a:t>
-            </a:r>
-            <a:endParaRPr lang="en-US" sz="2600" dirty="0"/>
-          </a:p>
-        </p:txBody>
-      </p:sp>
-      <p:sp>
-        <p:nvSpPr>
-          <p:cNvPr id="19" name="Text 17"/>
-          <p:cNvSpPr/>
-          <p:nvPr/>
-        </p:nvSpPr>
-        <p:spPr>
-          <a:xfrm>
-            <a:off x="9004554" y="2286000"/>
-            <a:ext cx="2361438" cy="777240"/>
-          </a:xfrm>
-          <a:prstGeom prst="rect">
-            <a:avLst/>
-          </a:prstGeom>
-          <a:noFill/>
-          <a:ln/>
-        </p:spPr>
-        <p:txBody>
-          <a:bodyPr wrap="square" lIns="0" tIns="0" rIns="0" bIns="0" rtlCol="0" anchor="t"/>
-          <a:lstStyle/>
-          <a:p>
-            <a:pPr indent="0" marL="0">
-              <a:lnSpc>
-                <a:spcPts val="2300"/>
-              </a:lnSpc>
-              <a:buNone/>
-            </a:pPr>
-            <a:r>
-              <a:rPr lang="en-US" sz="2000" dirty="0">
-                <a:solidFill>
-                  <a:srgbClr val="4A6B5D"/>
-                </a:solidFill>
-                <a:latin typeface="Georgia" pitchFamily="34" charset="0"/>
-                <a:ea typeface="Georgia" pitchFamily="34" charset="-122"/>
-                <a:cs typeface="Georgia" pitchFamily="34" charset="-120"/>
-              </a:rPr>
-              <a:t>Time and duration</a:t>
-            </a:r>
-            <a:endParaRPr lang="en-US" sz="2000" dirty="0"/>
-          </a:p>
-        </p:txBody>
-      </p:sp>
-      <p:sp>
-        <p:nvSpPr>
-          <p:cNvPr id="20" name="Shape 18"/>
-          <p:cNvSpPr/>
-          <p:nvPr/>
-        </p:nvSpPr>
-        <p:spPr>
-          <a:xfrm>
-            <a:off x="9004554" y="3127248"/>
-            <a:ext cx="2361438" cy="0"/>
-          </a:xfrm>
-          <a:prstGeom prst="line">
-            <a:avLst/>
-          </a:prstGeom>
-          <a:noFill/>
+              <a:rPr lang="en-US" sz="950" i="1" dirty="0">
+                <a:solidFill>
+                  <a:srgbClr val="7A7F72"/>
+                </a:solidFill>
+                <a:latin typeface="Arial" pitchFamily="34" charset="0"/>
+                <a:ea typeface="Arial" pitchFamily="34" charset="-122"/>
+                <a:cs typeface="Arial" pitchFamily="34" charset="-120"/>
+              </a:rPr>
+              <a:t>Dunkirk (2017): two places, one dread. Parallel lines cut against each other.</a:t>
+            </a:r>
+            <a:endParaRPr lang="en-US" sz="950" dirty="0"/>
+          </a:p>
+        </p:txBody>
+      </p:sp>
+      <p:sp>
+        <p:nvSpPr>
+          <p:cNvPr id="15" name="Shape 10"/>
+          <p:cNvSpPr/>
+          <p:nvPr/>
+        </p:nvSpPr>
+        <p:spPr>
+          <a:xfrm>
+            <a:off x="822960" y="3566160"/>
+            <a:ext cx="2430018" cy="1645920"/>
+          </a:xfrm>
+          <a:prstGeom prst="rect">
+            <a:avLst/>
+          </a:prstGeom>
+          <a:solidFill>
+            <a:srgbClr val="FAF8F1"/>
+          </a:solidFill>
           <a:ln w="9525">
             <a:solidFill>
               <a:srgbClr val="D9D4C4"/>
@@ -7026,142 +8332,47 @@
           </a:ln>
         </p:spPr>
       </p:sp>
-      <p:sp>
-        <p:nvSpPr>
-          <p:cNvPr id="21" name="Text 19"/>
-          <p:cNvSpPr/>
-          <p:nvPr/>
-        </p:nvSpPr>
-        <p:spPr>
-          <a:xfrm>
-            <a:off x="9004554" y="3273552"/>
-            <a:ext cx="2361438" cy="1463040"/>
-          </a:xfrm>
-          <a:prstGeom prst="rect">
-            <a:avLst/>
-          </a:prstGeom>
-          <a:noFill/>
-          <a:ln/>
-        </p:spPr>
-        <p:txBody>
-          <a:bodyPr wrap="square" lIns="0" tIns="0" rIns="0" bIns="0" rtlCol="0" anchor="t"/>
-          <a:lstStyle/>
-          <a:p>
-            <a:pPr indent="0" marL="0">
-              <a:lnSpc>
-                <a:spcPts val="2200"/>
-              </a:lnSpc>
-              <a:buNone/>
-            </a:pPr>
-            <a:r>
-              <a:rPr lang="en-US" sz="1550" dirty="0">
-                <a:solidFill>
-                  <a:srgbClr val="24313F"/>
-                </a:solidFill>
-                <a:latin typeface="Georgia" pitchFamily="34" charset="0"/>
-                <a:ea typeface="Georgia" pitchFamily="34" charset="-122"/>
-                <a:cs typeface="Georgia" pitchFamily="34" charset="-120"/>
-              </a:rPr>
-              <a:t>ellipsis  ·  expansion of time</a:t>
-            </a:r>
-            <a:endParaRPr lang="en-US" sz="1550" dirty="0"/>
-          </a:p>
-          <a:p>
-            <a:pPr indent="0" marL="0">
-              <a:lnSpc>
-                <a:spcPts val="2200"/>
-              </a:lnSpc>
-              <a:buNone/>
-            </a:pPr>
-            <a:r>
-              <a:rPr lang="en-US" sz="1550" dirty="0">
-                <a:solidFill>
-                  <a:srgbClr val="24313F"/>
-                </a:solidFill>
-                <a:latin typeface="Georgia" pitchFamily="34" charset="0"/>
-                <a:ea typeface="Georgia" pitchFamily="34" charset="-122"/>
-                <a:cs typeface="Georgia" pitchFamily="34" charset="-120"/>
-              </a:rPr>
-              <a:t>long take  ·  short take  ·  slow motion</a:t>
-            </a:r>
-            <a:endParaRPr lang="en-US" sz="1550" dirty="0"/>
-          </a:p>
-        </p:txBody>
-      </p:sp>
-      <p:sp>
-        <p:nvSpPr>
-          <p:cNvPr id="22" name="Shape 20"/>
-          <p:cNvSpPr/>
-          <p:nvPr/>
-        </p:nvSpPr>
-        <p:spPr>
-          <a:xfrm>
-            <a:off x="822960" y="4892040"/>
-            <a:ext cx="10543032" cy="914400"/>
+      <p:pic>
+        <p:nvPicPr>
+          <p:cNvPr id="16" name="Image 3" descr="/Users/dogan/Documents/Vaults/Courses/wiki/classes/media-studies/decks/_build/img/2001-bone.jpg">    </p:cNvPr>
+          <p:cNvPicPr>
+            <a:picLocks noChangeAspect="1"/>
+          </p:cNvPicPr>
+          <p:nvPr/>
+        </p:nvPicPr>
+        <p:blipFill>
+          <a:blip r:embed="rId4"/>
+          <a:stretch>
+            <a:fillRect/>
+          </a:stretch>
+        </p:blipFill>
+        <p:spPr>
+          <a:xfrm>
+            <a:off x="877824" y="3852100"/>
+            <a:ext cx="2320290" cy="1074040"/>
+          </a:xfrm>
+          <a:prstGeom prst="rect">
+            <a:avLst/>
+          </a:prstGeom>
+        </p:spPr>
+      </p:pic>
+      <p:sp>
+        <p:nvSpPr>
+          <p:cNvPr id="17" name="Shape 11"/>
+          <p:cNvSpPr/>
+          <p:nvPr/>
+        </p:nvSpPr>
+        <p:spPr>
+          <a:xfrm>
+            <a:off x="3435858" y="3566160"/>
+            <a:ext cx="2430018" cy="1645920"/>
           </a:xfrm>
           <a:prstGeom prst="rect">
             <a:avLst/>
           </a:prstGeom>
           <a:solidFill>
-            <a:srgbClr val="E8EFE7"/>
+            <a:srgbClr val="FAF8F1"/>
           </a:solidFill>
-          <a:ln/>
-        </p:spPr>
-      </p:sp>
-      <p:sp>
-        <p:nvSpPr>
-          <p:cNvPr id="23" name="Text 21"/>
-          <p:cNvSpPr/>
-          <p:nvPr/>
-        </p:nvSpPr>
-        <p:spPr>
-          <a:xfrm>
-            <a:off x="1097280" y="4983480"/>
-            <a:ext cx="9994392" cy="731520"/>
-          </a:xfrm>
-          <a:prstGeom prst="rect">
-            <a:avLst/>
-          </a:prstGeom>
-          <a:noFill/>
-          <a:ln/>
-        </p:spPr>
-        <p:txBody>
-          <a:bodyPr wrap="square" lIns="0" tIns="0" rIns="0" bIns="0" rtlCol="0" anchor="ctr"/>
-          <a:lstStyle/>
-          <a:p>
-            <a:pPr indent="0" marL="0">
-              <a:buNone/>
-            </a:pPr>
-            <a:r>
-              <a:rPr lang="en-US" sz="1650" dirty="0">
-                <a:solidFill>
-                  <a:srgbClr val="24313F"/>
-                </a:solidFill>
-                <a:latin typeface="Georgia" pitchFamily="34" charset="0"/>
-                <a:ea typeface="Georgia" pitchFamily="34" charset="-122"/>
-                <a:cs typeface="Georgia" pitchFamily="34" charset="-120"/>
-              </a:rPr>
-              <a:t>Flagged out loud: long take, short take and slow motion are filed under editing, not camera. Candidates misfile them every year, and the mark scheme reads the category you put them in.</a:t>
-            </a:r>
-            <a:endParaRPr lang="en-US" sz="1650" dirty="0"/>
-          </a:p>
-        </p:txBody>
-      </p:sp>
-      <p:sp>
-        <p:nvSpPr>
-          <p:cNvPr id="24" name="Shape 22"/>
-          <p:cNvSpPr/>
-          <p:nvPr/>
-        </p:nvSpPr>
-        <p:spPr>
-          <a:xfrm>
-            <a:off x="822960" y="6382512"/>
-            <a:ext cx="10543032" cy="0"/>
-          </a:xfrm>
-          <a:prstGeom prst="line">
-            <a:avLst/>
-          </a:prstGeom>
-          <a:noFill/>
           <a:ln w="9525">
             <a:solidFill>
               <a:srgbClr val="D9D4C4"/>
@@ -7170,16 +8381,40 @@
           </a:ln>
         </p:spPr>
       </p:sp>
-      <p:sp>
-        <p:nvSpPr>
-          <p:cNvPr id="25" name="Text 23"/>
-          <p:cNvSpPr/>
-          <p:nvPr/>
-        </p:nvSpPr>
-        <p:spPr>
-          <a:xfrm>
-            <a:off x="822960" y="6419088"/>
-            <a:ext cx="7315200" cy="274320"/>
+      <p:pic>
+        <p:nvPicPr>
+          <p:cNvPr id="18" name="Image 4" descr="/Users/dogan/Documents/Vaults/Courses/wiki/classes/media-studies/decks/_build/img/2001-satellite.jpg">    </p:cNvPr>
+          <p:cNvPicPr>
+            <a:picLocks noChangeAspect="1"/>
+          </p:cNvPicPr>
+          <p:nvPr/>
+        </p:nvPicPr>
+        <p:blipFill>
+          <a:blip r:embed="rId5"/>
+          <a:stretch>
+            <a:fillRect/>
+          </a:stretch>
+        </p:blipFill>
+        <p:spPr>
+          <a:xfrm>
+            <a:off x="3490722" y="3848701"/>
+            <a:ext cx="2320290" cy="1080838"/>
+          </a:xfrm>
+          <a:prstGeom prst="rect">
+            <a:avLst/>
+          </a:prstGeom>
+        </p:spPr>
+      </p:pic>
+      <p:sp>
+        <p:nvSpPr>
+          <p:cNvPr id="19" name="Text 12"/>
+          <p:cNvSpPr/>
+          <p:nvPr/>
+        </p:nvSpPr>
+        <p:spPr>
+          <a:xfrm>
+            <a:off x="822960" y="5248656"/>
+            <a:ext cx="2651760" cy="310896"/>
           </a:xfrm>
           <a:prstGeom prst="rect">
             <a:avLst/>
@@ -7195,7 +8430,49 @@
               <a:buNone/>
             </a:pPr>
             <a:r>
-              <a:rPr lang="en-US" sz="900" spc="150" kern="0" dirty="0">
+              <a:rPr lang="en-US" sz="1600" dirty="0">
+                <a:solidFill>
+                  <a:srgbClr val="4A6B5D"/>
+                </a:solidFill>
+                <a:latin typeface="Georgia" pitchFamily="34" charset="0"/>
+                <a:ea typeface="Georgia" pitchFamily="34" charset="-122"/>
+                <a:cs typeface="Georgia" pitchFamily="34" charset="-120"/>
+              </a:rPr>
+              <a:t>Graphic match</a:t>
+            </a:r>
+            <a:endParaRPr lang="en-US" sz="1600" dirty="0"/>
+          </a:p>
+        </p:txBody>
+      </p:sp>
+      <p:sp>
+        <p:nvSpPr>
+          <p:cNvPr id="20" name="Text 13"/>
+          <p:cNvSpPr/>
+          <p:nvPr/>
+        </p:nvSpPr>
+        <p:spPr>
+          <a:xfrm>
+            <a:off x="3474720" y="5248656"/>
+            <a:ext cx="2391156" cy="566928"/>
+          </a:xfrm>
+          <a:prstGeom prst="rect">
+            <a:avLst/>
+          </a:prstGeom>
+          <a:noFill/>
+          <a:ln/>
+        </p:spPr>
+        <p:txBody>
+          <a:bodyPr wrap="square" lIns="0" tIns="0" rIns="0" bIns="0" rtlCol="0" anchor="t"/>
+          <a:lstStyle/>
+          <a:p>
+            <a:pPr indent="0" marL="0">
+              <a:lnSpc>
+                <a:spcPts val="1200"/>
+              </a:lnSpc>
+              <a:buNone/>
+            </a:pPr>
+            <a:r>
+              <a:rPr lang="en-US" sz="950" i="1" dirty="0">
                 <a:solidFill>
                   <a:srgbClr val="7A7F72"/>
                 </a:solidFill>
@@ -7203,22 +8480,71 @@
                 <a:ea typeface="Arial" pitchFamily="34" charset="-122"/>
                 <a:cs typeface="Arial" pitchFamily="34" charset="-120"/>
               </a:rPr>
-              <a:t>MEDIA STUDIES 9607 · SEMESTER I</a:t>
-            </a:r>
-            <a:endParaRPr lang="en-US" sz="900" dirty="0"/>
-          </a:p>
-        </p:txBody>
-      </p:sp>
-      <p:sp>
-        <p:nvSpPr>
-          <p:cNvPr id="26" name="Text 24"/>
-          <p:cNvSpPr/>
-          <p:nvPr/>
-        </p:nvSpPr>
-        <p:spPr>
-          <a:xfrm>
-            <a:off x="10268712" y="6355080"/>
-            <a:ext cx="1097280" cy="365760"/>
+              <a:t>2001 (1968): a bone becomes a station. Shape carries the cut across four million years.</a:t>
+            </a:r>
+            <a:endParaRPr lang="en-US" sz="950" dirty="0"/>
+          </a:p>
+        </p:txBody>
+      </p:sp>
+      <p:sp>
+        <p:nvSpPr>
+          <p:cNvPr id="21" name="Shape 14"/>
+          <p:cNvSpPr/>
+          <p:nvPr/>
+        </p:nvSpPr>
+        <p:spPr>
+          <a:xfrm>
+            <a:off x="6323076" y="3566160"/>
+            <a:ext cx="5042916" cy="1645920"/>
+          </a:xfrm>
+          <a:prstGeom prst="rect">
+            <a:avLst/>
+          </a:prstGeom>
+          <a:solidFill>
+            <a:srgbClr val="FAF8F1"/>
+          </a:solidFill>
+          <a:ln w="9525">
+            <a:solidFill>
+              <a:srgbClr val="D9D4C4"/>
+            </a:solidFill>
+            <a:prstDash val="solid"/>
+          </a:ln>
+        </p:spPr>
+      </p:sp>
+      <p:pic>
+        <p:nvPicPr>
+          <p:cNvPr id="22" name="Image 5" descr="/Users/dogan/Documents/Vaults/Courses/wiki/classes/media-studies/decks/_build/img/1917-longtake.jpg">    </p:cNvPr>
+          <p:cNvPicPr>
+            <a:picLocks noChangeAspect="1"/>
+          </p:cNvPicPr>
+          <p:nvPr/>
+        </p:nvPicPr>
+        <p:blipFill>
+          <a:blip r:embed="rId6"/>
+          <a:stretch>
+            <a:fillRect/>
+          </a:stretch>
+        </p:blipFill>
+        <p:spPr>
+          <a:xfrm>
+            <a:off x="6999951" y="3621024"/>
+            <a:ext cx="3689167" cy="1536192"/>
+          </a:xfrm>
+          <a:prstGeom prst="rect">
+            <a:avLst/>
+          </a:prstGeom>
+        </p:spPr>
+      </p:pic>
+      <p:sp>
+        <p:nvSpPr>
+          <p:cNvPr id="23" name="Text 15"/>
+          <p:cNvSpPr/>
+          <p:nvPr/>
+        </p:nvSpPr>
+        <p:spPr>
+          <a:xfrm>
+            <a:off x="6323076" y="5248656"/>
+            <a:ext cx="2651760" cy="310896"/>
           </a:xfrm>
           <a:prstGeom prst="rect">
             <a:avLst/>
@@ -7230,19 +8556,204 @@
           <a:bodyPr wrap="square" lIns="0" tIns="0" rIns="0" bIns="0" rtlCol="0" anchor="ctr"/>
           <a:lstStyle/>
           <a:p>
-            <a:pPr algn="r" indent="0" marL="0">
+            <a:pPr indent="0" marL="0">
               <a:buNone/>
             </a:pPr>
             <a:r>
               <a:rPr lang="en-US" sz="1600" dirty="0">
                 <a:solidFill>
-                  <a:srgbClr val="A3C1AD"/>
+                  <a:srgbClr val="4A6B5D"/>
                 </a:solidFill>
                 <a:latin typeface="Georgia" pitchFamily="34" charset="0"/>
                 <a:ea typeface="Georgia" pitchFamily="34" charset="-122"/>
                 <a:cs typeface="Georgia" pitchFamily="34" charset="-120"/>
               </a:rPr>
-              <a:t>03</a:t>
+              <a:t>The long take</a:t>
+            </a:r>
+            <a:endParaRPr lang="en-US" sz="1600" dirty="0"/>
+          </a:p>
+        </p:txBody>
+      </p:sp>
+      <p:sp>
+        <p:nvSpPr>
+          <p:cNvPr id="24" name="Text 16"/>
+          <p:cNvSpPr/>
+          <p:nvPr/>
+        </p:nvSpPr>
+        <p:spPr>
+          <a:xfrm>
+            <a:off x="8974836" y="5248656"/>
+            <a:ext cx="2391156" cy="566928"/>
+          </a:xfrm>
+          <a:prstGeom prst="rect">
+            <a:avLst/>
+          </a:prstGeom>
+          <a:noFill/>
+          <a:ln/>
+        </p:spPr>
+        <p:txBody>
+          <a:bodyPr wrap="square" lIns="0" tIns="0" rIns="0" bIns="0" rtlCol="0" anchor="t"/>
+          <a:lstStyle/>
+          <a:p>
+            <a:pPr indent="0" marL="0">
+              <a:lnSpc>
+                <a:spcPts val="1200"/>
+              </a:lnSpc>
+              <a:buNone/>
+            </a:pPr>
+            <a:r>
+              <a:rPr lang="en-US" sz="950" i="1" dirty="0">
+                <a:solidFill>
+                  <a:srgbClr val="7A7F72"/>
+                </a:solidFill>
+                <a:latin typeface="Arial" pitchFamily="34" charset="0"/>
+                <a:ea typeface="Arial" pitchFamily="34" charset="-122"/>
+                <a:cs typeface="Arial" pitchFamily="34" charset="-120"/>
+              </a:rPr>
+              <a:t>1917 (2019): the cut refused for two hours. Duration as tension.</a:t>
+            </a:r>
+            <a:endParaRPr lang="en-US" sz="950" dirty="0"/>
+          </a:p>
+        </p:txBody>
+      </p:sp>
+      <p:sp>
+        <p:nvSpPr>
+          <p:cNvPr id="25" name="Text 17"/>
+          <p:cNvSpPr/>
+          <p:nvPr/>
+        </p:nvSpPr>
+        <p:spPr>
+          <a:xfrm>
+            <a:off x="822960" y="6108192"/>
+            <a:ext cx="10543032" cy="502920"/>
+          </a:xfrm>
+          <a:prstGeom prst="rect">
+            <a:avLst/>
+          </a:prstGeom>
+          <a:noFill/>
+          <a:ln/>
+        </p:spPr>
+        <p:txBody>
+          <a:bodyPr wrap="square" lIns="0" tIns="0" rIns="0" bIns="0" rtlCol="0" anchor="t"/>
+          <a:lstStyle/>
+          <a:p>
+            <a:pPr indent="0" marL="0">
+              <a:lnSpc>
+                <a:spcPts val="1400"/>
+              </a:lnSpc>
+              <a:buNone/>
+            </a:pPr>
+            <a:r>
+              <a:rPr lang="en-US" sz="1050" i="1" dirty="0">
+                <a:solidFill>
+                  <a:srgbClr val="7A7F72"/>
+                </a:solidFill>
+                <a:latin typeface="Arial" pitchFamily="34" charset="0"/>
+                <a:ea typeface="Arial" pitchFamily="34" charset="-122"/>
+                <a:cs typeface="Arial" pitchFamily="34" charset="-120"/>
+              </a:rPr>
+              <a:t>Also in the family: ellipsis, expansion of time, slow motion, dissolves, fades, wipes, superimposition. Long take, short take and slow motion are filed under editing, not camera; candidates misfile them every year.</a:t>
+            </a:r>
+            <a:endParaRPr lang="en-US" sz="1050" dirty="0"/>
+          </a:p>
+        </p:txBody>
+      </p:sp>
+      <p:sp>
+        <p:nvSpPr>
+          <p:cNvPr id="26" name="Shape 18"/>
+          <p:cNvSpPr/>
+          <p:nvPr/>
+        </p:nvSpPr>
+        <p:spPr>
+          <a:xfrm>
+            <a:off x="822960" y="6382512"/>
+            <a:ext cx="10543032" cy="0"/>
+          </a:xfrm>
+          <a:prstGeom prst="line">
+            <a:avLst/>
+          </a:prstGeom>
+          <a:noFill/>
+          <a:ln w="9525">
+            <a:solidFill>
+              <a:srgbClr val="D9D4C4"/>
+            </a:solidFill>
+            <a:prstDash val="solid"/>
+          </a:ln>
+        </p:spPr>
+      </p:sp>
+      <p:sp>
+        <p:nvSpPr>
+          <p:cNvPr id="27" name="Text 19"/>
+          <p:cNvSpPr/>
+          <p:nvPr/>
+        </p:nvSpPr>
+        <p:spPr>
+          <a:xfrm>
+            <a:off x="822960" y="6419088"/>
+            <a:ext cx="7315200" cy="274320"/>
+          </a:xfrm>
+          <a:prstGeom prst="rect">
+            <a:avLst/>
+          </a:prstGeom>
+          <a:noFill/>
+          <a:ln/>
+        </p:spPr>
+        <p:txBody>
+          <a:bodyPr wrap="square" lIns="0" tIns="0" rIns="0" bIns="0" rtlCol="0" anchor="ctr"/>
+          <a:lstStyle/>
+          <a:p>
+            <a:pPr indent="0" marL="0">
+              <a:buNone/>
+            </a:pPr>
+            <a:r>
+              <a:rPr lang="en-US" sz="900" spc="150" kern="0" dirty="0">
+                <a:solidFill>
+                  <a:srgbClr val="7A7F72"/>
+                </a:solidFill>
+                <a:latin typeface="Arial" pitchFamily="34" charset="0"/>
+                <a:ea typeface="Arial" pitchFamily="34" charset="-122"/>
+                <a:cs typeface="Arial" pitchFamily="34" charset="-120"/>
+              </a:rPr>
+              <a:t>MEDIA STUDIES 9607 · SEMESTER I</a:t>
+            </a:r>
+            <a:endParaRPr lang="en-US" sz="900" dirty="0"/>
+          </a:p>
+        </p:txBody>
+      </p:sp>
+      <p:sp>
+        <p:nvSpPr>
+          <p:cNvPr id="28" name="Text 20"/>
+          <p:cNvSpPr/>
+          <p:nvPr/>
+        </p:nvSpPr>
+        <p:spPr>
+          <a:xfrm>
+            <a:off x="10268712" y="6355080"/>
+            <a:ext cx="1097280" cy="365760"/>
+          </a:xfrm>
+          <a:prstGeom prst="rect">
+            <a:avLst/>
+          </a:prstGeom>
+          <a:noFill/>
+          <a:ln/>
+        </p:spPr>
+        <p:txBody>
+          <a:bodyPr wrap="square" lIns="0" tIns="0" rIns="0" bIns="0" rtlCol="0" anchor="ctr"/>
+          <a:lstStyle/>
+          <a:p>
+            <a:pPr algn="r" indent="0" marL="0">
+              <a:buNone/>
+            </a:pPr>
+            <a:r>
+              <a:rPr lang="en-US" sz="1600" dirty="0">
+                <a:solidFill>
+                  <a:srgbClr val="A3C1AD"/>
+                </a:solidFill>
+                <a:latin typeface="Georgia" pitchFamily="34" charset="0"/>
+                <a:ea typeface="Georgia" pitchFamily="34" charset="-122"/>
+                <a:cs typeface="Georgia" pitchFamily="34" charset="-120"/>
+              </a:rPr>
+              <a:t>04</a:t>
             </a:r>
             <a:endParaRPr lang="en-US" sz="1600" dirty="0"/>
           </a:p>
@@ -7678,7 +9189,7 @@
                 <a:ea typeface="Georgia" pitchFamily="34" charset="-122"/>
                 <a:cs typeface="Georgia" pitchFamily="34" charset="-120"/>
               </a:rPr>
-              <a:t>04</a:t>
+              <a:t>05</a:t>
             </a:r>
             <a:endParaRPr lang="en-US" sz="1600" dirty="0"/>
           </a:p>

--- a/content/decks/media-studies/media-studies-s1-lesson-06-editing.pptx
+++ b/content/decks/media-studies/media-studies-s1-lesson-06-editing.pptx
@@ -2345,7 +2345,7 @@
                 <a:ea typeface="Georgia" pitchFamily="34" charset="-122"/>
                 <a:cs typeface="Georgia" pitchFamily="34" charset="-120"/>
               </a:rPr>
-              <a:t>Continuity held. An establishing shot, a shot / reverse shot exchange, one eyeline match. It has to hold together; it does not have to be good.</a:t>
+              <a:t>Continuity held. An establishing shot, a shot / reverse shot exchange, one eyeline match. It must hold together. It does not have to be beautiful.</a:t>
             </a:r>
             <a:endParaRPr lang="en-US" sz="1550" dirty="0"/>
           </a:p>
@@ -2552,19 +2552,39 @@
         <p:spPr>
           <a:xfrm>
             <a:off x="822960" y="6053328"/>
-            <a:ext cx="10543032" cy="320040"/>
-          </a:xfrm>
-          <a:prstGeom prst="rect">
-            <a:avLst/>
-          </a:prstGeom>
-          <a:noFill/>
-          <a:ln/>
-        </p:spPr>
-        <p:txBody>
-          <a:bodyPr wrap="square" lIns="0" tIns="0" rIns="0" bIns="0" rtlCol="0" anchor="ctr"/>
+            <a:ext cx="10543032" cy="292608"/>
+          </a:xfrm>
+          <a:prstGeom prst="rect">
+            <a:avLst/>
+          </a:prstGeom>
+          <a:noFill/>
+          <a:ln/>
+        </p:spPr>
+        <p:txBody>
+          <a:bodyPr wrap="square" lIns="0" tIns="0" rIns="0" bIns="0" rtlCol="0" anchor="t"/>
           <a:lstStyle/>
           <a:p>
             <a:pPr indent="0" marL="0">
+              <a:lnSpc>
+                <a:spcPts val="1600"/>
+              </a:lnSpc>
+              <a:buNone/>
+            </a:pPr>
+            <a:r>
+              <a:rPr lang="en-US" sz="1050" b="1" spc="100" kern="0" dirty="0">
+                <a:solidFill>
+                  <a:srgbClr val="4A6B5D"/>
+                </a:solidFill>
+                <a:latin typeface="Arial" pitchFamily="34" charset="0"/>
+                <a:ea typeface="Arial" pitchFamily="34" charset="-122"/>
+                <a:cs typeface="Arial" pitchFamily="34" charset="-120"/>
+              </a:rPr>
+              <a:t>THE BLOG   </a:t>
+            </a:r>
+            <a:pPr indent="0" marL="0">
+              <a:lnSpc>
+                <a:spcPts val="1600"/>
+              </a:lnSpc>
               <a:buNone/>
             </a:pPr>
             <a:r>
@@ -2576,9 +2596,9 @@
                 <a:ea typeface="Georgia" pitchFamily="34" charset="-122"/>
                 <a:cs typeface="Georgia" pitchFamily="34" charset="-120"/>
               </a:rPr>
-              <a:t>Both versions posted and dated on the blog, with two or three sentences naming what breaks in version two.</a:t>
-            </a:r>
-            <a:endParaRPr lang="en-US" sz="1250" dirty="0"/>
+              <a:t>Post both versions, dated, with two or three sentences naming what breaks in version two.</a:t>
+            </a:r>
+            <a:endParaRPr lang="en-US" sz="1050" dirty="0"/>
           </a:p>
         </p:txBody>
       </p:sp>
@@ -3434,8 +3454,8 @@
         </p:nvSpPr>
         <p:spPr>
           <a:xfrm>
-            <a:off x="822960" y="5779008"/>
-            <a:ext cx="10515600" cy="548640"/>
+            <a:off x="822960" y="5760720"/>
+            <a:ext cx="10515600" cy="438912"/>
           </a:xfrm>
           <a:prstGeom prst="rect">
             <a:avLst/>
@@ -3454,17 +3474,71 @@
               <a:buNone/>
             </a:pPr>
             <a:r>
-              <a:rPr lang="en-US" sz="1200" i="1" dirty="0">
-                <a:solidFill>
-                  <a:srgbClr val="7A7F72"/>
+              <a:rPr lang="en-US" sz="1000" b="1" spc="100" kern="0" dirty="0">
+                <a:solidFill>
+                  <a:srgbClr val="4A6B5D"/>
                 </a:solidFill>
                 <a:latin typeface="Arial" pitchFamily="34" charset="0"/>
                 <a:ea typeface="Arial" pitchFamily="34" charset="-122"/>
                 <a:cs typeface="Arial" pitchFamily="34" charset="-120"/>
               </a:rPr>
-              <a:t>Four dated posts. Under Cambridge's own Foundation Portfolio structure that is the research-and-practice stage of Component 1, already banked. Carries forward: the C3 major video task in Grade 12 is an editing task, and the whole grade sits in the cut.</a:t>
-            </a:r>
-            <a:endParaRPr lang="en-US" sz="1200" dirty="0"/>
+              <a:t>KEY POINT   </a:t>
+            </a:r>
+            <a:pPr indent="0" marL="0">
+              <a:lnSpc>
+                <a:spcPts val="1600"/>
+              </a:lnSpc>
+              <a:buNone/>
+            </a:pPr>
+            <a:r>
+              <a:rPr lang="en-US" sz="1200" dirty="0">
+                <a:solidFill>
+                  <a:srgbClr val="7A7F72"/>
+                </a:solidFill>
+                <a:latin typeface="Georgia" pitchFamily="34" charset="0"/>
+                <a:ea typeface="Georgia" pitchFamily="34" charset="-122"/>
+                <a:cs typeface="Georgia" pitchFamily="34" charset="-120"/>
+              </a:rPr>
+              <a:t>Four dated posts: the research-and-practice stage of Component 1, already complete.</a:t>
+            </a:r>
+            <a:endParaRPr lang="en-US" sz="1000" dirty="0"/>
+          </a:p>
+          <a:p>
+            <a:pPr indent="0" marL="0">
+              <a:lnSpc>
+                <a:spcPts val="1600"/>
+              </a:lnSpc>
+              <a:buNone/>
+            </a:pPr>
+            <a:r>
+              <a:rPr lang="en-US" sz="1000" b="1" spc="100" kern="0" dirty="0">
+                <a:solidFill>
+                  <a:srgbClr val="4A6B5D"/>
+                </a:solidFill>
+                <a:latin typeface="Arial" pitchFamily="34" charset="0"/>
+                <a:ea typeface="Arial" pitchFamily="34" charset="-122"/>
+                <a:cs typeface="Arial" pitchFamily="34" charset="-120"/>
+              </a:rPr>
+              <a:t>LOOKING AHEAD   </a:t>
+            </a:r>
+            <a:pPr indent="0" marL="0">
+              <a:lnSpc>
+                <a:spcPts val="1600"/>
+              </a:lnSpc>
+              <a:buNone/>
+            </a:pPr>
+            <a:r>
+              <a:rPr lang="en-US" sz="1200" dirty="0">
+                <a:solidFill>
+                  <a:srgbClr val="7A7F72"/>
+                </a:solidFill>
+                <a:latin typeface="Georgia" pitchFamily="34" charset="0"/>
+                <a:ea typeface="Georgia" pitchFamily="34" charset="-122"/>
+                <a:cs typeface="Georgia" pitchFamily="34" charset="-120"/>
+              </a:rPr>
+              <a:t>The Grade 12 Component 3 video task is an editing task. The grade lives in the cut.</a:t>
+            </a:r>
+            <a:endParaRPr lang="en-US" sz="1000" dirty="0"/>
           </a:p>
         </p:txBody>
       </p:sp>
@@ -4727,7 +4801,7 @@
                 <a:ea typeface="Georgia" pitchFamily="34" charset="-122"/>
                 <a:cs typeface="Georgia" pitchFamily="34" charset="-120"/>
               </a:rPr>
-              <a:t>The count is objective. Write it down first.</a:t>
+              <a:t>The number is a fact. Write it down first.</a:t>
             </a:r>
             <a:endParaRPr lang="en-US" sz="1350" dirty="0"/>
           </a:p>
@@ -4873,7 +4947,7 @@
                 <a:ea typeface="Georgia" pitchFamily="34" charset="-122"/>
                 <a:cs typeface="Georgia" pitchFamily="34" charset="-120"/>
               </a:rPr>
-              <a:t>Restless, held, hurried, allowed to look.</a:t>
+              <a:t>Restless? Hurried? Calm? Given time to look?</a:t>
             </a:r>
             <a:endParaRPr lang="en-US" sz="1350" dirty="0"/>
           </a:p>
@@ -5019,7 +5093,7 @@
                 <a:ea typeface="Georgia" pitchFamily="34" charset="-122"/>
                 <a:cs typeface="Georgia" pitchFamily="34" charset="-120"/>
               </a:rPr>
-              <a:t>Not the scene's subject: the cutting rate's work on your attention.</a:t>
+              <a:t>Not what the scene shows: what the cutting speed does to your attention.</a:t>
             </a:r>
             <a:endParaRPr lang="en-US" sz="1350" dirty="0"/>
           </a:p>
@@ -5301,6 +5375,65 @@
           </a:p>
         </p:txBody>
       </p:sp>
+      <p:sp>
+        <p:nvSpPr>
+          <p:cNvPr id="6" name="Text 4"/>
+          <p:cNvSpPr/>
+          <p:nvPr/>
+        </p:nvSpPr>
+        <p:spPr>
+          <a:xfrm>
+            <a:off x="822960" y="5806440"/>
+            <a:ext cx="10424160" cy="640080"/>
+          </a:xfrm>
+          <a:prstGeom prst="rect">
+            <a:avLst/>
+          </a:prstGeom>
+          <a:noFill/>
+          <a:ln/>
+        </p:spPr>
+        <p:txBody>
+          <a:bodyPr wrap="square" lIns="0" tIns="0" rIns="0" bIns="0" rtlCol="0" anchor="t"/>
+          <a:lstStyle/>
+          <a:p>
+            <a:pPr indent="0" marL="0">
+              <a:lnSpc>
+                <a:spcPts val="1900"/>
+              </a:lnSpc>
+              <a:buNone/>
+            </a:pPr>
+            <a:r>
+              <a:rPr lang="en-US" sz="1200" b="1" spc="100" kern="0" dirty="0">
+                <a:solidFill>
+                  <a:srgbClr val="7A7F72"/>
+                </a:solidFill>
+                <a:latin typeface="Arial" pitchFamily="34" charset="0"/>
+                <a:ea typeface="Arial" pitchFamily="34" charset="-122"/>
+                <a:cs typeface="Arial" pitchFamily="34" charset="-120"/>
+              </a:rPr>
+              <a:t>IN PLAIN WORDS   </a:t>
+            </a:r>
+            <a:pPr indent="0" marL="0">
+              <a:lnSpc>
+                <a:spcPts val="1900"/>
+              </a:lnSpc>
+              <a:buNone/>
+            </a:pPr>
+            <a:r>
+              <a:rPr lang="en-US" sz="1400" i="1" dirty="0">
+                <a:solidFill>
+                  <a:srgbClr val="4A6B5D"/>
+                </a:solidFill>
+                <a:latin typeface="Georgia" pitchFamily="34" charset="0"/>
+                <a:ea typeface="Georgia" pitchFamily="34" charset="-122"/>
+                <a:cs typeface="Georgia" pitchFamily="34" charset="-120"/>
+              </a:rPr>
+              <a:t>Start small: edit two or three shots. A look, then the thing seen. A conversation, cut shot by shot.</a:t>
+            </a:r>
+            <a:endParaRPr lang="en-US" sz="1200" dirty="0"/>
+          </a:p>
+        </p:txBody>
+      </p:sp>
     </p:spTree>
   </p:cSld>
   <p:clrMapOvr>
@@ -5405,7 +5538,7 @@
                 <a:ea typeface="Arial" pitchFamily="34" charset="-122"/>
                 <a:cs typeface="Arial" pitchFamily="34" charset="-120"/>
               </a:rPr>
-              <a:t>AN INVISIBLE GRAMMAR, EACH ITEM ON A FRAME</a:t>
+              <a:t>THE GRAMMAR OF INVISIBLE CUTTING</a:t>
             </a:r>
             <a:endParaRPr lang="en-US" sz="1100" dirty="0"/>
           </a:p>
@@ -5818,7 +5951,7 @@
                 <a:ea typeface="Arial" pitchFamily="34" charset="-122"/>
                 <a:cs typeface="Arial" pitchFamily="34" charset="-120"/>
               </a:rPr>
-              <a:t>a detail that buys time and hides a join</a:t>
+              <a:t>a close detail that hides the join</a:t>
             </a:r>
             <a:endParaRPr lang="en-US" sz="1050" dirty="0"/>
           </a:p>
@@ -6169,7 +6302,7 @@
                 <a:ea typeface="Arial" pitchFamily="34" charset="-122"/>
                 <a:cs typeface="Arial" pitchFamily="34" charset="-120"/>
               </a:rPr>
-              <a:t>stay one side of the line and direction holds</a:t>
+              <a:t>stay on one side and directions stay clear</a:t>
             </a:r>
             <a:endParaRPr lang="en-US" sz="1050" dirty="0"/>
           </a:p>
@@ -6299,7 +6432,7 @@
                 <a:ea typeface="Arial" pitchFamily="34" charset="-122"/>
                 <a:cs typeface="Arial" pitchFamily="34" charset="-120"/>
               </a:rPr>
-              <a:t>cut mid-movement and the motion carries you</a:t>
+              <a:t>cut during a movement and you never feel the join</a:t>
             </a:r>
             <a:endParaRPr lang="en-US" sz="1050" dirty="0"/>
           </a:p>
@@ -6618,7 +6751,7 @@
                 <a:ea typeface="Arial" pitchFamily="34" charset="-122"/>
                 <a:cs typeface="Arial" pitchFamily="34" charset="-120"/>
               </a:rPr>
-              <a:t>an exterior, then a room; order does the proving</a:t>
+              <a:t>outside first, then inside: the order tells you where you are</a:t>
             </a:r>
             <a:endParaRPr lang="en-US" sz="1050" dirty="0"/>
           </a:p>
@@ -6971,26 +7104,34 @@
               <a:buNone/>
             </a:pPr>
             <a:r>
-              <a:rPr lang="en-US" sz="1550" dirty="0">
-                <a:solidFill>
-                  <a:srgbClr val="24313F"/>
-                </a:solidFill>
-                <a:latin typeface="Georgia" pitchFamily="34" charset="0"/>
-                <a:ea typeface="Georgia" pitchFamily="34" charset="-122"/>
-                <a:cs typeface="Georgia" pitchFamily="34" charset="-120"/>
-              </a:rPr>
-              <a:t>Camera A and camera B keep both faces on the sides the audience has learned. Camera C, across the line, swaps them mid-conversation for no story reason.</a:t>
-            </a:r>
-            <a:endParaRPr lang="en-US" sz="1550" dirty="0"/>
-          </a:p>
-          <a:p>
+              <a:rPr lang="en-US" sz="1300" b="1" spc="100" kern="0" dirty="0">
+                <a:solidFill>
+                  <a:srgbClr val="4A6B5D"/>
+                </a:solidFill>
+                <a:latin typeface="Arial" pitchFamily="34" charset="0"/>
+                <a:ea typeface="Arial" pitchFamily="34" charset="-122"/>
+                <a:cs typeface="Arial" pitchFamily="34" charset="-120"/>
+              </a:rPr>
+              <a:t>THE RULE   </a:t>
+            </a:r>
             <a:pPr indent="0" marL="0">
               <a:lnSpc>
                 <a:spcPts val="2200"/>
               </a:lnSpc>
               <a:buNone/>
             </a:pPr>
-            <a:endParaRPr lang="en-US" sz="1550" dirty="0"/>
+            <a:r>
+              <a:rPr lang="en-US" sz="1500" dirty="0">
+                <a:solidFill>
+                  <a:srgbClr val="24313F"/>
+                </a:solidFill>
+                <a:latin typeface="Georgia" pitchFamily="34" charset="0"/>
+                <a:ea typeface="Georgia" pitchFamily="34" charset="-122"/>
+                <a:cs typeface="Georgia" pitchFamily="34" charset="-120"/>
+              </a:rPr>
+              <a:t>Keep the camera on one side of the line between two speakers.</a:t>
+            </a:r>
+            <a:endParaRPr lang="en-US" sz="1300" dirty="0"/>
           </a:p>
           <a:p>
             <a:pPr indent="0" marL="0">
@@ -7000,7 +7141,7 @@
               <a:buNone/>
             </a:pPr>
             <a:r>
-              <a:rPr lang="en-US" sz="1550" dirty="0">
+              <a:rPr lang="en-US" sz="1500" dirty="0">
                 <a:solidFill>
                   <a:srgbClr val="24313F"/>
                 </a:solidFill>
@@ -7008,9 +7149,46 @@
                 <a:ea typeface="Georgia" pitchFamily="34" charset="-122"/>
                 <a:cs typeface="Georgia" pitchFamily="34" charset="-120"/>
               </a:rPr>
-              <a:t>Demonstrated live from a prepared clip, then produced by every pair on Monday: version two of CS6 is this exact error, made on purpose.</a:t>
-            </a:r>
-            <a:endParaRPr lang="en-US" sz="1550" dirty="0"/>
+              <a:t>Cameras A and B keep each face on its own side of the screen. Camera C crosses the line, and the faces swap sides mid-conversation.</a:t>
+            </a:r>
+            <a:endParaRPr lang="en-US" sz="1300" dirty="0"/>
+          </a:p>
+          <a:p>
+            <a:pPr indent="0" marL="0">
+              <a:lnSpc>
+                <a:spcPts val="2200"/>
+              </a:lnSpc>
+              <a:buNone/>
+            </a:pPr>
+            <a:r>
+              <a:rPr lang="en-US" sz="1300" b="1" spc="100" kern="0" dirty="0">
+                <a:solidFill>
+                  <a:srgbClr val="4A6B5D"/>
+                </a:solidFill>
+                <a:latin typeface="Arial" pitchFamily="34" charset="0"/>
+                <a:ea typeface="Arial" pitchFamily="34" charset="-122"/>
+                <a:cs typeface="Arial" pitchFamily="34" charset="-120"/>
+              </a:rPr>
+              <a:t>MONDAY   </a:t>
+            </a:r>
+            <a:pPr indent="0" marL="0">
+              <a:lnSpc>
+                <a:spcPts val="2200"/>
+              </a:lnSpc>
+              <a:buNone/>
+            </a:pPr>
+            <a:r>
+              <a:rPr lang="en-US" sz="1500" dirty="0">
+                <a:solidFill>
+                  <a:srgbClr val="24313F"/>
+                </a:solidFill>
+                <a:latin typeface="Georgia" pitchFamily="34" charset="0"/>
+                <a:ea typeface="Georgia" pitchFamily="34" charset="-122"/>
+                <a:cs typeface="Georgia" pitchFamily="34" charset="-120"/>
+              </a:rPr>
+              <a:t>Every pair will make this error on purpose: it is version two of CS6.</a:t>
+            </a:r>
+            <a:endParaRPr lang="en-US" sz="1300" dirty="0"/>
           </a:p>
         </p:txBody>
       </p:sp>
@@ -7820,7 +7998,7 @@
                 <a:ea typeface="Georgia" pitchFamily="34" charset="-122"/>
                 <a:cs typeface="Georgia" pitchFamily="34" charset="-120"/>
               </a:rPr>
-              <a:t>Two grips carry the camera rig mid-take. One episode, one shot: every minute without a cut was walked, carried and rehearsed.</a:t>
+              <a:t>Two crew members carry the camera mid-take. One episode, one shot: every minute without a cut was rehearsed and carried by hand.</a:t>
             </a:r>
             <a:endParaRPr lang="en-US" sz="1800" dirty="0"/>
           </a:p>
@@ -8122,7 +8300,7 @@
                 <a:ea typeface="Arial" pitchFamily="34" charset="-122"/>
                 <a:cs typeface="Arial" pitchFamily="34" charset="-120"/>
               </a:rPr>
-              <a:t>Breathless (1960): the shot repeats with time missing. Breaking continuity as a signature.</a:t>
+              <a:t>Breathless (1960): time jumps forward inside one shot. The jump cut breaks continuity on purpose.</a:t>
             </a:r>
             <a:endParaRPr lang="en-US" sz="950" dirty="0"/>
           </a:p>
@@ -8301,7 +8479,7 @@
                 <a:ea typeface="Arial" pitchFamily="34" charset="-122"/>
                 <a:cs typeface="Arial" pitchFamily="34" charset="-120"/>
               </a:rPr>
-              <a:t>Dunkirk (2017): two places, one dread. Parallel lines cut against each other.</a:t>
+              <a:t>Dunkirk (2017): two places, cut against each other. Crosscutting builds one shared tension.</a:t>
             </a:r>
             <a:endParaRPr lang="en-US" sz="950" dirty="0"/>
           </a:p>
@@ -8480,7 +8658,7 @@
                 <a:ea typeface="Arial" pitchFamily="34" charset="-122"/>
                 <a:cs typeface="Arial" pitchFamily="34" charset="-120"/>
               </a:rPr>
-              <a:t>2001 (1968): a bone becomes a station. Shape carries the cut across four million years.</a:t>
+              <a:t>2001 (1968): a bone becomes a spaceship. The matching shape carries the cut across millions of years.</a:t>
             </a:r>
             <a:endParaRPr lang="en-US" sz="950" dirty="0"/>
           </a:p>
@@ -8610,7 +8788,7 @@
                 <a:ea typeface="Arial" pitchFamily="34" charset="-122"/>
                 <a:cs typeface="Arial" pitchFamily="34" charset="-120"/>
               </a:rPr>
-              <a:t>1917 (2019): the cut refused for two hours. Duration as tension.</a:t>
+              <a:t>1917 (2019): two hours with no visible cut. The long take builds tension.</a:t>
             </a:r>
             <a:endParaRPr lang="en-US" sz="950" dirty="0"/>
           </a:p>
@@ -8624,8 +8802,8 @@
         </p:nvSpPr>
         <p:spPr>
           <a:xfrm>
-            <a:off x="822960" y="6108192"/>
-            <a:ext cx="10543032" cy="502920"/>
+            <a:off x="822960" y="6089904"/>
+            <a:ext cx="10543032" cy="384048"/>
           </a:xfrm>
           <a:prstGeom prst="rect">
             <a:avLst/>
@@ -8639,22 +8817,76 @@
           <a:p>
             <a:pPr indent="0" marL="0">
               <a:lnSpc>
-                <a:spcPts val="1400"/>
+                <a:spcPts val="1350"/>
               </a:lnSpc>
               <a:buNone/>
             </a:pPr>
             <a:r>
-              <a:rPr lang="en-US" sz="1050" i="1" dirty="0">
-                <a:solidFill>
-                  <a:srgbClr val="7A7F72"/>
+              <a:rPr lang="en-US" sz="900" b="1" spc="100" kern="0" dirty="0">
+                <a:solidFill>
+                  <a:srgbClr val="4A6B5D"/>
                 </a:solidFill>
                 <a:latin typeface="Arial" pitchFamily="34" charset="0"/>
                 <a:ea typeface="Arial" pitchFamily="34" charset="-122"/>
                 <a:cs typeface="Arial" pitchFamily="34" charset="-120"/>
               </a:rPr>
-              <a:t>Also in the family: ellipsis, expansion of time, slow motion, dissolves, fades, wipes, superimposition. Long take, short take and slow motion are filed under editing, not camera; candidates misfile them every year.</a:t>
-            </a:r>
-            <a:endParaRPr lang="en-US" sz="1050" dirty="0"/>
+              <a:t>ALSO ON THE LIST   </a:t>
+            </a:r>
+            <a:pPr indent="0" marL="0">
+              <a:lnSpc>
+                <a:spcPts val="1350"/>
+              </a:lnSpc>
+              <a:buNone/>
+            </a:pPr>
+            <a:r>
+              <a:rPr lang="en-US" sz="1050" dirty="0">
+                <a:solidFill>
+                  <a:srgbClr val="7A7F72"/>
+                </a:solidFill>
+                <a:latin typeface="Georgia" pitchFamily="34" charset="0"/>
+                <a:ea typeface="Georgia" pitchFamily="34" charset="-122"/>
+                <a:cs typeface="Georgia" pitchFamily="34" charset="-120"/>
+              </a:rPr>
+              <a:t>ellipsis, expansion of time, slow motion, dissolves, fades, wipes, superimposition.</a:t>
+            </a:r>
+            <a:endParaRPr lang="en-US" sz="900" dirty="0"/>
+          </a:p>
+          <a:p>
+            <a:pPr indent="0" marL="0">
+              <a:lnSpc>
+                <a:spcPts val="1350"/>
+              </a:lnSpc>
+              <a:buNone/>
+            </a:pPr>
+            <a:r>
+              <a:rPr lang="en-US" sz="900" b="1" spc="100" kern="0" dirty="0">
+                <a:solidFill>
+                  <a:srgbClr val="4A6B5D"/>
+                </a:solidFill>
+                <a:latin typeface="Arial" pitchFamily="34" charset="0"/>
+                <a:ea typeface="Arial" pitchFamily="34" charset="-122"/>
+                <a:cs typeface="Arial" pitchFamily="34" charset="-120"/>
+              </a:rPr>
+              <a:t>EXAM WARNING   </a:t>
+            </a:r>
+            <a:pPr indent="0" marL="0">
+              <a:lnSpc>
+                <a:spcPts val="1350"/>
+              </a:lnSpc>
+              <a:buNone/>
+            </a:pPr>
+            <a:r>
+              <a:rPr lang="en-US" sz="1050" dirty="0">
+                <a:solidFill>
+                  <a:srgbClr val="7A7F72"/>
+                </a:solidFill>
+                <a:latin typeface="Georgia" pitchFamily="34" charset="0"/>
+                <a:ea typeface="Georgia" pitchFamily="34" charset="-122"/>
+                <a:cs typeface="Georgia" pitchFamily="34" charset="-120"/>
+              </a:rPr>
+              <a:t>Long take, short take, and slow motion belong to editing, not camera. Candidates misfile them every year.</a:t>
+            </a:r>
+            <a:endParaRPr lang="en-US" sz="900" dirty="0"/>
           </a:p>
         </p:txBody>
       </p:sp>
@@ -8987,7 +9219,7 @@
                 <a:ea typeface="Arial" pitchFamily="34" charset="-122"/>
                 <a:cs typeface="Arial" pitchFamily="34" charset="-120"/>
               </a:rPr>
-              <a:t>Worth nothing. It reports an impression and offers no evidence, and every second script says it.</a:t>
+              <a:t>Worth nothing. No evidence, no effect, and every second script says it.</a:t>
             </a:r>
             <a:endParaRPr lang="en-US" sz="1300" dirty="0"/>
           </a:p>
@@ -9049,7 +9281,7 @@
                 <a:ea typeface="Georgia" pitchFamily="34" charset="-122"/>
                 <a:cs typeface="Georgia" pitchFamily="34" charset="-120"/>
               </a:rPr>
-              <a:t>The sequence cuts eleven times in thirty seconds, denying the viewer time to settle on any single face, so the chase is experienced as disorientation rather than observed from outside.</a:t>
+              <a:t>The sequence cuts eleven times in thirty seconds. The viewer never settles on one face, so the chase feels like disorientation, not observation.</a:t>
             </a:r>
             <a:endParaRPr lang="en-US" sz="2100" dirty="0"/>
           </a:p>
@@ -9064,23 +9296,43 @@
         <p:spPr>
           <a:xfrm>
             <a:off x="822960" y="5074920"/>
-            <a:ext cx="10424160" cy="548640"/>
-          </a:xfrm>
-          <a:prstGeom prst="rect">
-            <a:avLst/>
-          </a:prstGeom>
-          <a:noFill/>
-          <a:ln/>
-        </p:spPr>
-        <p:txBody>
-          <a:bodyPr wrap="square" lIns="0" tIns="0" rIns="0" bIns="0" rtlCol="0" anchor="ctr"/>
+            <a:ext cx="10424160" cy="457200"/>
+          </a:xfrm>
+          <a:prstGeom prst="rect">
+            <a:avLst/>
+          </a:prstGeom>
+          <a:noFill/>
+          <a:ln/>
+        </p:spPr>
+        <p:txBody>
+          <a:bodyPr wrap="square" lIns="0" tIns="0" rIns="0" bIns="0" rtlCol="0" anchor="t"/>
           <a:lstStyle/>
           <a:p>
             <a:pPr indent="0" marL="0">
-              <a:buNone/>
-            </a:pPr>
-            <a:r>
-              <a:rPr lang="en-US" sz="1650" i="1" dirty="0">
+              <a:lnSpc>
+                <a:spcPts val="2100"/>
+              </a:lnSpc>
+              <a:buNone/>
+            </a:pPr>
+            <a:r>
+              <a:rPr lang="en-US" sz="1350" b="1" spc="100" kern="0" dirty="0">
+                <a:solidFill>
+                  <a:srgbClr val="4A6B5D"/>
+                </a:solidFill>
+                <a:latin typeface="Arial" pitchFamily="34" charset="0"/>
+                <a:ea typeface="Arial" pitchFamily="34" charset="-122"/>
+                <a:cs typeface="Arial" pitchFamily="34" charset="-120"/>
+              </a:rPr>
+              <a:t>THE FORMULA   </a:t>
+            </a:r>
+            <a:pPr indent="0" marL="0">
+              <a:lnSpc>
+                <a:spcPts val="2100"/>
+              </a:lnSpc>
+              <a:buNone/>
+            </a:pPr>
+            <a:r>
+              <a:rPr lang="en-US" sz="1550" i="1" dirty="0">
                 <a:solidFill>
                   <a:srgbClr val="4A6B5D"/>
                 </a:solidFill>
@@ -9088,9 +9340,9 @@
                 <a:ea typeface="Georgia" pitchFamily="34" charset="-122"/>
                 <a:cs typeface="Georgia" pitchFamily="34" charset="-120"/>
               </a:rPr>
-              <a:t>A count, an effect, and a claim about the viewer's position. The count is free: you learned to take it in the first fifteen minutes of this lesson.</a:t>
-            </a:r>
-            <a:endParaRPr lang="en-US" sz="1650" dirty="0"/>
+              <a:t>A count, an effect, and a claim about the viewer. The count is free: you learned it in the first fifteen minutes.</a:t>
+            </a:r>
+            <a:endParaRPr lang="en-US" sz="1350" dirty="0"/>
           </a:p>
         </p:txBody>
       </p:sp>
